--- a/docs/대진 10base t1s.pptx
+++ b/docs/대진 10base t1s.pptx
@@ -24,6 +24,12 @@
     <p:sldId id="596" r:id="rId20"/>
     <p:sldId id="597" r:id="rId21"/>
     <p:sldId id="598" r:id="rId22"/>
+    <p:sldId id="599" r:id="rId23"/>
+    <p:sldId id="600" r:id="rId24"/>
+    <p:sldId id="601" r:id="rId25"/>
+    <p:sldId id="602" r:id="rId26"/>
+    <p:sldId id="603" r:id="rId27"/>
+    <p:sldId id="604" r:id="rId28"/>
   </p:sldIdLst>
   <p:sldSz cx="9906000" cy="6858000" type="A4"/>
   <p:notesSz cx="9926638" cy="6797675"/>
@@ -187,6 +193,253 @@
 <p:cmAuthorLst xmlns:a="http://schemas.openxmlformats.org/drawingml/2006/main" xmlns:r="http://schemas.openxmlformats.org/officeDocument/2006/relationships" xmlns:p="http://schemas.openxmlformats.org/presentationml/2006/main">
   <p:cmAuthor id="1" name="신 재혁" initials="신재" lastIdx="1" clrIdx="0"/>
 </p:cmAuthorLst>
+</file>
+
+<file path=ppt/charts/chart1.xml><?xml version="1.0" encoding="utf-8"?>
+<c:chartSpace xmlns:c="http://schemas.openxmlformats.org/drawingml/2006/chart" xmlns:a="http://schemas.openxmlformats.org/drawingml/2006/main" xmlns:r="http://schemas.openxmlformats.org/officeDocument/2006/relationships">
+  <c:date1904 val="0"/>
+  <c:chart>
+    <c:title>
+      <c:tx>
+        <c:rich>
+          <a:bodyPr/>
+          <a:lstStyle/>
+          <a:p>
+            <a:r>
+              <a:rPr sz="1100" b="1" i="0">
+                <a:solidFill>
+                  <a:srgbClr val="1E2761"/>
+                </a:solidFill>
+                <a:latin typeface="맑은 고딕"/>
+                <a:ea typeface="맑은 고딕"/>
+              </a:rPr>
+              <a:t>노드 수(N)별 최악 대기 시간 [ms] — 다른 노드가 모두 최대 프레임 송신 시</a:t>
+            </a:r>
+          </a:p>
+        </c:rich>
+      </c:tx>
+      <c:layout/>
+      <c:overlay val="0"/>
+    </c:title>
+    <c:autoTitleDeleted val="0"/>
+    <c:plotArea>
+      <c:barChart>
+        <c:barDir val="col"/>
+        <c:grouping val="clustered"/>
+        <c:ser>
+          <c:idx val="0"/>
+          <c:order val="0"/>
+          <c:tx>
+            <c:strRef>
+              <c:f>Sheet1!$B$1</c:f>
+              <c:strCache>
+                <c:ptCount val="1"/>
+                <c:pt idx="0">
+                  <c:v>최대 프레임(1518 B)</c:v>
+                </c:pt>
+              </c:strCache>
+            </c:strRef>
+          </c:tx>
+          <c:spPr>
+            <a:solidFill>
+              <a:srgbClr val="D96C00"/>
+            </a:solidFill>
+          </c:spPr>
+          <c:cat>
+            <c:strRef>
+              <c:f>Sheet1!$A$2:$A$8</c:f>
+              <c:strCache>
+                <c:ptCount val="7"/>
+                <c:pt idx="0">
+                  <c:v>2</c:v>
+                </c:pt>
+                <c:pt idx="1">
+                  <c:v>3</c:v>
+                </c:pt>
+                <c:pt idx="2">
+                  <c:v>4</c:v>
+                </c:pt>
+                <c:pt idx="3">
+                  <c:v>5</c:v>
+                </c:pt>
+                <c:pt idx="4">
+                  <c:v>6</c:v>
+                </c:pt>
+                <c:pt idx="5">
+                  <c:v>7</c:v>
+                </c:pt>
+                <c:pt idx="6">
+                  <c:v>8</c:v>
+                </c:pt>
+              </c:strCache>
+            </c:strRef>
+          </c:cat>
+          <c:val>
+            <c:numRef>
+              <c:f>Sheet1!$B$2:$B$8</c:f>
+              <c:numCache>
+                <c:formatCode>General</c:formatCode>
+                <c:ptCount val="7"/>
+                <c:pt idx="0">
+                  <c:v>1.2</c:v>
+                </c:pt>
+                <c:pt idx="1">
+                  <c:v>2.5</c:v>
+                </c:pt>
+                <c:pt idx="2">
+                  <c:v>3.7</c:v>
+                </c:pt>
+                <c:pt idx="3">
+                  <c:v>4.9</c:v>
+                </c:pt>
+                <c:pt idx="4">
+                  <c:v>6.2</c:v>
+                </c:pt>
+                <c:pt idx="5">
+                  <c:v>7.4</c:v>
+                </c:pt>
+                <c:pt idx="6">
+                  <c:v>8.6</c:v>
+                </c:pt>
+              </c:numCache>
+            </c:numRef>
+          </c:val>
+        </c:ser>
+        <c:dLbls>
+          <c:numFmt formatCode="0.0&quot; ms&quot;" sourceLinked="0"/>
+          <c:txPr>
+            <a:bodyPr/>
+            <a:lstStyle/>
+            <a:p>
+              <a:pPr>
+                <a:defRPr sz="1000" b="1">
+                  <a:solidFill>
+                    <a:srgbClr val="D96C00"/>
+                  </a:solidFill>
+                </a:defRPr>
+              </a:pPr>
+            </a:p>
+          </c:txPr>
+          <c:dLblPos val="outEnd"/>
+          <c:showLegendKey val="0"/>
+          <c:showVal val="1"/>
+          <c:showCatName val="0"/>
+          <c:showSerName val="0"/>
+          <c:showPercent val="0"/>
+          <c:showBubbleSize val="0"/>
+          <c:showLeaderLines val="1"/>
+        </c:dLbls>
+        <c:gapWidth val="60"/>
+        <c:axId val="-2068027336"/>
+        <c:axId val="-2113994440"/>
+      </c:barChart>
+      <c:catAx>
+        <c:axId val="-2068027336"/>
+        <c:scaling>
+          <c:orientation val="minMax"/>
+        </c:scaling>
+        <c:delete val="0"/>
+        <c:axPos val="b"/>
+        <c:title>
+          <c:tx>
+            <c:rich>
+              <a:bodyPr/>
+              <a:lstStyle/>
+              <a:p>
+                <a:r>
+                  <a:rPr sz="900" b="0" i="0">
+                    <a:solidFill>
+                      <a:srgbClr val="595959"/>
+                    </a:solidFill>
+                    <a:latin typeface="맑은 고딕"/>
+                    <a:ea typeface="맑은 고딕"/>
+                  </a:rPr>
+                  <a:t>노드 수 N</a:t>
+                </a:r>
+              </a:p>
+            </c:rich>
+          </c:tx>
+          <c:layout/>
+          <c:overlay val="0"/>
+        </c:title>
+        <c:majorTickMark val="out"/>
+        <c:minorTickMark val="none"/>
+        <c:tickLblPos val="nextTo"/>
+        <c:txPr>
+          <a:bodyPr/>
+          <a:lstStyle/>
+          <a:p>
+            <a:pPr>
+              <a:defRPr sz="1000">
+                <a:solidFill>
+                  <a:srgbClr val="262626"/>
+                </a:solidFill>
+              </a:defRPr>
+            </a:pPr>
+          </a:p>
+        </c:txPr>
+        <c:crossAx val="-2113994440"/>
+        <c:crosses val="autoZero"/>
+        <c:auto val="1"/>
+        <c:lblAlgn val="ctr"/>
+        <c:lblOffset val="100"/>
+        <c:noMultiLvlLbl val="0"/>
+      </c:catAx>
+      <c:valAx>
+        <c:axId val="-2113994440"/>
+        <c:scaling/>
+        <c:delete val="0"/>
+        <c:axPos val="l"/>
+        <c:majorGridlines>
+          <c:spPr>
+            <a:ln>
+              <a:solidFill>
+                <a:srgbClr val="D9D9D9"/>
+              </a:solidFill>
+            </a:ln>
+          </c:spPr>
+        </c:majorGridlines>
+        <c:majorTickMark val="out"/>
+        <c:minorTickMark val="none"/>
+        <c:tickLblPos val="nextTo"/>
+        <c:spPr>
+          <a:ln>
+            <a:noFill/>
+          </a:ln>
+        </c:spPr>
+        <c:txPr>
+          <a:bodyPr/>
+          <a:lstStyle/>
+          <a:p>
+            <a:pPr>
+              <a:defRPr sz="900">
+                <a:solidFill>
+                  <a:srgbClr val="595959"/>
+                </a:solidFill>
+              </a:defRPr>
+            </a:pPr>
+          </a:p>
+        </c:txPr>
+        <c:crossAx val="-2068027336"/>
+        <c:crosses val="autoZero"/>
+      </c:valAx>
+    </c:plotArea>
+    <c:dispBlanksAs val="gap"/>
+  </c:chart>
+  <c:txPr>
+    <a:bodyPr/>
+    <a:lstStyle/>
+    <a:p>
+      <a:pPr>
+        <a:defRPr sz="1800"/>
+      </a:pPr>
+      <a:endParaRPr lang="en-US"/>
+    </a:p>
+  </c:txPr>
+  <c:externalData r:id="rId1">
+    <c:autoUpdate val="0"/>
+  </c:externalData>
+</c:chartSpace>
 </file>
 
 <file path=ppt/handoutMasters/handoutMaster1.xml><?xml version="1.0" encoding="utf-8"?>
@@ -9042,6 +9295,5977 @@
                 <a:ea typeface="맑은 고딕"/>
               </a:rPr>
               <a:t>PLCADIAG(RXINTO/UNEXPB/BCNBFTO)로 PLCA 설정 오류 진단 루틴 추가</a:t>
+            </a:r>
+          </a:p>
+        </p:txBody>
+      </p:sp>
+    </p:spTree>
+  </p:cSld>
+  <p:clrMapOvr>
+    <a:masterClrMapping/>
+  </p:clrMapOvr>
+</p:sld>
+</file>
+
+<file path=ppt/slides/slide15.xml><?xml version="1.0" encoding="utf-8"?>
+<p:sld xmlns:a="http://schemas.openxmlformats.org/drawingml/2006/main" xmlns:p="http://schemas.openxmlformats.org/presentationml/2006/main" xmlns:r="http://schemas.openxmlformats.org/officeDocument/2006/relationships">
+  <p:cSld>
+    <p:spTree>
+      <p:nvGrpSpPr>
+        <p:cNvPr id="1" name=""/>
+        <p:cNvGrpSpPr/>
+        <p:nvPr/>
+      </p:nvGrpSpPr>
+      <p:grpSpPr/>
+      <p:sp>
+        <p:nvSpPr>
+          <p:cNvPr id="2" name="TextBox 1">
+            <a:extLst>
+              <a:ext uri="{FF2B5EF4-FFF2-40B4-BE49-F238E27FC236}">
+                <a16:creationId xmlns:a16="http://schemas.microsoft.com/office/drawing/2014/main" id="{A613762B-7392-A016-453D-54A7A34E3004}"/>
+              </a:ext>
+            </a:extLst>
+          </p:cNvPr>
+          <p:cNvSpPr txBox="1"/>
+          <p:nvPr/>
+        </p:nvSpPr>
+        <p:spPr>
+          <a:xfrm>
+            <a:off x="320040" y="109728"/>
+            <a:ext cx="8229600" cy="457200"/>
+          </a:xfrm>
+          <a:prstGeom prst="rect">
+            <a:avLst/>
+          </a:prstGeom>
+          <a:noFill/>
+        </p:spPr>
+        <p:txBody>
+          <a:bodyPr wrap="square">
+            <a:spAutoFit/>
+          </a:bodyPr>
+          <a:lstStyle/>
+          <a:p>
+            <a:pPr marL="342900" indent="-342900">
+              <a:buFont typeface="Wingdings" panose="05000000000000000000" pitchFamily="2" charset="2"/>
+              <a:buChar char="Ø"/>
+            </a:pPr>
+            <a:r>
+              <a:rPr lang="ko-KR" altLang="en-US" sz="2400" b="1" dirty="0">
+                <a:solidFill>
+                  <a:srgbClr val="1E2761"/>
+                </a:solidFill>
+                <a:latin typeface="맑은 고딕"/>
+              </a:rPr>
+              <a:t>PLCA 동작 원리와 파라미터</a:t>
+            </a:r>
+            <a:endParaRPr sz="2400" b="1" dirty="0">
+              <a:solidFill>
+                <a:srgbClr val="1E2761"/>
+              </a:solidFill>
+              <a:latin typeface="맑은 고딕"/>
+            </a:endParaRPr>
+          </a:p>
+        </p:txBody>
+      </p:sp>
+      <p:sp>
+        <p:nvSpPr>
+          <p:cNvPr id="3" name="TextBox 2"/>
+          <p:cNvSpPr txBox="1"/>
+          <p:nvPr/>
+        </p:nvSpPr>
+        <p:spPr>
+          <a:xfrm>
+            <a:off x="411480" y="731520"/>
+            <a:ext cx="9052560" cy="320040"/>
+          </a:xfrm>
+          <a:prstGeom prst="rect">
+            <a:avLst/>
+          </a:prstGeom>
+          <a:noFill/>
+        </p:spPr>
+        <p:txBody>
+          <a:bodyPr wrap="square" anchor="t" lIns="45720" rIns="45720">
+            <a:spAutoFit/>
+          </a:bodyPr>
+          <a:lstStyle/>
+          <a:p>
+            <a:pPr algn="l">
+              <a:spcAft>
+                <a:spcPts val="300"/>
+              </a:spcAft>
+            </a:pPr>
+            <a:r>
+              <a:rPr sz="1200" b="1" i="0">
+                <a:solidFill>
+                  <a:srgbClr val="1E2761"/>
+                </a:solidFill>
+                <a:latin typeface="맑은 고딕"/>
+                <a:ea typeface="맑은 고딕"/>
+              </a:rPr>
+              <a:t>1 BT(Bit Time) = 100 ns @10 Mbps — PLCA의 모든 시간 단위</a:t>
+            </a:r>
+          </a:p>
+        </p:txBody>
+      </p:sp>
+      <p:sp>
+        <p:nvSpPr>
+          <p:cNvPr id="4" name="Rectangle 3"/>
+          <p:cNvSpPr/>
+          <p:nvPr/>
+        </p:nvSpPr>
+        <p:spPr>
+          <a:xfrm>
+            <a:off x="411480" y="1188720"/>
+            <a:ext cx="1097280" cy="868680"/>
+          </a:xfrm>
+          <a:prstGeom prst="rect">
+            <a:avLst/>
+          </a:prstGeom>
+          <a:solidFill>
+            <a:srgbClr val="1E2761"/>
+          </a:solidFill>
+          <a:ln>
+            <a:noFill/>
+          </a:ln>
+          <a:effectLst/>
+        </p:spPr>
+        <p:style>
+          <a:lnRef idx="1">
+            <a:schemeClr val="accent1"/>
+          </a:lnRef>
+          <a:fillRef idx="3">
+            <a:schemeClr val="accent1"/>
+          </a:fillRef>
+          <a:effectRef idx="2">
+            <a:schemeClr val="accent1"/>
+          </a:effectRef>
+          <a:fontRef idx="minor">
+            <a:schemeClr val="lt1"/>
+          </a:fontRef>
+        </p:style>
+        <p:txBody>
+          <a:bodyPr rtlCol="0" anchor="ctr" wrap="square" lIns="27432" rIns="27432" tIns="27432" bIns="27432"/>
+          <a:lstStyle/>
+          <a:p>
+            <a:pPr algn="ctr">
+              <a:spcAft>
+                <a:spcPts val="0"/>
+              </a:spcAft>
+            </a:pPr>
+            <a:r>
+              <a:rPr sz="1100" b="1" i="0">
+                <a:solidFill>
+                  <a:srgbClr val="FFFFFF"/>
+                </a:solidFill>
+                <a:latin typeface="맑은 고딕"/>
+                <a:ea typeface="맑은 고딕"/>
+              </a:rPr>
+              <a:t>BEACON</a:t>
+            </a:r>
+          </a:p>
+          <a:p>
+            <a:pPr algn="ctr">
+              <a:spcAft>
+                <a:spcPts val="0"/>
+              </a:spcAft>
+            </a:pPr>
+            <a:r>
+              <a:rPr sz="850" b="0" i="0">
+                <a:solidFill>
+                  <a:srgbClr val="FFFFFF"/>
+                </a:solidFill>
+                <a:latin typeface="맑은 고딕"/>
+                <a:ea typeface="맑은 고딕"/>
+              </a:rPr>
+              <a:t>~20 BT</a:t>
+            </a:r>
+          </a:p>
+        </p:txBody>
+      </p:sp>
+      <p:sp>
+        <p:nvSpPr>
+          <p:cNvPr id="5" name="Rectangle 4"/>
+          <p:cNvSpPr/>
+          <p:nvPr/>
+        </p:nvSpPr>
+        <p:spPr>
+          <a:xfrm>
+            <a:off x="1563624" y="1188720"/>
+            <a:ext cx="1417320" cy="868680"/>
+          </a:xfrm>
+          <a:prstGeom prst="rect">
+            <a:avLst/>
+          </a:prstGeom>
+          <a:solidFill>
+            <a:srgbClr val="E8F3E8"/>
+          </a:solidFill>
+          <a:ln>
+            <a:noFill/>
+          </a:ln>
+          <a:effectLst/>
+        </p:spPr>
+        <p:style>
+          <a:lnRef idx="1">
+            <a:schemeClr val="accent1"/>
+          </a:lnRef>
+          <a:fillRef idx="3">
+            <a:schemeClr val="accent1"/>
+          </a:fillRef>
+          <a:effectRef idx="2">
+            <a:schemeClr val="accent1"/>
+          </a:effectRef>
+          <a:fontRef idx="minor">
+            <a:schemeClr val="lt1"/>
+          </a:fontRef>
+        </p:style>
+        <p:txBody>
+          <a:bodyPr rtlCol="0" anchor="ctr" wrap="square" lIns="27432" rIns="27432" tIns="27432" bIns="27432"/>
+          <a:lstStyle/>
+          <a:p>
+            <a:pPr algn="ctr">
+              <a:spcAft>
+                <a:spcPts val="0"/>
+              </a:spcAft>
+            </a:pPr>
+            <a:r>
+              <a:rPr sz="1100" b="1" i="0">
+                <a:solidFill>
+                  <a:srgbClr val="2E7D32"/>
+                </a:solidFill>
+                <a:latin typeface="맑은 고딕"/>
+                <a:ea typeface="맑은 고딕"/>
+              </a:rPr>
+              <a:t>ID0 TO</a:t>
+            </a:r>
+          </a:p>
+          <a:p>
+            <a:pPr algn="ctr">
+              <a:spcAft>
+                <a:spcPts val="0"/>
+              </a:spcAft>
+            </a:pPr>
+            <a:r>
+              <a:rPr sz="850" b="0" i="0">
+                <a:solidFill>
+                  <a:srgbClr val="2E7D32"/>
+                </a:solidFill>
+                <a:latin typeface="맑은 고딕"/>
+                <a:ea typeface="맑은 고딕"/>
+              </a:rPr>
+              <a:t>송신</a:t>
+            </a:r>
+          </a:p>
+        </p:txBody>
+      </p:sp>
+      <p:sp>
+        <p:nvSpPr>
+          <p:cNvPr id="6" name="Rectangle 5"/>
+          <p:cNvSpPr/>
+          <p:nvPr/>
+        </p:nvSpPr>
+        <p:spPr>
+          <a:xfrm>
+            <a:off x="3035808" y="1188720"/>
+            <a:ext cx="1051560" cy="868680"/>
+          </a:xfrm>
+          <a:prstGeom prst="rect">
+            <a:avLst/>
+          </a:prstGeom>
+          <a:solidFill>
+            <a:srgbClr val="F2F2F2"/>
+          </a:solidFill>
+          <a:ln>
+            <a:noFill/>
+          </a:ln>
+          <a:effectLst/>
+        </p:spPr>
+        <p:style>
+          <a:lnRef idx="1">
+            <a:schemeClr val="accent1"/>
+          </a:lnRef>
+          <a:fillRef idx="3">
+            <a:schemeClr val="accent1"/>
+          </a:fillRef>
+          <a:effectRef idx="2">
+            <a:schemeClr val="accent1"/>
+          </a:effectRef>
+          <a:fontRef idx="minor">
+            <a:schemeClr val="lt1"/>
+          </a:fontRef>
+        </p:style>
+        <p:txBody>
+          <a:bodyPr rtlCol="0" anchor="ctr" wrap="square" lIns="27432" rIns="27432" tIns="27432" bIns="27432"/>
+          <a:lstStyle/>
+          <a:p>
+            <a:pPr algn="ctr">
+              <a:spcAft>
+                <a:spcPts val="0"/>
+              </a:spcAft>
+            </a:pPr>
+            <a:r>
+              <a:rPr sz="1100" b="1" i="0">
+                <a:solidFill>
+                  <a:srgbClr val="595959"/>
+                </a:solidFill>
+                <a:latin typeface="맑은 고딕"/>
+                <a:ea typeface="맑은 고딕"/>
+              </a:rPr>
+              <a:t>ID1 TO</a:t>
+            </a:r>
+          </a:p>
+          <a:p>
+            <a:pPr algn="ctr">
+              <a:spcAft>
+                <a:spcPts val="0"/>
+              </a:spcAft>
+            </a:pPr>
+            <a:r>
+              <a:rPr sz="850" b="0" i="0">
+                <a:solidFill>
+                  <a:srgbClr val="595959"/>
+                </a:solidFill>
+                <a:latin typeface="맑은 고딕"/>
+                <a:ea typeface="맑은 고딕"/>
+              </a:rPr>
+              <a:t>빈 차례
+32 BT</a:t>
+            </a:r>
+          </a:p>
+        </p:txBody>
+      </p:sp>
+      <p:sp>
+        <p:nvSpPr>
+          <p:cNvPr id="7" name="Rectangle 6"/>
+          <p:cNvSpPr/>
+          <p:nvPr/>
+        </p:nvSpPr>
+        <p:spPr>
+          <a:xfrm>
+            <a:off x="4142232" y="1188720"/>
+            <a:ext cx="1417320" cy="868680"/>
+          </a:xfrm>
+          <a:prstGeom prst="rect">
+            <a:avLst/>
+          </a:prstGeom>
+          <a:solidFill>
+            <a:srgbClr val="E8F3E8"/>
+          </a:solidFill>
+          <a:ln>
+            <a:noFill/>
+          </a:ln>
+          <a:effectLst/>
+        </p:spPr>
+        <p:style>
+          <a:lnRef idx="1">
+            <a:schemeClr val="accent1"/>
+          </a:lnRef>
+          <a:fillRef idx="3">
+            <a:schemeClr val="accent1"/>
+          </a:fillRef>
+          <a:effectRef idx="2">
+            <a:schemeClr val="accent1"/>
+          </a:effectRef>
+          <a:fontRef idx="minor">
+            <a:schemeClr val="lt1"/>
+          </a:fontRef>
+        </p:style>
+        <p:txBody>
+          <a:bodyPr rtlCol="0" anchor="ctr" wrap="square" lIns="27432" rIns="27432" tIns="27432" bIns="27432"/>
+          <a:lstStyle/>
+          <a:p>
+            <a:pPr algn="ctr">
+              <a:spcAft>
+                <a:spcPts val="0"/>
+              </a:spcAft>
+            </a:pPr>
+            <a:r>
+              <a:rPr sz="1100" b="1" i="0">
+                <a:solidFill>
+                  <a:srgbClr val="2E7D32"/>
+                </a:solidFill>
+                <a:latin typeface="맑은 고딕"/>
+                <a:ea typeface="맑은 고딕"/>
+              </a:rPr>
+              <a:t>ID2 TO</a:t>
+            </a:r>
+          </a:p>
+          <a:p>
+            <a:pPr algn="ctr">
+              <a:spcAft>
+                <a:spcPts val="0"/>
+              </a:spcAft>
+            </a:pPr>
+            <a:r>
+              <a:rPr sz="850" b="0" i="0">
+                <a:solidFill>
+                  <a:srgbClr val="2E7D32"/>
+                </a:solidFill>
+                <a:latin typeface="맑은 고딕"/>
+                <a:ea typeface="맑은 고딕"/>
+              </a:rPr>
+              <a:t>송신</a:t>
+            </a:r>
+          </a:p>
+        </p:txBody>
+      </p:sp>
+      <p:sp>
+        <p:nvSpPr>
+          <p:cNvPr id="8" name="Rectangle 7"/>
+          <p:cNvSpPr/>
+          <p:nvPr/>
+        </p:nvSpPr>
+        <p:spPr>
+          <a:xfrm>
+            <a:off x="5614416" y="1188720"/>
+            <a:ext cx="548640" cy="868680"/>
+          </a:xfrm>
+          <a:prstGeom prst="rect">
+            <a:avLst/>
+          </a:prstGeom>
+          <a:solidFill>
+            <a:srgbClr val="F2F2F2"/>
+          </a:solidFill>
+          <a:ln>
+            <a:noFill/>
+          </a:ln>
+          <a:effectLst/>
+        </p:spPr>
+        <p:style>
+          <a:lnRef idx="1">
+            <a:schemeClr val="accent1"/>
+          </a:lnRef>
+          <a:fillRef idx="3">
+            <a:schemeClr val="accent1"/>
+          </a:fillRef>
+          <a:effectRef idx="2">
+            <a:schemeClr val="accent1"/>
+          </a:effectRef>
+          <a:fontRef idx="minor">
+            <a:schemeClr val="lt1"/>
+          </a:fontRef>
+        </p:style>
+        <p:txBody>
+          <a:bodyPr rtlCol="0" anchor="ctr" wrap="square" lIns="27432" rIns="27432" tIns="27432" bIns="27432"/>
+          <a:lstStyle/>
+          <a:p>
+            <a:pPr algn="ctr">
+              <a:spcAft>
+                <a:spcPts val="0"/>
+              </a:spcAft>
+            </a:pPr>
+            <a:r>
+              <a:rPr sz="1100" b="1" i="0">
+                <a:solidFill>
+                  <a:srgbClr val="595959"/>
+                </a:solidFill>
+                <a:latin typeface="맑은 고딕"/>
+                <a:ea typeface="맑은 고딕"/>
+              </a:rPr>
+              <a:t>…</a:t>
+            </a:r>
+          </a:p>
+          <a:p>
+            <a:pPr algn="ctr">
+              <a:spcAft>
+                <a:spcPts val="0"/>
+              </a:spcAft>
+            </a:pPr>
+            <a:r>
+              <a:rPr sz="850" b="0" i="0">
+                <a:solidFill>
+                  <a:srgbClr val="595959"/>
+                </a:solidFill>
+                <a:latin typeface="맑은 고딕"/>
+                <a:ea typeface="맑은 고딕"/>
+              </a:rPr>
+              <a:t/>
+            </a:r>
+          </a:p>
+        </p:txBody>
+      </p:sp>
+      <p:sp>
+        <p:nvSpPr>
+          <p:cNvPr id="9" name="Rectangle 8"/>
+          <p:cNvSpPr/>
+          <p:nvPr/>
+        </p:nvSpPr>
+        <p:spPr>
+          <a:xfrm>
+            <a:off x="6217920" y="1188720"/>
+            <a:ext cx="1051560" cy="868680"/>
+          </a:xfrm>
+          <a:prstGeom prst="rect">
+            <a:avLst/>
+          </a:prstGeom>
+          <a:solidFill>
+            <a:srgbClr val="F2F2F2"/>
+          </a:solidFill>
+          <a:ln>
+            <a:noFill/>
+          </a:ln>
+          <a:effectLst/>
+        </p:spPr>
+        <p:style>
+          <a:lnRef idx="1">
+            <a:schemeClr val="accent1"/>
+          </a:lnRef>
+          <a:fillRef idx="3">
+            <a:schemeClr val="accent1"/>
+          </a:fillRef>
+          <a:effectRef idx="2">
+            <a:schemeClr val="accent1"/>
+          </a:effectRef>
+          <a:fontRef idx="minor">
+            <a:schemeClr val="lt1"/>
+          </a:fontRef>
+        </p:style>
+        <p:txBody>
+          <a:bodyPr rtlCol="0" anchor="ctr" wrap="square" lIns="27432" rIns="27432" tIns="27432" bIns="27432"/>
+          <a:lstStyle/>
+          <a:p>
+            <a:pPr algn="ctr">
+              <a:spcAft>
+                <a:spcPts val="0"/>
+              </a:spcAft>
+            </a:pPr>
+            <a:r>
+              <a:rPr sz="1100" b="1" i="0">
+                <a:solidFill>
+                  <a:srgbClr val="595959"/>
+                </a:solidFill>
+                <a:latin typeface="맑은 고딕"/>
+                <a:ea typeface="맑은 고딕"/>
+              </a:rPr>
+              <a:t>ID N-1</a:t>
+            </a:r>
+          </a:p>
+          <a:p>
+            <a:pPr algn="ctr">
+              <a:spcAft>
+                <a:spcPts val="0"/>
+              </a:spcAft>
+            </a:pPr>
+            <a:r>
+              <a:rPr sz="850" b="0" i="0">
+                <a:solidFill>
+                  <a:srgbClr val="595959"/>
+                </a:solidFill>
+                <a:latin typeface="맑은 고딕"/>
+                <a:ea typeface="맑은 고딕"/>
+              </a:rPr>
+              <a:t>빈 차례</a:t>
+            </a:r>
+          </a:p>
+        </p:txBody>
+      </p:sp>
+      <p:sp>
+        <p:nvSpPr>
+          <p:cNvPr id="10" name="Rectangle 9"/>
+          <p:cNvSpPr/>
+          <p:nvPr/>
+        </p:nvSpPr>
+        <p:spPr>
+          <a:xfrm>
+            <a:off x="7324344" y="1188720"/>
+            <a:ext cx="1143000" cy="868680"/>
+          </a:xfrm>
+          <a:prstGeom prst="rect">
+            <a:avLst/>
+          </a:prstGeom>
+          <a:solidFill>
+            <a:srgbClr val="1E2761"/>
+          </a:solidFill>
+          <a:ln>
+            <a:noFill/>
+          </a:ln>
+          <a:effectLst/>
+        </p:spPr>
+        <p:style>
+          <a:lnRef idx="1">
+            <a:schemeClr val="accent1"/>
+          </a:lnRef>
+          <a:fillRef idx="3">
+            <a:schemeClr val="accent1"/>
+          </a:fillRef>
+          <a:effectRef idx="2">
+            <a:schemeClr val="accent1"/>
+          </a:effectRef>
+          <a:fontRef idx="minor">
+            <a:schemeClr val="lt1"/>
+          </a:fontRef>
+        </p:style>
+        <p:txBody>
+          <a:bodyPr rtlCol="0" anchor="ctr" wrap="square" lIns="27432" rIns="27432" tIns="27432" bIns="27432"/>
+          <a:lstStyle/>
+          <a:p>
+            <a:pPr algn="ctr">
+              <a:spcAft>
+                <a:spcPts val="0"/>
+              </a:spcAft>
+            </a:pPr>
+            <a:r>
+              <a:rPr sz="1100" b="1" i="0">
+                <a:solidFill>
+                  <a:srgbClr val="FFFFFF"/>
+                </a:solidFill>
+                <a:latin typeface="맑은 고딕"/>
+                <a:ea typeface="맑은 고딕"/>
+              </a:rPr>
+              <a:t>BEACON</a:t>
+            </a:r>
+          </a:p>
+          <a:p>
+            <a:pPr algn="ctr">
+              <a:spcAft>
+                <a:spcPts val="0"/>
+              </a:spcAft>
+            </a:pPr>
+            <a:r>
+              <a:rPr sz="850" b="0" i="0">
+                <a:solidFill>
+                  <a:srgbClr val="FFFFFF"/>
+                </a:solidFill>
+                <a:latin typeface="맑은 고딕"/>
+                <a:ea typeface="맑은 고딕"/>
+              </a:rPr>
+              <a:t>다음 사이클</a:t>
+            </a:r>
+          </a:p>
+        </p:txBody>
+      </p:sp>
+      <p:sp>
+        <p:nvSpPr>
+          <p:cNvPr id="11" name="TextBox 10"/>
+          <p:cNvSpPr txBox="1"/>
+          <p:nvPr/>
+        </p:nvSpPr>
+        <p:spPr>
+          <a:xfrm>
+            <a:off x="411480" y="2103120"/>
+            <a:ext cx="9052560" cy="274320"/>
+          </a:xfrm>
+          <a:prstGeom prst="rect">
+            <a:avLst/>
+          </a:prstGeom>
+          <a:noFill/>
+        </p:spPr>
+        <p:txBody>
+          <a:bodyPr wrap="square" anchor="t" lIns="45720" rIns="45720">
+            <a:spAutoFit/>
+          </a:bodyPr>
+          <a:lstStyle/>
+          <a:p>
+            <a:pPr algn="l">
+              <a:spcAft>
+                <a:spcPts val="300"/>
+              </a:spcAft>
+            </a:pPr>
+            <a:r>
+              <a:rPr sz="1000" b="0" i="0">
+                <a:solidFill>
+                  <a:srgbClr val="595959"/>
+                </a:solidFill>
+                <a:latin typeface="맑은 고딕"/>
+                <a:ea typeface="맑은 고딕"/>
+              </a:rPr>
+              <a:t>코디네이터(ID 0)가 BEACON으로 사이클 시작 → 노드별 차례(TO)에만 송신 → 물리 충돌 0, 지연 계산 가능(결정론적)</a:t>
+            </a:r>
+          </a:p>
+        </p:txBody>
+      </p:sp>
+      <p:graphicFrame>
+        <p:nvGraphicFramePr>
+          <p:cNvPr id="12" name="Table 11"/>
+          <p:cNvGraphicFramePr>
+            <a:graphicFrameLocks noGrp="1"/>
+          </p:cNvGraphicFramePr>
+          <p:nvPr/>
+        </p:nvGraphicFramePr>
+        <p:xfrm>
+          <a:off x="411480" y="2514600"/>
+          <a:ext cx="9098280" cy="2752344"/>
+        </p:xfrm>
+        <a:graphic>
+          <a:graphicData uri="http://schemas.openxmlformats.org/drawingml/2006/table">
+            <a:tbl>
+              <a:tblPr firstRow="0" bandRow="0">
+                <a:tableStyleId>{5C22544A-7EE6-4342-B048-85BDC9FD1C3A}</a:tableStyleId>
+              </a:tblPr>
+              <a:tblGrid>
+                <a:gridCol w="1691640"/>
+                <a:gridCol w="1828800"/>
+                <a:gridCol w="1417320"/>
+                <a:gridCol w="4160520"/>
+              </a:tblGrid>
+              <a:tr h="393192">
+                <a:tc>
+                  <a:txBody>
+                    <a:bodyPr wrap="square"/>
+                    <a:lstStyle/>
+                    <a:p>
+                      <a:pPr algn="l"/>
+                      <a:r>
+                        <a:rPr sz="1000" b="1" i="0">
+                          <a:solidFill>
+                            <a:srgbClr val="FFFFFF"/>
+                          </a:solidFill>
+                          <a:latin typeface="맑은 고딕"/>
+                          <a:ea typeface="맑은 고딕"/>
+                        </a:rPr>
+                        <a:t>파라미터</a:t>
+                      </a:r>
+                    </a:p>
+                  </a:txBody>
+                  <a:tcPr marL="54864" marR="54864" marT="27432" marB="27432" anchor="ctr">
+                    <a:solidFill>
+                      <a:srgbClr val="1E2761"/>
+                    </a:solidFill>
+                  </a:tcPr>
+                </a:tc>
+                <a:tc>
+                  <a:txBody>
+                    <a:bodyPr wrap="square"/>
+                    <a:lstStyle/>
+                    <a:p>
+                      <a:pPr algn="l"/>
+                      <a:r>
+                        <a:rPr sz="1000" b="1" i="0">
+                          <a:solidFill>
+                            <a:srgbClr val="FFFFFF"/>
+                          </a:solidFill>
+                          <a:latin typeface="맑은 고딕"/>
+                          <a:ea typeface="맑은 고딕"/>
+                        </a:rPr>
+                        <a:t>레지스터 (UM 5.5.1)</a:t>
+                      </a:r>
+                    </a:p>
+                  </a:txBody>
+                  <a:tcPr marL="54864" marR="54864" marT="27432" marB="27432" anchor="ctr">
+                    <a:solidFill>
+                      <a:srgbClr val="1E2761"/>
+                    </a:solidFill>
+                  </a:tcPr>
+                </a:tc>
+                <a:tc>
+                  <a:txBody>
+                    <a:bodyPr wrap="square"/>
+                    <a:lstStyle/>
+                    <a:p>
+                      <a:pPr algn="l"/>
+                      <a:r>
+                        <a:rPr sz="1000" b="1" i="0">
+                          <a:solidFill>
+                            <a:srgbClr val="FFFFFF"/>
+                          </a:solidFill>
+                          <a:latin typeface="맑은 고딕"/>
+                          <a:ea typeface="맑은 고딕"/>
+                        </a:rPr>
+                        <a:t>기본값</a:t>
+                      </a:r>
+                    </a:p>
+                  </a:txBody>
+                  <a:tcPr marL="54864" marR="54864" marT="27432" marB="27432" anchor="ctr">
+                    <a:solidFill>
+                      <a:srgbClr val="1E2761"/>
+                    </a:solidFill>
+                  </a:tcPr>
+                </a:tc>
+                <a:tc>
+                  <a:txBody>
+                    <a:bodyPr wrap="square"/>
+                    <a:lstStyle/>
+                    <a:p>
+                      <a:pPr algn="l"/>
+                      <a:r>
+                        <a:rPr sz="1000" b="1" i="0">
+                          <a:solidFill>
+                            <a:srgbClr val="FFFFFF"/>
+                          </a:solidFill>
+                          <a:latin typeface="맑은 고딕"/>
+                          <a:ea typeface="맑은 고딕"/>
+                        </a:rPr>
+                        <a:t>의미 / 주의</a:t>
+                      </a:r>
+                    </a:p>
+                  </a:txBody>
+                  <a:tcPr marL="54864" marR="54864" marT="27432" marB="27432" anchor="ctr">
+                    <a:solidFill>
+                      <a:srgbClr val="1E2761"/>
+                    </a:solidFill>
+                  </a:tcPr>
+                </a:tc>
+              </a:tr>
+              <a:tr h="393192">
+                <a:tc>
+                  <a:txBody>
+                    <a:bodyPr wrap="square"/>
+                    <a:lstStyle/>
+                    <a:p>
+                      <a:pPr algn="l"/>
+                      <a:r>
+                        <a:rPr sz="1000" b="0" i="0">
+                          <a:solidFill>
+                            <a:srgbClr val="262626"/>
+                          </a:solidFill>
+                          <a:latin typeface="맑은 고딕"/>
+                          <a:ea typeface="맑은 고딕"/>
+                        </a:rPr>
+                        <a:t>NCNT (Node Count)</a:t>
+                      </a:r>
+                    </a:p>
+                  </a:txBody>
+                  <a:tcPr marL="54864" marR="54864" marT="27432" marB="27432" anchor="ctr">
+                    <a:solidFill>
+                      <a:srgbClr val="FFFFFF"/>
+                    </a:solidFill>
+                  </a:tcPr>
+                </a:tc>
+                <a:tc>
+                  <a:txBody>
+                    <a:bodyPr wrap="square"/>
+                    <a:lstStyle/>
+                    <a:p>
+                      <a:pPr algn="l"/>
+                      <a:r>
+                        <a:rPr sz="1000" b="0" i="0">
+                          <a:solidFill>
+                            <a:srgbClr val="262626"/>
+                          </a:solidFill>
+                          <a:latin typeface="Courier New"/>
+                          <a:ea typeface="Courier New"/>
+                        </a:rPr>
+                        <a:t>PLCACTRL1[15:8]</a:t>
+                      </a:r>
+                    </a:p>
+                  </a:txBody>
+                  <a:tcPr marL="54864" marR="54864" marT="27432" marB="27432" anchor="ctr">
+                    <a:solidFill>
+                      <a:srgbClr val="FFFFFF"/>
+                    </a:solidFill>
+                  </a:tcPr>
+                </a:tc>
+                <a:tc>
+                  <a:txBody>
+                    <a:bodyPr wrap="square"/>
+                    <a:lstStyle/>
+                    <a:p>
+                      <a:pPr algn="l"/>
+                      <a:r>
+                        <a:rPr sz="1000" b="0" i="0">
+                          <a:solidFill>
+                            <a:srgbClr val="262626"/>
+                          </a:solidFill>
+                          <a:latin typeface="맑은 고딕"/>
+                          <a:ea typeface="맑은 고딕"/>
+                        </a:rPr>
+                        <a:t>8</a:t>
+                      </a:r>
+                    </a:p>
+                  </a:txBody>
+                  <a:tcPr marL="54864" marR="54864" marT="27432" marB="27432" anchor="ctr">
+                    <a:solidFill>
+                      <a:srgbClr val="FFFFFF"/>
+                    </a:solidFill>
+                  </a:tcPr>
+                </a:tc>
+                <a:tc>
+                  <a:txBody>
+                    <a:bodyPr wrap="square"/>
+                    <a:lstStyle/>
+                    <a:p>
+                      <a:pPr algn="l"/>
+                      <a:r>
+                        <a:rPr sz="1000" b="0" i="0">
+                          <a:solidFill>
+                            <a:srgbClr val="262626"/>
+                          </a:solidFill>
+                          <a:latin typeface="맑은 고딕"/>
+                          <a:ea typeface="맑은 고딕"/>
+                        </a:rPr>
+                        <a:t>한 사이클 차례 수 — 코디네이터(ID 0)에만 의미</a:t>
+                      </a:r>
+                    </a:p>
+                  </a:txBody>
+                  <a:tcPr marL="54864" marR="54864" marT="27432" marB="27432" anchor="ctr">
+                    <a:solidFill>
+                      <a:srgbClr val="FFFFFF"/>
+                    </a:solidFill>
+                  </a:tcPr>
+                </a:tc>
+              </a:tr>
+              <a:tr h="393192">
+                <a:tc>
+                  <a:txBody>
+                    <a:bodyPr wrap="square"/>
+                    <a:lstStyle/>
+                    <a:p>
+                      <a:pPr algn="l"/>
+                      <a:r>
+                        <a:rPr sz="1000" b="0" i="0">
+                          <a:solidFill>
+                            <a:srgbClr val="262626"/>
+                          </a:solidFill>
+                          <a:latin typeface="맑은 고딕"/>
+                          <a:ea typeface="맑은 고딕"/>
+                        </a:rPr>
+                        <a:t>ID (Local ID)</a:t>
+                      </a:r>
+                    </a:p>
+                  </a:txBody>
+                  <a:tcPr marL="54864" marR="54864" marT="27432" marB="27432" anchor="ctr">
+                    <a:solidFill>
+                      <a:srgbClr val="F2F2F2"/>
+                    </a:solidFill>
+                  </a:tcPr>
+                </a:tc>
+                <a:tc>
+                  <a:txBody>
+                    <a:bodyPr wrap="square"/>
+                    <a:lstStyle/>
+                    <a:p>
+                      <a:pPr algn="l"/>
+                      <a:r>
+                        <a:rPr sz="1000" b="0" i="0">
+                          <a:solidFill>
+                            <a:srgbClr val="262626"/>
+                          </a:solidFill>
+                          <a:latin typeface="Courier New"/>
+                          <a:ea typeface="Courier New"/>
+                        </a:rPr>
+                        <a:t>PLCACTRL1[7:0]</a:t>
+                      </a:r>
+                    </a:p>
+                  </a:txBody>
+                  <a:tcPr marL="54864" marR="54864" marT="27432" marB="27432" anchor="ctr">
+                    <a:solidFill>
+                      <a:srgbClr val="F2F2F2"/>
+                    </a:solidFill>
+                  </a:tcPr>
+                </a:tc>
+                <a:tc>
+                  <a:txBody>
+                    <a:bodyPr wrap="square"/>
+                    <a:lstStyle/>
+                    <a:p>
+                      <a:pPr algn="l"/>
+                      <a:r>
+                        <a:rPr sz="1000" b="0" i="0">
+                          <a:solidFill>
+                            <a:srgbClr val="262626"/>
+                          </a:solidFill>
+                          <a:latin typeface="맑은 고딕"/>
+                          <a:ea typeface="맑은 고딕"/>
+                        </a:rPr>
+                        <a:t>0xFF (PLCA 끔)</a:t>
+                      </a:r>
+                    </a:p>
+                  </a:txBody>
+                  <a:tcPr marL="54864" marR="54864" marT="27432" marB="27432" anchor="ctr">
+                    <a:solidFill>
+                      <a:srgbClr val="F2F2F2"/>
+                    </a:solidFill>
+                  </a:tcPr>
+                </a:tc>
+                <a:tc>
+                  <a:txBody>
+                    <a:bodyPr wrap="square"/>
+                    <a:lstStyle/>
+                    <a:p>
+                      <a:pPr algn="l"/>
+                      <a:r>
+                        <a:rPr sz="1000" b="0" i="0">
+                          <a:solidFill>
+                            <a:srgbClr val="262626"/>
+                          </a:solidFill>
+                          <a:latin typeface="맑은 고딕"/>
+                          <a:ea typeface="맑은 고딕"/>
+                        </a:rPr>
+                        <a:t>내 차례 번호, 0 = 코디네이터, ECU마다 고유</a:t>
+                      </a:r>
+                    </a:p>
+                  </a:txBody>
+                  <a:tcPr marL="54864" marR="54864" marT="27432" marB="27432" anchor="ctr">
+                    <a:solidFill>
+                      <a:srgbClr val="F2F2F2"/>
+                    </a:solidFill>
+                  </a:tcPr>
+                </a:tc>
+              </a:tr>
+              <a:tr h="393192">
+                <a:tc>
+                  <a:txBody>
+                    <a:bodyPr wrap="square"/>
+                    <a:lstStyle/>
+                    <a:p>
+                      <a:pPr algn="l"/>
+                      <a:r>
+                        <a:rPr sz="1000" b="0" i="0">
+                          <a:solidFill>
+                            <a:srgbClr val="262626"/>
+                          </a:solidFill>
+                          <a:latin typeface="맑은 고딕"/>
+                          <a:ea typeface="맑은 고딕"/>
+                        </a:rPr>
+                        <a:t>TO_TIMER</a:t>
+                      </a:r>
+                    </a:p>
+                  </a:txBody>
+                  <a:tcPr marL="54864" marR="54864" marT="27432" marB="27432" anchor="ctr">
+                    <a:solidFill>
+                      <a:srgbClr val="FFFFFF"/>
+                    </a:solidFill>
+                  </a:tcPr>
+                </a:tc>
+                <a:tc>
+                  <a:txBody>
+                    <a:bodyPr wrap="square"/>
+                    <a:lstStyle/>
+                    <a:p>
+                      <a:pPr algn="l"/>
+                      <a:r>
+                        <a:rPr sz="1000" b="0" i="0">
+                          <a:solidFill>
+                            <a:srgbClr val="262626"/>
+                          </a:solidFill>
+                          <a:latin typeface="Courier New"/>
+                          <a:ea typeface="Courier New"/>
+                        </a:rPr>
+                        <a:t>PLCATOTMR[7:0]</a:t>
+                      </a:r>
+                    </a:p>
+                  </a:txBody>
+                  <a:tcPr marL="54864" marR="54864" marT="27432" marB="27432" anchor="ctr">
+                    <a:solidFill>
+                      <a:srgbClr val="FFFFFF"/>
+                    </a:solidFill>
+                  </a:tcPr>
+                </a:tc>
+                <a:tc>
+                  <a:txBody>
+                    <a:bodyPr wrap="square"/>
+                    <a:lstStyle/>
+                    <a:p>
+                      <a:pPr algn="l"/>
+                      <a:r>
+                        <a:rPr sz="1000" b="0" i="0">
+                          <a:solidFill>
+                            <a:srgbClr val="262626"/>
+                          </a:solidFill>
+                          <a:latin typeface="맑은 고딕"/>
+                          <a:ea typeface="맑은 고딕"/>
+                        </a:rPr>
+                        <a:t>32 BT = 3.2 µs</a:t>
+                      </a:r>
+                    </a:p>
+                  </a:txBody>
+                  <a:tcPr marL="54864" marR="54864" marT="27432" marB="27432" anchor="ctr">
+                    <a:solidFill>
+                      <a:srgbClr val="FFFFFF"/>
+                    </a:solidFill>
+                  </a:tcPr>
+                </a:tc>
+                <a:tc>
+                  <a:txBody>
+                    <a:bodyPr wrap="square"/>
+                    <a:lstStyle/>
+                    <a:p>
+                      <a:pPr algn="l"/>
+                      <a:r>
+                        <a:rPr sz="1000" b="0" i="0">
+                          <a:solidFill>
+                            <a:srgbClr val="262626"/>
+                          </a:solidFill>
+                          <a:latin typeface="맑은 고딕"/>
+                          <a:ea typeface="맑은 고딕"/>
+                        </a:rPr>
+                        <a:t>빈 차례 대기 시간 — 네트워크 전체 동일 값</a:t>
+                      </a:r>
+                    </a:p>
+                  </a:txBody>
+                  <a:tcPr marL="54864" marR="54864" marT="27432" marB="27432" anchor="ctr">
+                    <a:solidFill>
+                      <a:srgbClr val="FFFFFF"/>
+                    </a:solidFill>
+                  </a:tcPr>
+                </a:tc>
+              </a:tr>
+              <a:tr h="393192">
+                <a:tc>
+                  <a:txBody>
+                    <a:bodyPr wrap="square"/>
+                    <a:lstStyle/>
+                    <a:p>
+                      <a:pPr algn="l"/>
+                      <a:r>
+                        <a:rPr sz="1000" b="0" i="0">
+                          <a:solidFill>
+                            <a:srgbClr val="262626"/>
+                          </a:solidFill>
+                          <a:latin typeface="맑은 고딕"/>
+                          <a:ea typeface="맑은 고딕"/>
+                        </a:rPr>
+                        <a:t>MAXBC</a:t>
+                      </a:r>
+                    </a:p>
+                  </a:txBody>
+                  <a:tcPr marL="54864" marR="54864" marT="27432" marB="27432" anchor="ctr">
+                    <a:solidFill>
+                      <a:srgbClr val="F2F2F2"/>
+                    </a:solidFill>
+                  </a:tcPr>
+                </a:tc>
+                <a:tc>
+                  <a:txBody>
+                    <a:bodyPr wrap="square"/>
+                    <a:lstStyle/>
+                    <a:p>
+                      <a:pPr algn="l"/>
+                      <a:r>
+                        <a:rPr sz="1000" b="0" i="0">
+                          <a:solidFill>
+                            <a:srgbClr val="262626"/>
+                          </a:solidFill>
+                          <a:latin typeface="Courier New"/>
+                          <a:ea typeface="Courier New"/>
+                        </a:rPr>
+                        <a:t>PLCABURST[15:8]</a:t>
+                      </a:r>
+                    </a:p>
+                  </a:txBody>
+                  <a:tcPr marL="54864" marR="54864" marT="27432" marB="27432" anchor="ctr">
+                    <a:solidFill>
+                      <a:srgbClr val="F2F2F2"/>
+                    </a:solidFill>
+                  </a:tcPr>
+                </a:tc>
+                <a:tc>
+                  <a:txBody>
+                    <a:bodyPr wrap="square"/>
+                    <a:lstStyle/>
+                    <a:p>
+                      <a:pPr algn="l"/>
+                      <a:r>
+                        <a:rPr sz="1000" b="0" i="0">
+                          <a:solidFill>
+                            <a:srgbClr val="262626"/>
+                          </a:solidFill>
+                          <a:latin typeface="맑은 고딕"/>
+                          <a:ea typeface="맑은 고딕"/>
+                        </a:rPr>
+                        <a:t>0</a:t>
+                      </a:r>
+                    </a:p>
+                  </a:txBody>
+                  <a:tcPr marL="54864" marR="54864" marT="27432" marB="27432" anchor="ctr">
+                    <a:solidFill>
+                      <a:srgbClr val="F2F2F2"/>
+                    </a:solidFill>
+                  </a:tcPr>
+                </a:tc>
+                <a:tc>
+                  <a:txBody>
+                    <a:bodyPr wrap="square"/>
+                    <a:lstStyle/>
+                    <a:p>
+                      <a:pPr algn="l"/>
+                      <a:r>
+                        <a:rPr sz="1000" b="0" i="0">
+                          <a:solidFill>
+                            <a:srgbClr val="262626"/>
+                          </a:solidFill>
+                          <a:latin typeface="맑은 고딕"/>
+                          <a:ea typeface="맑은 고딕"/>
+                        </a:rPr>
+                        <a:t>한 차례 추가 전송 프레임 수 (Burst)</a:t>
+                      </a:r>
+                    </a:p>
+                  </a:txBody>
+                  <a:tcPr marL="54864" marR="54864" marT="27432" marB="27432" anchor="ctr">
+                    <a:solidFill>
+                      <a:srgbClr val="F2F2F2"/>
+                    </a:solidFill>
+                  </a:tcPr>
+                </a:tc>
+              </a:tr>
+              <a:tr h="393192">
+                <a:tc>
+                  <a:txBody>
+                    <a:bodyPr wrap="square"/>
+                    <a:lstStyle/>
+                    <a:p>
+                      <a:pPr algn="l"/>
+                      <a:r>
+                        <a:rPr sz="1000" b="0" i="0">
+                          <a:solidFill>
+                            <a:srgbClr val="262626"/>
+                          </a:solidFill>
+                          <a:latin typeface="맑은 고딕"/>
+                          <a:ea typeface="맑은 고딕"/>
+                        </a:rPr>
+                        <a:t>BTMR</a:t>
+                      </a:r>
+                    </a:p>
+                  </a:txBody>
+                  <a:tcPr marL="54864" marR="54864" marT="27432" marB="27432" anchor="ctr">
+                    <a:solidFill>
+                      <a:srgbClr val="FFFFFF"/>
+                    </a:solidFill>
+                  </a:tcPr>
+                </a:tc>
+                <a:tc>
+                  <a:txBody>
+                    <a:bodyPr wrap="square"/>
+                    <a:lstStyle/>
+                    <a:p>
+                      <a:pPr algn="l"/>
+                      <a:r>
+                        <a:rPr sz="1000" b="0" i="0">
+                          <a:solidFill>
+                            <a:srgbClr val="262626"/>
+                          </a:solidFill>
+                          <a:latin typeface="Courier New"/>
+                          <a:ea typeface="Courier New"/>
+                        </a:rPr>
+                        <a:t>PLCABURST[7:0]</a:t>
+                      </a:r>
+                    </a:p>
+                  </a:txBody>
+                  <a:tcPr marL="54864" marR="54864" marT="27432" marB="27432" anchor="ctr">
+                    <a:solidFill>
+                      <a:srgbClr val="FFFFFF"/>
+                    </a:solidFill>
+                  </a:tcPr>
+                </a:tc>
+                <a:tc>
+                  <a:txBody>
+                    <a:bodyPr wrap="square"/>
+                    <a:lstStyle/>
+                    <a:p>
+                      <a:pPr algn="l"/>
+                      <a:r>
+                        <a:rPr sz="1000" b="0" i="0">
+                          <a:solidFill>
+                            <a:srgbClr val="262626"/>
+                          </a:solidFill>
+                          <a:latin typeface="맑은 고딕"/>
+                          <a:ea typeface="맑은 고딕"/>
+                        </a:rPr>
+                        <a:t>128 BT</a:t>
+                      </a:r>
+                    </a:p>
+                  </a:txBody>
+                  <a:tcPr marL="54864" marR="54864" marT="27432" marB="27432" anchor="ctr">
+                    <a:solidFill>
+                      <a:srgbClr val="FFFFFF"/>
+                    </a:solidFill>
+                  </a:tcPr>
+                </a:tc>
+                <a:tc>
+                  <a:txBody>
+                    <a:bodyPr wrap="square"/>
+                    <a:lstStyle/>
+                    <a:p>
+                      <a:pPr algn="l"/>
+                      <a:r>
+                        <a:rPr sz="1000" b="0" i="0">
+                          <a:solidFill>
+                            <a:srgbClr val="262626"/>
+                          </a:solidFill>
+                          <a:latin typeface="맑은 고딕"/>
+                          <a:ea typeface="맑은 고딕"/>
+                        </a:rPr>
+                        <a:t>Burst 시 다음 프레임 대기 (≥ IFG 96 BT)</a:t>
+                      </a:r>
+                    </a:p>
+                  </a:txBody>
+                  <a:tcPr marL="54864" marR="54864" marT="27432" marB="27432" anchor="ctr">
+                    <a:solidFill>
+                      <a:srgbClr val="FFFFFF"/>
+                    </a:solidFill>
+                  </a:tcPr>
+                </a:tc>
+              </a:tr>
+              <a:tr h="393192">
+                <a:tc>
+                  <a:txBody>
+                    <a:bodyPr wrap="square"/>
+                    <a:lstStyle/>
+                    <a:p>
+                      <a:pPr algn="l"/>
+                      <a:r>
+                        <a:rPr sz="1000" b="0" i="0">
+                          <a:solidFill>
+                            <a:srgbClr val="262626"/>
+                          </a:solidFill>
+                          <a:latin typeface="맑은 고딕"/>
+                          <a:ea typeface="맑은 고딕"/>
+                        </a:rPr>
+                        <a:t>EN / RST</a:t>
+                      </a:r>
+                    </a:p>
+                  </a:txBody>
+                  <a:tcPr marL="54864" marR="54864" marT="27432" marB="27432" anchor="ctr">
+                    <a:solidFill>
+                      <a:srgbClr val="F2F2F2"/>
+                    </a:solidFill>
+                  </a:tcPr>
+                </a:tc>
+                <a:tc>
+                  <a:txBody>
+                    <a:bodyPr wrap="square"/>
+                    <a:lstStyle/>
+                    <a:p>
+                      <a:pPr algn="l"/>
+                      <a:r>
+                        <a:rPr sz="1000" b="0" i="0">
+                          <a:solidFill>
+                            <a:srgbClr val="262626"/>
+                          </a:solidFill>
+                          <a:latin typeface="Courier New"/>
+                          <a:ea typeface="Courier New"/>
+                        </a:rPr>
+                        <a:t>PLCACTRL0[15] / [14]</a:t>
+                      </a:r>
+                    </a:p>
+                  </a:txBody>
+                  <a:tcPr marL="54864" marR="54864" marT="27432" marB="27432" anchor="ctr">
+                    <a:solidFill>
+                      <a:srgbClr val="F2F2F2"/>
+                    </a:solidFill>
+                  </a:tcPr>
+                </a:tc>
+                <a:tc>
+                  <a:txBody>
+                    <a:bodyPr wrap="square"/>
+                    <a:lstStyle/>
+                    <a:p>
+                      <a:pPr algn="l"/>
+                      <a:r>
+                        <a:rPr sz="1000" b="0" i="0">
+                          <a:solidFill>
+                            <a:srgbClr val="262626"/>
+                          </a:solidFill>
+                          <a:latin typeface="맑은 고딕"/>
+                          <a:ea typeface="맑은 고딕"/>
+                        </a:rPr>
+                        <a:t>0 / 0</a:t>
+                      </a:r>
+                    </a:p>
+                  </a:txBody>
+                  <a:tcPr marL="54864" marR="54864" marT="27432" marB="27432" anchor="ctr">
+                    <a:solidFill>
+                      <a:srgbClr val="F2F2F2"/>
+                    </a:solidFill>
+                  </a:tcPr>
+                </a:tc>
+                <a:tc>
+                  <a:txBody>
+                    <a:bodyPr wrap="square"/>
+                    <a:lstStyle/>
+                    <a:p>
+                      <a:pPr algn="l"/>
+                      <a:r>
+                        <a:rPr sz="1000" b="0" i="0">
+                          <a:solidFill>
+                            <a:srgbClr val="262626"/>
+                          </a:solidFill>
+                          <a:latin typeface="맑은 고딕"/>
+                          <a:ea typeface="맑은 고딕"/>
+                        </a:rPr>
+                        <a:t>PLCA 켜기 / PLCA RS 리셋</a:t>
+                      </a:r>
+                    </a:p>
+                  </a:txBody>
+                  <a:tcPr marL="54864" marR="54864" marT="27432" marB="27432" anchor="ctr">
+                    <a:solidFill>
+                      <a:srgbClr val="F2F2F2"/>
+                    </a:solidFill>
+                  </a:tcPr>
+                </a:tc>
+              </a:tr>
+            </a:tbl>
+          </a:graphicData>
+        </a:graphic>
+      </p:graphicFrame>
+      <p:sp>
+        <p:nvSpPr>
+          <p:cNvPr id="13" name="Rounded Rectangle 12"/>
+          <p:cNvSpPr/>
+          <p:nvPr/>
+        </p:nvSpPr>
+        <p:spPr>
+          <a:xfrm>
+            <a:off x="411480" y="5440680"/>
+            <a:ext cx="9098280" cy="457200"/>
+          </a:xfrm>
+          <a:prstGeom prst="roundRect">
+            <a:avLst>
+              <a:gd name="adj" fmla="val 8000"/>
+            </a:avLst>
+          </a:prstGeom>
+          <a:solidFill>
+            <a:srgbClr val="E8EBF5"/>
+          </a:solidFill>
+          <a:ln>
+            <a:noFill/>
+          </a:ln>
+          <a:effectLst/>
+        </p:spPr>
+        <p:style>
+          <a:lnRef idx="1">
+            <a:schemeClr val="accent1"/>
+          </a:lnRef>
+          <a:fillRef idx="3">
+            <a:schemeClr val="accent1"/>
+          </a:fillRef>
+          <a:effectRef idx="2">
+            <a:schemeClr val="accent1"/>
+          </a:effectRef>
+          <a:fontRef idx="minor">
+            <a:schemeClr val="lt1"/>
+          </a:fontRef>
+        </p:style>
+        <p:txBody>
+          <a:bodyPr rtlCol="0" anchor="ctr" wrap="square" lIns="73152" rIns="73152" tIns="73152" bIns="73152"/>
+          <a:lstStyle/>
+          <a:p>
+            <a:pPr algn="l">
+              <a:spcAft>
+                <a:spcPts val="300"/>
+              </a:spcAft>
+            </a:pPr>
+            <a:r>
+              <a:rPr sz="1050" b="1" i="0">
+                <a:solidFill>
+                  <a:srgbClr val="1E2761"/>
+                </a:solidFill>
+                <a:latin typeface="맑은 고딕"/>
+                <a:ea typeface="맑은 고딕"/>
+              </a:rPr>
+              <a:t>CAN과 비교: </a:t>
+            </a:r>
+            <a:r>
+              <a:rPr sz="1050" b="0" i="0">
+                <a:solidFill>
+                  <a:srgbClr val="262626"/>
+                </a:solidFill>
+                <a:latin typeface="맑은 고딕"/>
+                <a:ea typeface="맑은 고딕"/>
+              </a:rPr>
+              <a:t>CAN = ID 우선순위 중재(낮은 ID가 항상 이김) / PLCA = 라운드로빈(공평하게 돌아가며). 우선순위가 필요하면 Burst 또는 Precedence 모드(UM 5.4.3)</a:t>
+            </a:r>
+          </a:p>
+        </p:txBody>
+      </p:sp>
+    </p:spTree>
+  </p:cSld>
+  <p:clrMapOvr>
+    <a:masterClrMapping/>
+  </p:clrMapOvr>
+</p:sld>
+</file>
+
+<file path=ppt/slides/slide16.xml><?xml version="1.0" encoding="utf-8"?>
+<p:sld xmlns:a="http://schemas.openxmlformats.org/drawingml/2006/main" xmlns:p="http://schemas.openxmlformats.org/presentationml/2006/main" xmlns:r="http://schemas.openxmlformats.org/officeDocument/2006/relationships">
+  <p:cSld>
+    <p:spTree>
+      <p:nvGrpSpPr>
+        <p:cNvPr id="1" name=""/>
+        <p:cNvGrpSpPr/>
+        <p:nvPr/>
+      </p:nvGrpSpPr>
+      <p:grpSpPr/>
+      <p:sp>
+        <p:nvSpPr>
+          <p:cNvPr id="2" name="TextBox 1">
+            <a:extLst>
+              <a:ext uri="{FF2B5EF4-FFF2-40B4-BE49-F238E27FC236}">
+                <a16:creationId xmlns:a16="http://schemas.microsoft.com/office/drawing/2014/main" id="{A613762B-7392-A016-453D-54A7A34E3004}"/>
+              </a:ext>
+            </a:extLst>
+          </p:cNvPr>
+          <p:cNvSpPr txBox="1"/>
+          <p:nvPr/>
+        </p:nvSpPr>
+        <p:spPr>
+          <a:xfrm>
+            <a:off x="320040" y="109728"/>
+            <a:ext cx="8229600" cy="457200"/>
+          </a:xfrm>
+          <a:prstGeom prst="rect">
+            <a:avLst/>
+          </a:prstGeom>
+          <a:noFill/>
+        </p:spPr>
+        <p:txBody>
+          <a:bodyPr wrap="square">
+            <a:spAutoFit/>
+          </a:bodyPr>
+          <a:lstStyle/>
+          <a:p>
+            <a:pPr marL="342900" indent="-342900">
+              <a:buFont typeface="Wingdings" panose="05000000000000000000" pitchFamily="2" charset="2"/>
+              <a:buChar char="Ø"/>
+            </a:pPr>
+            <a:r>
+              <a:rPr lang="ko-KR" altLang="en-US" sz="2400" b="1" dirty="0">
+                <a:solidFill>
+                  <a:srgbClr val="1E2761"/>
+                </a:solidFill>
+                <a:latin typeface="맑은 고딕"/>
+              </a:rPr>
+              <a:t>PLCA 타이밍 계산: 최악 지연</a:t>
+            </a:r>
+            <a:endParaRPr sz="2400" b="1" dirty="0">
+              <a:solidFill>
+                <a:srgbClr val="1E2761"/>
+              </a:solidFill>
+              <a:latin typeface="맑은 고딕"/>
+            </a:endParaRPr>
+          </a:p>
+        </p:txBody>
+      </p:sp>
+      <p:sp>
+        <p:nvSpPr>
+          <p:cNvPr id="3" name="Rounded Rectangle 2"/>
+          <p:cNvSpPr/>
+          <p:nvPr/>
+        </p:nvSpPr>
+        <p:spPr>
+          <a:xfrm>
+            <a:off x="411480" y="777240"/>
+            <a:ext cx="3017520" cy="1115568"/>
+          </a:xfrm>
+          <a:prstGeom prst="roundRect">
+            <a:avLst>
+              <a:gd name="adj" fmla="val 8000"/>
+            </a:avLst>
+          </a:prstGeom>
+          <a:solidFill>
+            <a:srgbClr val="E8F3E8"/>
+          </a:solidFill>
+          <a:ln>
+            <a:noFill/>
+          </a:ln>
+          <a:effectLst/>
+        </p:spPr>
+        <p:style>
+          <a:lnRef idx="1">
+            <a:schemeClr val="accent1"/>
+          </a:lnRef>
+          <a:fillRef idx="3">
+            <a:schemeClr val="accent1"/>
+          </a:fillRef>
+          <a:effectRef idx="2">
+            <a:schemeClr val="accent1"/>
+          </a:effectRef>
+          <a:fontRef idx="minor">
+            <a:schemeClr val="lt1"/>
+          </a:fontRef>
+        </p:style>
+        <p:txBody>
+          <a:bodyPr rtlCol="0" anchor="ctr" wrap="square" lIns="73152" rIns="73152" tIns="73152" bIns="73152"/>
+          <a:lstStyle/>
+          <a:p>
+            <a:pPr algn="l">
+              <a:spcAft>
+                <a:spcPts val="0"/>
+              </a:spcAft>
+            </a:pPr>
+            <a:r>
+              <a:rPr sz="1100" b="1" i="0">
+                <a:solidFill>
+                  <a:srgbClr val="2E7D32"/>
+                </a:solidFill>
+                <a:latin typeface="맑은 고딕"/>
+                <a:ea typeface="맑은 고딕"/>
+              </a:rPr>
+              <a:t>빈 사이클</a:t>
+            </a:r>
+          </a:p>
+          <a:p>
+            <a:pPr algn="l">
+              <a:spcAft>
+                <a:spcPts val="0"/>
+              </a:spcAft>
+            </a:pPr>
+            <a:r>
+              <a:rPr sz="2400" b="1" i="0">
+                <a:solidFill>
+                  <a:srgbClr val="2E7D32"/>
+                </a:solidFill>
+                <a:latin typeface="맑은 고딕"/>
+                <a:ea typeface="맑은 고딕"/>
+              </a:rPr>
+              <a:t>≈ 27.6 µs</a:t>
+            </a:r>
+          </a:p>
+          <a:p>
+            <a:pPr algn="l">
+              <a:spcAft>
+                <a:spcPts val="0"/>
+              </a:spcAft>
+            </a:pPr>
+            <a:r>
+              <a:rPr sz="900" b="0" i="0">
+                <a:solidFill>
+                  <a:srgbClr val="595959"/>
+                </a:solidFill>
+                <a:latin typeface="Courier New"/>
+                <a:ea typeface="Courier New"/>
+              </a:rPr>
+              <a:t>BEACON 20 + 8 × 32 BT
+= 276 BT</a:t>
+            </a:r>
+          </a:p>
+        </p:txBody>
+      </p:sp>
+      <p:sp>
+        <p:nvSpPr>
+          <p:cNvPr id="4" name="Rounded Rectangle 3"/>
+          <p:cNvSpPr/>
+          <p:nvPr/>
+        </p:nvSpPr>
+        <p:spPr>
+          <a:xfrm>
+            <a:off x="411480" y="2011680"/>
+            <a:ext cx="3017520" cy="1115568"/>
+          </a:xfrm>
+          <a:prstGeom prst="roundRect">
+            <a:avLst>
+              <a:gd name="adj" fmla="val 8000"/>
+            </a:avLst>
+          </a:prstGeom>
+          <a:solidFill>
+            <a:srgbClr val="FDF0E2"/>
+          </a:solidFill>
+          <a:ln>
+            <a:noFill/>
+          </a:ln>
+          <a:effectLst/>
+        </p:spPr>
+        <p:style>
+          <a:lnRef idx="1">
+            <a:schemeClr val="accent1"/>
+          </a:lnRef>
+          <a:fillRef idx="3">
+            <a:schemeClr val="accent1"/>
+          </a:fillRef>
+          <a:effectRef idx="2">
+            <a:schemeClr val="accent1"/>
+          </a:effectRef>
+          <a:fontRef idx="minor">
+            <a:schemeClr val="lt1"/>
+          </a:fontRef>
+        </p:style>
+        <p:txBody>
+          <a:bodyPr rtlCol="0" anchor="ctr" wrap="square" lIns="73152" rIns="73152" tIns="73152" bIns="73152"/>
+          <a:lstStyle/>
+          <a:p>
+            <a:pPr algn="l">
+              <a:spcAft>
+                <a:spcPts val="0"/>
+              </a:spcAft>
+            </a:pPr>
+            <a:r>
+              <a:rPr sz="1100" b="1" i="0">
+                <a:solidFill>
+                  <a:srgbClr val="D96C00"/>
+                </a:solidFill>
+                <a:latin typeface="맑은 고딕"/>
+                <a:ea typeface="맑은 고딕"/>
+              </a:rPr>
+              <a:t>최대 프레임 1개</a:t>
+            </a:r>
+          </a:p>
+          <a:p>
+            <a:pPr algn="l">
+              <a:spcAft>
+                <a:spcPts val="0"/>
+              </a:spcAft>
+            </a:pPr>
+            <a:r>
+              <a:rPr sz="2400" b="1" i="0">
+                <a:solidFill>
+                  <a:srgbClr val="D96C00"/>
+                </a:solidFill>
+                <a:latin typeface="맑은 고딕"/>
+                <a:ea typeface="맑은 고딕"/>
+              </a:rPr>
+              <a:t>≈ 1.23 ms</a:t>
+            </a:r>
+          </a:p>
+          <a:p>
+            <a:pPr algn="l">
+              <a:spcAft>
+                <a:spcPts val="0"/>
+              </a:spcAft>
+            </a:pPr>
+            <a:r>
+              <a:rPr sz="900" b="0" i="0">
+                <a:solidFill>
+                  <a:srgbClr val="595959"/>
+                </a:solidFill>
+                <a:latin typeface="Courier New"/>
+                <a:ea typeface="Courier New"/>
+              </a:rPr>
+              <a:t>(8 + 1518) B × 8 + IFG 96
+≈ 12,300 BT</a:t>
+            </a:r>
+          </a:p>
+        </p:txBody>
+      </p:sp>
+      <p:sp>
+        <p:nvSpPr>
+          <p:cNvPr id="5" name="Rounded Rectangle 4"/>
+          <p:cNvSpPr/>
+          <p:nvPr/>
+        </p:nvSpPr>
+        <p:spPr>
+          <a:xfrm>
+            <a:off x="411480" y="3246120"/>
+            <a:ext cx="3017520" cy="1115568"/>
+          </a:xfrm>
+          <a:prstGeom prst="roundRect">
+            <a:avLst>
+              <a:gd name="adj" fmla="val 8000"/>
+            </a:avLst>
+          </a:prstGeom>
+          <a:solidFill>
+            <a:srgbClr val="E8EBF5"/>
+          </a:solidFill>
+          <a:ln>
+            <a:noFill/>
+          </a:ln>
+          <a:effectLst/>
+        </p:spPr>
+        <p:style>
+          <a:lnRef idx="1">
+            <a:schemeClr val="accent1"/>
+          </a:lnRef>
+          <a:fillRef idx="3">
+            <a:schemeClr val="accent1"/>
+          </a:fillRef>
+          <a:effectRef idx="2">
+            <a:schemeClr val="accent1"/>
+          </a:effectRef>
+          <a:fontRef idx="minor">
+            <a:schemeClr val="lt1"/>
+          </a:fontRef>
+        </p:style>
+        <p:txBody>
+          <a:bodyPr rtlCol="0" anchor="ctr" wrap="square" lIns="73152" rIns="73152" tIns="73152" bIns="73152"/>
+          <a:lstStyle/>
+          <a:p>
+            <a:pPr algn="l">
+              <a:spcAft>
+                <a:spcPts val="0"/>
+              </a:spcAft>
+            </a:pPr>
+            <a:r>
+              <a:rPr sz="1100" b="1" i="0">
+                <a:solidFill>
+                  <a:srgbClr val="1E2761"/>
+                </a:solidFill>
+                <a:latin typeface="맑은 고딕"/>
+                <a:ea typeface="맑은 고딕"/>
+              </a:rPr>
+              <a:t>최소 프레임 1개</a:t>
+            </a:r>
+          </a:p>
+          <a:p>
+            <a:pPr algn="l">
+              <a:spcAft>
+                <a:spcPts val="0"/>
+              </a:spcAft>
+            </a:pPr>
+            <a:r>
+              <a:rPr sz="2400" b="1" i="0">
+                <a:solidFill>
+                  <a:srgbClr val="1E2761"/>
+                </a:solidFill>
+                <a:latin typeface="맑은 고딕"/>
+                <a:ea typeface="맑은 고딕"/>
+              </a:rPr>
+              <a:t>≈ 67 µs</a:t>
+            </a:r>
+          </a:p>
+          <a:p>
+            <a:pPr algn="l">
+              <a:spcAft>
+                <a:spcPts val="0"/>
+              </a:spcAft>
+            </a:pPr>
+            <a:r>
+              <a:rPr sz="900" b="0" i="0">
+                <a:solidFill>
+                  <a:srgbClr val="595959"/>
+                </a:solidFill>
+                <a:latin typeface="Courier New"/>
+                <a:ea typeface="Courier New"/>
+              </a:rPr>
+              <a:t>(8 + 64) B × 8 + IFG 96
+= 672 BT</a:t>
+            </a:r>
+          </a:p>
+        </p:txBody>
+      </p:sp>
+      <p:graphicFrame>
+        <p:nvGraphicFramePr>
+          <p:cNvPr id="6" name="Chart 5"/>
+          <p:cNvGraphicFramePr>
+            <a:graphicFrameLocks noGrp="1"/>
+          </p:cNvGraphicFramePr>
+          <p:nvPr/>
+        </p:nvGraphicFramePr>
+        <p:xfrm>
+          <a:off x="3657600" y="777240"/>
+          <a:ext cx="5852160" cy="3566160"/>
+        </p:xfrm>
+        <a:graphic>
+          <a:graphicData uri="http://schemas.openxmlformats.org/drawingml/2006/chart">
+            <c:chart xmlns:c="http://schemas.openxmlformats.org/drawingml/2006/chart" r:id="rId2"/>
+          </a:graphicData>
+        </a:graphic>
+      </p:graphicFrame>
+      <p:sp>
+        <p:nvSpPr>
+          <p:cNvPr id="7" name="Rounded Rectangle 6"/>
+          <p:cNvSpPr/>
+          <p:nvPr/>
+        </p:nvSpPr>
+        <p:spPr>
+          <a:xfrm>
+            <a:off x="3657600" y="4526280"/>
+            <a:ext cx="5852160" cy="1371600"/>
+          </a:xfrm>
+          <a:prstGeom prst="roundRect">
+            <a:avLst>
+              <a:gd name="adj" fmla="val 8000"/>
+            </a:avLst>
+          </a:prstGeom>
+          <a:solidFill>
+            <a:srgbClr val="F2F2F2"/>
+          </a:solidFill>
+          <a:ln>
+            <a:noFill/>
+          </a:ln>
+          <a:effectLst/>
+        </p:spPr>
+        <p:style>
+          <a:lnRef idx="1">
+            <a:schemeClr val="accent1"/>
+          </a:lnRef>
+          <a:fillRef idx="3">
+            <a:schemeClr val="accent1"/>
+          </a:fillRef>
+          <a:effectRef idx="2">
+            <a:schemeClr val="accent1"/>
+          </a:effectRef>
+          <a:fontRef idx="minor">
+            <a:schemeClr val="lt1"/>
+          </a:fontRef>
+        </p:style>
+        <p:txBody>
+          <a:bodyPr rtlCol="0" anchor="t" wrap="square" lIns="109728" rIns="109728" tIns="109728" bIns="109728"/>
+          <a:lstStyle/>
+          <a:p>
+            <a:pPr algn="l">
+              <a:spcAft>
+                <a:spcPts val="400"/>
+              </a:spcAft>
+            </a:pPr>
+            <a:r>
+              <a:rPr sz="1100" b="1" i="0">
+                <a:solidFill>
+                  <a:srgbClr val="1E2761"/>
+                </a:solidFill>
+                <a:latin typeface="Courier New"/>
+                <a:ea typeface="Courier New"/>
+              </a:rPr>
+              <a:t>최악 대기 ≈ (N − 1) × 앞 노드들의 최대 프레임</a:t>
+            </a:r>
+          </a:p>
+          <a:p>
+            <a:pPr algn="l" marL="182880" indent="-146304">
+              <a:spcAft>
+                <a:spcPts val="300"/>
+              </a:spcAft>
+              <a:buChar char="•"/>
+            </a:pPr>
+            <a:r>
+              <a:rPr sz="1050" b="0" i="0">
+                <a:solidFill>
+                  <a:srgbClr val="262626"/>
+                </a:solidFill>
+                <a:latin typeface="맑은 고딕"/>
+                <a:ea typeface="맑은 고딕"/>
+              </a:rPr>
+              <a:t>작은 제어 프레임(64 B)만 오가면 N = 8에서도 ≈ 0.47 ms</a:t>
+            </a:r>
+          </a:p>
+          <a:p>
+            <a:pPr algn="l" marL="182880" indent="-146304">
+              <a:spcAft>
+                <a:spcPts val="300"/>
+              </a:spcAft>
+              <a:buChar char="•"/>
+            </a:pPr>
+            <a:r>
+              <a:rPr sz="1050" b="0" i="0">
+                <a:solidFill>
+                  <a:srgbClr val="262626"/>
+                </a:solidFill>
+                <a:latin typeface="맑은 고딕"/>
+                <a:ea typeface="맑은 고딕"/>
+              </a:rPr>
+              <a:t>Burst(MAXBC)를 켠 노드는 여러 프레임을 보내므로 다른 노드의 최악 지연이 그만큼 증가</a:t>
+            </a:r>
+          </a:p>
+        </p:txBody>
+      </p:sp>
+      <p:sp>
+        <p:nvSpPr>
+          <p:cNvPr id="8" name="Rounded Rectangle 7"/>
+          <p:cNvSpPr/>
+          <p:nvPr/>
+        </p:nvSpPr>
+        <p:spPr>
+          <a:xfrm>
+            <a:off x="411480" y="4526280"/>
+            <a:ext cx="3017520" cy="1371600"/>
+          </a:xfrm>
+          <a:prstGeom prst="roundRect">
+            <a:avLst>
+              <a:gd name="adj" fmla="val 8000"/>
+            </a:avLst>
+          </a:prstGeom>
+          <a:solidFill>
+            <a:srgbClr val="FBE9E9"/>
+          </a:solidFill>
+          <a:ln>
+            <a:noFill/>
+          </a:ln>
+          <a:effectLst/>
+        </p:spPr>
+        <p:style>
+          <a:lnRef idx="1">
+            <a:schemeClr val="accent1"/>
+          </a:lnRef>
+          <a:fillRef idx="3">
+            <a:schemeClr val="accent1"/>
+          </a:fillRef>
+          <a:effectRef idx="2">
+            <a:schemeClr val="accent1"/>
+          </a:effectRef>
+          <a:fontRef idx="minor">
+            <a:schemeClr val="lt1"/>
+          </a:fontRef>
+        </p:style>
+        <p:txBody>
+          <a:bodyPr rtlCol="0" anchor="t" wrap="square" lIns="109728" rIns="109728" tIns="109728" bIns="109728"/>
+          <a:lstStyle/>
+          <a:p>
+            <a:pPr algn="l">
+              <a:spcAft>
+                <a:spcPts val="300"/>
+              </a:spcAft>
+            </a:pPr>
+            <a:r>
+              <a:rPr sz="1150" b="1" i="0">
+                <a:solidFill>
+                  <a:srgbClr val="C00000"/>
+                </a:solidFill>
+                <a:latin typeface="맑은 고딕"/>
+                <a:ea typeface="맑은 고딕"/>
+              </a:rPr>
+              <a:t>설계 포인트</a:t>
+            </a:r>
+          </a:p>
+          <a:p>
+            <a:pPr algn="l" marL="182880" indent="-146304">
+              <a:spcAft>
+                <a:spcPts val="300"/>
+              </a:spcAft>
+              <a:buChar char="•"/>
+            </a:pPr>
+            <a:r>
+              <a:rPr sz="1050" b="0" i="0">
+                <a:solidFill>
+                  <a:srgbClr val="262626"/>
+                </a:solidFill>
+                <a:latin typeface="맑은 고딕"/>
+                <a:ea typeface="맑은 고딕"/>
+              </a:rPr>
+              <a:t>NCNT는 실제 노드 수만큼</a:t>
+            </a:r>
+          </a:p>
+          <a:p>
+            <a:pPr algn="l" marL="182880" indent="-146304">
+              <a:spcAft>
+                <a:spcPts val="300"/>
+              </a:spcAft>
+              <a:buChar char="•"/>
+            </a:pPr>
+            <a:r>
+              <a:rPr sz="1050" b="0" i="0">
+                <a:solidFill>
+                  <a:srgbClr val="262626"/>
+                </a:solidFill>
+                <a:latin typeface="맑은 고딕"/>
+                <a:ea typeface="맑은 고딕"/>
+              </a:rPr>
+              <a:t>DoIP/OTA 같은 큰 프레임 노드는 분리</a:t>
+            </a:r>
+          </a:p>
+          <a:p>
+            <a:pPr algn="l" marL="182880" indent="-146304">
+              <a:spcAft>
+                <a:spcPts val="300"/>
+              </a:spcAft>
+              <a:buChar char="•"/>
+            </a:pPr>
+            <a:r>
+              <a:rPr sz="1050" b="0" i="0">
+                <a:solidFill>
+                  <a:srgbClr val="262626"/>
+                </a:solidFill>
+                <a:latin typeface="맑은 고딕"/>
+                <a:ea typeface="맑은 고딕"/>
+              </a:rPr>
+              <a:t>요구 주기(예: 10 ms)와 비교</a:t>
+            </a:r>
+          </a:p>
+        </p:txBody>
+      </p:sp>
+    </p:spTree>
+  </p:cSld>
+  <p:clrMapOvr>
+    <a:masterClrMapping/>
+  </p:clrMapOvr>
+</p:sld>
+</file>
+
+<file path=ppt/slides/slide17.xml><?xml version="1.0" encoding="utf-8"?>
+<p:sld xmlns:a="http://schemas.openxmlformats.org/drawingml/2006/main" xmlns:p="http://schemas.openxmlformats.org/presentationml/2006/main" xmlns:r="http://schemas.openxmlformats.org/officeDocument/2006/relationships">
+  <p:cSld>
+    <p:spTree>
+      <p:nvGrpSpPr>
+        <p:cNvPr id="1" name=""/>
+        <p:cNvGrpSpPr/>
+        <p:nvPr/>
+      </p:nvGrpSpPr>
+      <p:grpSpPr/>
+      <p:sp>
+        <p:nvSpPr>
+          <p:cNvPr id="2" name="TextBox 1">
+            <a:extLst>
+              <a:ext uri="{FF2B5EF4-FFF2-40B4-BE49-F238E27FC236}">
+                <a16:creationId xmlns:a16="http://schemas.microsoft.com/office/drawing/2014/main" id="{A613762B-7392-A016-453D-54A7A34E3004}"/>
+              </a:ext>
+            </a:extLst>
+          </p:cNvPr>
+          <p:cNvSpPr txBox="1"/>
+          <p:nvPr/>
+        </p:nvSpPr>
+        <p:spPr>
+          <a:xfrm>
+            <a:off x="320040" y="109728"/>
+            <a:ext cx="8229600" cy="457200"/>
+          </a:xfrm>
+          <a:prstGeom prst="rect">
+            <a:avLst/>
+          </a:prstGeom>
+          <a:noFill/>
+        </p:spPr>
+        <p:txBody>
+          <a:bodyPr wrap="square">
+            <a:spAutoFit/>
+          </a:bodyPr>
+          <a:lstStyle/>
+          <a:p>
+            <a:pPr marL="342900" indent="-342900">
+              <a:buFont typeface="Wingdings" panose="05000000000000000000" pitchFamily="2" charset="2"/>
+              <a:buChar char="Ø"/>
+            </a:pPr>
+            <a:r>
+              <a:rPr lang="ko-KR" altLang="en-US" sz="2400" b="1" dirty="0">
+                <a:solidFill>
+                  <a:srgbClr val="1E2761"/>
+                </a:solidFill>
+                <a:latin typeface="맑은 고딕"/>
+              </a:rPr>
+              <a:t>TO_TIMER · 샘플 설정 적용 · PLCA 진단</a:t>
+            </a:r>
+            <a:endParaRPr sz="2400" b="1" dirty="0">
+              <a:solidFill>
+                <a:srgbClr val="1E2761"/>
+              </a:solidFill>
+              <a:latin typeface="맑은 고딕"/>
+            </a:endParaRPr>
+          </a:p>
+        </p:txBody>
+      </p:sp>
+      <p:sp>
+        <p:nvSpPr>
+          <p:cNvPr id="3" name="Rounded Rectangle 2"/>
+          <p:cNvSpPr/>
+          <p:nvPr/>
+        </p:nvSpPr>
+        <p:spPr>
+          <a:xfrm>
+            <a:off x="411480" y="777240"/>
+            <a:ext cx="4434840" cy="2331720"/>
+          </a:xfrm>
+          <a:prstGeom prst="roundRect">
+            <a:avLst>
+              <a:gd name="adj" fmla="val 8000"/>
+            </a:avLst>
+          </a:prstGeom>
+          <a:solidFill>
+            <a:srgbClr val="E8EBF5"/>
+          </a:solidFill>
+          <a:ln>
+            <a:noFill/>
+          </a:ln>
+          <a:effectLst/>
+        </p:spPr>
+        <p:style>
+          <a:lnRef idx="1">
+            <a:schemeClr val="accent1"/>
+          </a:lnRef>
+          <a:fillRef idx="3">
+            <a:schemeClr val="accent1"/>
+          </a:fillRef>
+          <a:effectRef idx="2">
+            <a:schemeClr val="accent1"/>
+          </a:effectRef>
+          <a:fontRef idx="minor">
+            <a:schemeClr val="lt1"/>
+          </a:fontRef>
+        </p:style>
+        <p:txBody>
+          <a:bodyPr rtlCol="0" anchor="t" wrap="square" lIns="128016" rIns="128016" tIns="128016" bIns="128016"/>
+          <a:lstStyle/>
+          <a:p>
+            <a:pPr algn="l">
+              <a:spcAft>
+                <a:spcPts val="500"/>
+              </a:spcAft>
+            </a:pPr>
+            <a:r>
+              <a:rPr sz="1300" b="1" i="0">
+                <a:solidFill>
+                  <a:srgbClr val="1E2761"/>
+                </a:solidFill>
+                <a:latin typeface="맑은 고딕"/>
+                <a:ea typeface="맑은 고딕"/>
+              </a:rPr>
+              <a:t>TO_TIMER를 줄여도 될까?</a:t>
+            </a:r>
+          </a:p>
+          <a:p>
+            <a:pPr algn="l">
+              <a:spcAft>
+                <a:spcPts val="500"/>
+              </a:spcAft>
+            </a:pPr>
+            <a:r>
+              <a:rPr sz="1150" b="1" i="0">
+                <a:solidFill>
+                  <a:srgbClr val="262626"/>
+                </a:solidFill>
+                <a:latin typeface="Courier New"/>
+                <a:ea typeface="Courier New"/>
+              </a:rPr>
+              <a:t>TO_TIMER ≥ 왕복 전파지연 + PHY 지연 + 2 BT</a:t>
+            </a:r>
+          </a:p>
+          <a:p>
+            <a:pPr algn="l">
+              <a:spcAft>
+                <a:spcPts val="500"/>
+              </a:spcAft>
+            </a:pPr>
+            <a:r>
+              <a:rPr sz="950" b="0" i="0">
+                <a:solidFill>
+                  <a:srgbClr val="595959"/>
+                </a:solidFill>
+                <a:latin typeface="맑은 고딕"/>
+                <a:ea typeface="맑은 고딕"/>
+              </a:rPr>
+              <a:t>(UM 5.5.1.28 CAUTION)</a:t>
+            </a:r>
+          </a:p>
+          <a:p>
+            <a:pPr algn="l" marL="182880" indent="-146304">
+              <a:spcAft>
+                <a:spcPts val="600"/>
+              </a:spcAft>
+              <a:buChar char="•"/>
+            </a:pPr>
+            <a:r>
+              <a:rPr sz="1150" b="0" i="0">
+                <a:solidFill>
+                  <a:srgbClr val="262626"/>
+                </a:solidFill>
+                <a:latin typeface="맑은 고딕"/>
+                <a:ea typeface="맑은 고딕"/>
+              </a:rPr>
+              <a:t>25 m 케이블 ≈ 5 ns/m × 25 = 125 ns ≈ 1.25 BT (편도)</a:t>
+            </a:r>
+          </a:p>
+          <a:p>
+            <a:pPr algn="l" marL="182880" indent="-146304">
+              <a:spcAft>
+                <a:spcPts val="600"/>
+              </a:spcAft>
+              <a:buChar char="•"/>
+            </a:pPr>
+            <a:r>
+              <a:rPr sz="1150" b="0" i="0">
+                <a:solidFill>
+                  <a:srgbClr val="262626"/>
+                </a:solidFill>
+                <a:latin typeface="맑은 고딕"/>
+                <a:ea typeface="맑은 고딕"/>
+              </a:rPr>
+              <a:t>기본 32 BT는 여유가 큼 → 줄이면 빈 차례 낭비 감소</a:t>
+            </a:r>
+          </a:p>
+          <a:p>
+            <a:pPr algn="l" marL="182880" indent="-146304">
+              <a:spcAft>
+                <a:spcPts val="600"/>
+              </a:spcAft>
+              <a:buChar char="•"/>
+            </a:pPr>
+            <a:r>
+              <a:rPr sz="1150" b="0" i="0">
+                <a:solidFill>
+                  <a:srgbClr val="262626"/>
+                </a:solidFill>
+                <a:latin typeface="맑은 고딕"/>
+                <a:ea typeface="맑은 고딕"/>
+              </a:rPr>
+              <a:t>단, 모든 노드 동시 변경 + 실측 검증 필수</a:t>
+            </a:r>
+          </a:p>
+        </p:txBody>
+      </p:sp>
+      <p:sp>
+        <p:nvSpPr>
+          <p:cNvPr id="4" name="Rounded Rectangle 3"/>
+          <p:cNvSpPr/>
+          <p:nvPr/>
+        </p:nvSpPr>
+        <p:spPr>
+          <a:xfrm>
+            <a:off x="5074920" y="777240"/>
+            <a:ext cx="4434840" cy="2331720"/>
+          </a:xfrm>
+          <a:prstGeom prst="roundRect">
+            <a:avLst>
+              <a:gd name="adj" fmla="val 8000"/>
+            </a:avLst>
+          </a:prstGeom>
+          <a:solidFill>
+            <a:srgbClr val="FAF4DC"/>
+          </a:solidFill>
+          <a:ln>
+            <a:noFill/>
+          </a:ln>
+          <a:effectLst/>
+        </p:spPr>
+        <p:style>
+          <a:lnRef idx="1">
+            <a:schemeClr val="accent1"/>
+          </a:lnRef>
+          <a:fillRef idx="3">
+            <a:schemeClr val="accent1"/>
+          </a:fillRef>
+          <a:effectRef idx="2">
+            <a:schemeClr val="accent1"/>
+          </a:effectRef>
+          <a:fontRef idx="minor">
+            <a:schemeClr val="lt1"/>
+          </a:fontRef>
+        </p:style>
+        <p:txBody>
+          <a:bodyPr rtlCol="0" anchor="t" wrap="square" lIns="128016" rIns="128016" tIns="128016" bIns="128016"/>
+          <a:lstStyle/>
+          <a:p>
+            <a:pPr algn="l">
+              <a:spcAft>
+                <a:spcPts val="500"/>
+              </a:spcAft>
+            </a:pPr>
+            <a:r>
+              <a:rPr sz="1300" b="1" i="0">
+                <a:solidFill>
+                  <a:srgbClr val="9C7A00"/>
+                </a:solidFill>
+                <a:latin typeface="맑은 고딕"/>
+                <a:ea typeface="맑은 고딕"/>
+              </a:rPr>
+              <a:t>앞서 분석한 샘플에 적용하면</a:t>
+            </a:r>
+          </a:p>
+          <a:p>
+            <a:pPr algn="l" marL="182880" indent="-146304">
+              <a:spcAft>
+                <a:spcPts val="600"/>
+              </a:spcAft>
+              <a:buChar char="•"/>
+            </a:pPr>
+            <a:r>
+              <a:rPr sz="1150" b="0" i="0">
+                <a:solidFill>
+                  <a:srgbClr val="262626"/>
+                </a:solidFill>
+                <a:latin typeface="맑은 고딕"/>
+                <a:ea typeface="맑은 고딕"/>
+              </a:rPr>
+              <a:t>설정 NCNT = 9, 실제 노드 2개 (ID 0, 1)</a:t>
+            </a:r>
+          </a:p>
+          <a:p>
+            <a:pPr algn="l" marL="182880" indent="-146304">
+              <a:spcAft>
+                <a:spcPts val="600"/>
+              </a:spcAft>
+              <a:buChar char="•"/>
+            </a:pPr>
+            <a:r>
+              <a:rPr sz="1150" b="0" i="0">
+                <a:solidFill>
+                  <a:srgbClr val="262626"/>
+                </a:solidFill>
+                <a:latin typeface="맑은 고딕"/>
+                <a:ea typeface="맑은 고딕"/>
+              </a:rPr>
+              <a:t>빈 차례 7개 × 3.2 µs ≈ 사이클마다 22 µs 낭비</a:t>
+            </a:r>
+          </a:p>
+          <a:p>
+            <a:pPr algn="l" marL="182880" indent="-146304">
+              <a:spcAft>
+                <a:spcPts val="600"/>
+              </a:spcAft>
+              <a:buChar char="•"/>
+            </a:pPr>
+            <a:r>
+              <a:rPr sz="1150" b="0" i="0">
+                <a:solidFill>
+                  <a:srgbClr val="262626"/>
+                </a:solidFill>
+                <a:latin typeface="맑은 고딕"/>
+                <a:ea typeface="맑은 고딕"/>
+              </a:rPr>
+              <a:t>기능 문제는 없으나 양산에선 NCNT = 실제 노드 수 권장</a:t>
+            </a:r>
+          </a:p>
+          <a:p>
+            <a:pPr algn="l" marL="182880" indent="-146304">
+              <a:spcAft>
+                <a:spcPts val="300"/>
+              </a:spcAft>
+              <a:buChar char="•"/>
+            </a:pPr>
+            <a:r>
+              <a:rPr sz="1150" b="0" i="0">
+                <a:solidFill>
+                  <a:srgbClr val="C00000"/>
+                </a:solidFill>
+                <a:latin typeface="맑은 고딕"/>
+                <a:ea typeface="맑은 고딕"/>
+              </a:rPr>
+              <a:t>ID ≥ NCNT 인 노드는 영원히 차례를 못 받음</a:t>
+            </a:r>
+          </a:p>
+        </p:txBody>
+      </p:sp>
+      <p:sp>
+        <p:nvSpPr>
+          <p:cNvPr id="5" name="TextBox 4"/>
+          <p:cNvSpPr txBox="1"/>
+          <p:nvPr/>
+        </p:nvSpPr>
+        <p:spPr>
+          <a:xfrm>
+            <a:off x="411480" y="3291840"/>
+            <a:ext cx="9052560" cy="320040"/>
+          </a:xfrm>
+          <a:prstGeom prst="rect">
+            <a:avLst/>
+          </a:prstGeom>
+          <a:noFill/>
+        </p:spPr>
+        <p:txBody>
+          <a:bodyPr wrap="square" anchor="t" lIns="45720" rIns="45720">
+            <a:spAutoFit/>
+          </a:bodyPr>
+          <a:lstStyle/>
+          <a:p>
+            <a:pPr algn="l">
+              <a:spcAft>
+                <a:spcPts val="300"/>
+              </a:spcAft>
+            </a:pPr>
+            <a:r>
+              <a:rPr sz="1300" b="1" i="0">
+                <a:solidFill>
+                  <a:srgbClr val="1E2761"/>
+                </a:solidFill>
+                <a:latin typeface="맑은 고딕"/>
+                <a:ea typeface="맑은 고딕"/>
+              </a:rPr>
+              <a:t>PLCADIAG (0x3FCA06) — 네트워크 설정 오류 진단 (UM 5.4.4, 1 쓰기로 클리어)</a:t>
+            </a:r>
+          </a:p>
+        </p:txBody>
+      </p:sp>
+      <p:graphicFrame>
+        <p:nvGraphicFramePr>
+          <p:cNvPr id="6" name="Table 5"/>
+          <p:cNvGraphicFramePr>
+            <a:graphicFrameLocks noGrp="1"/>
+          </p:cNvGraphicFramePr>
+          <p:nvPr/>
+        </p:nvGraphicFramePr>
+        <p:xfrm>
+          <a:off x="411480" y="3657600"/>
+          <a:ext cx="9098280" cy="1682496"/>
+        </p:xfrm>
+        <a:graphic>
+          <a:graphicData uri="http://schemas.openxmlformats.org/drawingml/2006/table">
+            <a:tbl>
+              <a:tblPr firstRow="0" bandRow="0">
+                <a:tableStyleId>{5C22544A-7EE6-4342-B048-85BDC9FD1C3A}</a:tableStyleId>
+              </a:tblPr>
+              <a:tblGrid>
+                <a:gridCol w="640080"/>
+                <a:gridCol w="1280160"/>
+                <a:gridCol w="3291840"/>
+                <a:gridCol w="3886200"/>
+              </a:tblGrid>
+              <a:tr h="420624">
+                <a:tc>
+                  <a:txBody>
+                    <a:bodyPr wrap="square"/>
+                    <a:lstStyle/>
+                    <a:p>
+                      <a:pPr algn="l"/>
+                      <a:r>
+                        <a:rPr sz="1050" b="1" i="0">
+                          <a:solidFill>
+                            <a:srgbClr val="FFFFFF"/>
+                          </a:solidFill>
+                          <a:latin typeface="맑은 고딕"/>
+                          <a:ea typeface="맑은 고딕"/>
+                        </a:rPr>
+                        <a:t>비트</a:t>
+                      </a:r>
+                    </a:p>
+                  </a:txBody>
+                  <a:tcPr marL="54864" marR="54864" marT="27432" marB="27432" anchor="ctr">
+                    <a:solidFill>
+                      <a:srgbClr val="1E2761"/>
+                    </a:solidFill>
+                  </a:tcPr>
+                </a:tc>
+                <a:tc>
+                  <a:txBody>
+                    <a:bodyPr wrap="square"/>
+                    <a:lstStyle/>
+                    <a:p>
+                      <a:pPr algn="l"/>
+                      <a:r>
+                        <a:rPr sz="1050" b="1" i="0">
+                          <a:solidFill>
+                            <a:srgbClr val="FFFFFF"/>
+                          </a:solidFill>
+                          <a:latin typeface="맑은 고딕"/>
+                          <a:ea typeface="맑은 고딕"/>
+                        </a:rPr>
+                        <a:t>이름</a:t>
+                      </a:r>
+                    </a:p>
+                  </a:txBody>
+                  <a:tcPr marL="54864" marR="54864" marT="27432" marB="27432" anchor="ctr">
+                    <a:solidFill>
+                      <a:srgbClr val="1E2761"/>
+                    </a:solidFill>
+                  </a:tcPr>
+                </a:tc>
+                <a:tc>
+                  <a:txBody>
+                    <a:bodyPr wrap="square"/>
+                    <a:lstStyle/>
+                    <a:p>
+                      <a:pPr algn="l"/>
+                      <a:r>
+                        <a:rPr sz="1050" b="1" i="0">
+                          <a:solidFill>
+                            <a:srgbClr val="FFFFFF"/>
+                          </a:solidFill>
+                          <a:latin typeface="맑은 고딕"/>
+                          <a:ea typeface="맑은 고딕"/>
+                        </a:rPr>
+                        <a:t>켜지는 조건</a:t>
+                      </a:r>
+                    </a:p>
+                  </a:txBody>
+                  <a:tcPr marL="54864" marR="54864" marT="27432" marB="27432" anchor="ctr">
+                    <a:solidFill>
+                      <a:srgbClr val="1E2761"/>
+                    </a:solidFill>
+                  </a:tcPr>
+                </a:tc>
+                <a:tc>
+                  <a:txBody>
+                    <a:bodyPr wrap="square"/>
+                    <a:lstStyle/>
+                    <a:p>
+                      <a:pPr algn="l"/>
+                      <a:r>
+                        <a:rPr sz="1050" b="1" i="0">
+                          <a:solidFill>
+                            <a:srgbClr val="FFFFFF"/>
+                          </a:solidFill>
+                          <a:latin typeface="맑은 고딕"/>
+                          <a:ea typeface="맑은 고딕"/>
+                        </a:rPr>
+                        <a:t>의심할 원인</a:t>
+                      </a:r>
+                    </a:p>
+                  </a:txBody>
+                  <a:tcPr marL="54864" marR="54864" marT="27432" marB="27432" anchor="ctr">
+                    <a:solidFill>
+                      <a:srgbClr val="1E2761"/>
+                    </a:solidFill>
+                  </a:tcPr>
+                </a:tc>
+              </a:tr>
+              <a:tr h="420624">
+                <a:tc>
+                  <a:txBody>
+                    <a:bodyPr wrap="square"/>
+                    <a:lstStyle/>
+                    <a:p>
+                      <a:pPr algn="l"/>
+                      <a:r>
+                        <a:rPr sz="1050" b="0" i="0">
+                          <a:solidFill>
+                            <a:srgbClr val="262626"/>
+                          </a:solidFill>
+                          <a:latin typeface="Courier New"/>
+                          <a:ea typeface="Courier New"/>
+                        </a:rPr>
+                        <a:t>[0]</a:t>
+                      </a:r>
+                    </a:p>
+                  </a:txBody>
+                  <a:tcPr marL="54864" marR="54864" marT="27432" marB="27432" anchor="ctr">
+                    <a:solidFill>
+                      <a:srgbClr val="FFFFFF"/>
+                    </a:solidFill>
+                  </a:tcPr>
+                </a:tc>
+                <a:tc>
+                  <a:txBody>
+                    <a:bodyPr wrap="square"/>
+                    <a:lstStyle/>
+                    <a:p>
+                      <a:pPr algn="l"/>
+                      <a:r>
+                        <a:rPr sz="1050" b="1" i="0">
+                          <a:solidFill>
+                            <a:srgbClr val="C00000"/>
+                          </a:solidFill>
+                          <a:latin typeface="Courier New"/>
+                          <a:ea typeface="Courier New"/>
+                        </a:rPr>
+                        <a:t>BCNBFTO</a:t>
+                      </a:r>
+                    </a:p>
+                  </a:txBody>
+                  <a:tcPr marL="54864" marR="54864" marT="27432" marB="27432" anchor="ctr">
+                    <a:solidFill>
+                      <a:srgbClr val="FFFFFF"/>
+                    </a:solidFill>
+                  </a:tcPr>
+                </a:tc>
+                <a:tc>
+                  <a:txBody>
+                    <a:bodyPr wrap="square"/>
+                    <a:lstStyle/>
+                    <a:p>
+                      <a:pPr algn="l"/>
+                      <a:r>
+                        <a:rPr sz="1050" b="0" i="0">
+                          <a:solidFill>
+                            <a:srgbClr val="262626"/>
+                          </a:solidFill>
+                          <a:latin typeface="맑은 고딕"/>
+                          <a:ea typeface="맑은 고딕"/>
+                        </a:rPr>
+                        <a:t>4 사이클 연속 차례를 못 받음</a:t>
+                      </a:r>
+                    </a:p>
+                  </a:txBody>
+                  <a:tcPr marL="54864" marR="54864" marT="27432" marB="27432" anchor="ctr">
+                    <a:solidFill>
+                      <a:srgbClr val="FFFFFF"/>
+                    </a:solidFill>
+                  </a:tcPr>
+                </a:tc>
+                <a:tc>
+                  <a:txBody>
+                    <a:bodyPr wrap="square"/>
+                    <a:lstStyle/>
+                    <a:p>
+                      <a:pPr algn="l"/>
+                      <a:r>
+                        <a:rPr sz="1050" b="0" i="0">
+                          <a:solidFill>
+                            <a:srgbClr val="262626"/>
+                          </a:solidFill>
+                          <a:latin typeface="맑은 고딕"/>
+                          <a:ea typeface="맑은 고딕"/>
+                        </a:rPr>
+                        <a:t>내 ID ≥ 코디네이터 NCNT, 코디네이터가 여럿</a:t>
+                      </a:r>
+                    </a:p>
+                  </a:txBody>
+                  <a:tcPr marL="54864" marR="54864" marT="27432" marB="27432" anchor="ctr">
+                    <a:solidFill>
+                      <a:srgbClr val="FFFFFF"/>
+                    </a:solidFill>
+                  </a:tcPr>
+                </a:tc>
+              </a:tr>
+              <a:tr h="420624">
+                <a:tc>
+                  <a:txBody>
+                    <a:bodyPr wrap="square"/>
+                    <a:lstStyle/>
+                    <a:p>
+                      <a:pPr algn="l"/>
+                      <a:r>
+                        <a:rPr sz="1050" b="0" i="0">
+                          <a:solidFill>
+                            <a:srgbClr val="262626"/>
+                          </a:solidFill>
+                          <a:latin typeface="Courier New"/>
+                          <a:ea typeface="Courier New"/>
+                        </a:rPr>
+                        <a:t>[1]</a:t>
+                      </a:r>
+                    </a:p>
+                  </a:txBody>
+                  <a:tcPr marL="54864" marR="54864" marT="27432" marB="27432" anchor="ctr">
+                    <a:solidFill>
+                      <a:srgbClr val="F2F2F2"/>
+                    </a:solidFill>
+                  </a:tcPr>
+                </a:tc>
+                <a:tc>
+                  <a:txBody>
+                    <a:bodyPr wrap="square"/>
+                    <a:lstStyle/>
+                    <a:p>
+                      <a:pPr algn="l"/>
+                      <a:r>
+                        <a:rPr sz="1050" b="1" i="0">
+                          <a:solidFill>
+                            <a:srgbClr val="C00000"/>
+                          </a:solidFill>
+                          <a:latin typeface="Courier New"/>
+                          <a:ea typeface="Courier New"/>
+                        </a:rPr>
+                        <a:t>UNEXPB</a:t>
+                      </a:r>
+                    </a:p>
+                  </a:txBody>
+                  <a:tcPr marL="54864" marR="54864" marT="27432" marB="27432" anchor="ctr">
+                    <a:solidFill>
+                      <a:srgbClr val="F2F2F2"/>
+                    </a:solidFill>
+                  </a:tcPr>
+                </a:tc>
+                <a:tc>
+                  <a:txBody>
+                    <a:bodyPr wrap="square"/>
+                    <a:lstStyle/>
+                    <a:p>
+                      <a:pPr algn="l"/>
+                      <a:r>
+                        <a:rPr sz="1050" b="0" i="0">
+                          <a:solidFill>
+                            <a:srgbClr val="262626"/>
+                          </a:solidFill>
+                          <a:latin typeface="맑은 고딕"/>
+                          <a:ea typeface="맑은 고딕"/>
+                        </a:rPr>
+                        <a:t>코디네이터인데 다른 BEACON 수신</a:t>
+                      </a:r>
+                    </a:p>
+                  </a:txBody>
+                  <a:tcPr marL="54864" marR="54864" marT="27432" marB="27432" anchor="ctr">
+                    <a:solidFill>
+                      <a:srgbClr val="F2F2F2"/>
+                    </a:solidFill>
+                  </a:tcPr>
+                </a:tc>
+                <a:tc>
+                  <a:txBody>
+                    <a:bodyPr wrap="square"/>
+                    <a:lstStyle/>
+                    <a:p>
+                      <a:pPr algn="l"/>
+                      <a:r>
+                        <a:rPr sz="1050" b="0" i="0">
+                          <a:solidFill>
+                            <a:srgbClr val="262626"/>
+                          </a:solidFill>
+                          <a:latin typeface="맑은 고딕"/>
+                          <a:ea typeface="맑은 고딕"/>
+                        </a:rPr>
+                        <a:t>ID 0 노드가 2개 이상</a:t>
+                      </a:r>
+                    </a:p>
+                  </a:txBody>
+                  <a:tcPr marL="54864" marR="54864" marT="27432" marB="27432" anchor="ctr">
+                    <a:solidFill>
+                      <a:srgbClr val="F2F2F2"/>
+                    </a:solidFill>
+                  </a:tcPr>
+                </a:tc>
+              </a:tr>
+              <a:tr h="420624">
+                <a:tc>
+                  <a:txBody>
+                    <a:bodyPr wrap="square"/>
+                    <a:lstStyle/>
+                    <a:p>
+                      <a:pPr algn="l"/>
+                      <a:r>
+                        <a:rPr sz="1050" b="0" i="0">
+                          <a:solidFill>
+                            <a:srgbClr val="262626"/>
+                          </a:solidFill>
+                          <a:latin typeface="Courier New"/>
+                          <a:ea typeface="Courier New"/>
+                        </a:rPr>
+                        <a:t>[2]</a:t>
+                      </a:r>
+                    </a:p>
+                  </a:txBody>
+                  <a:tcPr marL="54864" marR="54864" marT="27432" marB="27432" anchor="ctr">
+                    <a:solidFill>
+                      <a:srgbClr val="FFFFFF"/>
+                    </a:solidFill>
+                  </a:tcPr>
+                </a:tc>
+                <a:tc>
+                  <a:txBody>
+                    <a:bodyPr wrap="square"/>
+                    <a:lstStyle/>
+                    <a:p>
+                      <a:pPr algn="l"/>
+                      <a:r>
+                        <a:rPr sz="1050" b="1" i="0">
+                          <a:solidFill>
+                            <a:srgbClr val="C00000"/>
+                          </a:solidFill>
+                          <a:latin typeface="Courier New"/>
+                          <a:ea typeface="Courier New"/>
+                        </a:rPr>
+                        <a:t>RXINTO</a:t>
+                      </a:r>
+                    </a:p>
+                  </a:txBody>
+                  <a:tcPr marL="54864" marR="54864" marT="27432" marB="27432" anchor="ctr">
+                    <a:solidFill>
+                      <a:srgbClr val="FFFFFF"/>
+                    </a:solidFill>
+                  </a:tcPr>
+                </a:tc>
+                <a:tc>
+                  <a:txBody>
+                    <a:bodyPr wrap="square"/>
+                    <a:lstStyle/>
+                    <a:p>
+                      <a:pPr algn="l"/>
+                      <a:r>
+                        <a:rPr sz="1050" b="0" i="0">
+                          <a:solidFill>
+                            <a:srgbClr val="262626"/>
+                          </a:solidFill>
+                          <a:latin typeface="맑은 고딕"/>
+                          <a:ea typeface="맑은 고딕"/>
+                        </a:rPr>
+                        <a:t>내 차례에 다른 노드가 송신</a:t>
+                      </a:r>
+                    </a:p>
+                  </a:txBody>
+                  <a:tcPr marL="54864" marR="54864" marT="27432" marB="27432" anchor="ctr">
+                    <a:solidFill>
+                      <a:srgbClr val="FFFFFF"/>
+                    </a:solidFill>
+                  </a:tcPr>
+                </a:tc>
+                <a:tc>
+                  <a:txBody>
+                    <a:bodyPr wrap="square"/>
+                    <a:lstStyle/>
+                    <a:p>
+                      <a:pPr algn="l"/>
+                      <a:r>
+                        <a:rPr sz="1050" b="0" i="0">
+                          <a:solidFill>
+                            <a:srgbClr val="262626"/>
+                          </a:solidFill>
+                          <a:latin typeface="맑은 고딕"/>
+                          <a:ea typeface="맑은 고딕"/>
+                        </a:rPr>
+                        <a:t>ID 중복, PLCA 꺼진(CSMA/CD) 노드 존재</a:t>
+                      </a:r>
+                    </a:p>
+                  </a:txBody>
+                  <a:tcPr marL="54864" marR="54864" marT="27432" marB="27432" anchor="ctr">
+                    <a:solidFill>
+                      <a:srgbClr val="FFFFFF"/>
+                    </a:solidFill>
+                  </a:tcPr>
+                </a:tc>
+              </a:tr>
+            </a:tbl>
+          </a:graphicData>
+        </a:graphic>
+      </p:graphicFrame>
+      <p:sp>
+        <p:nvSpPr>
+          <p:cNvPr id="7" name="TextBox 6"/>
+          <p:cNvSpPr txBox="1"/>
+          <p:nvPr/>
+        </p:nvSpPr>
+        <p:spPr>
+          <a:xfrm>
+            <a:off x="411480" y="5440680"/>
+            <a:ext cx="9052560" cy="457200"/>
+          </a:xfrm>
+          <a:prstGeom prst="rect">
+            <a:avLst/>
+          </a:prstGeom>
+          <a:noFill/>
+        </p:spPr>
+        <p:txBody>
+          <a:bodyPr wrap="square" anchor="t" lIns="45720" rIns="45720">
+            <a:spAutoFit/>
+          </a:bodyPr>
+          <a:lstStyle/>
+          <a:p>
+            <a:pPr algn="l">
+              <a:spcAft>
+                <a:spcPts val="300"/>
+              </a:spcAft>
+            </a:pPr>
+            <a:r>
+              <a:rPr sz="1050" b="1" i="0">
+                <a:solidFill>
+                  <a:srgbClr val="262626"/>
+                </a:solidFill>
+                <a:latin typeface="맑은 고딕"/>
+                <a:ea typeface="맑은 고딕"/>
+              </a:rPr>
+              <a:t>보조 지표: </a:t>
+            </a:r>
+            <a:r>
+              <a:rPr sz="1050" b="0" i="0">
+                <a:solidFill>
+                  <a:srgbClr val="262626"/>
+                </a:solidFill>
+                <a:latin typeface="맑은 고딕"/>
+                <a:ea typeface="맑은 고딕"/>
+              </a:rPr>
+              <a:t>T1SPCSDIAG2 (물리 충돌 카운터) — PLCA가 정상이면 0이어야 함. 코디네이터가 사라지면 PLCAST.PST = 0 → CSMA/CD로 폴백</a:t>
+            </a:r>
+          </a:p>
+        </p:txBody>
+      </p:sp>
+    </p:spTree>
+  </p:cSld>
+  <p:clrMapOvr>
+    <a:masterClrMapping/>
+  </p:clrMapOvr>
+</p:sld>
+</file>
+
+<file path=ppt/slides/slide18.xml><?xml version="1.0" encoding="utf-8"?>
+<p:sld xmlns:a="http://schemas.openxmlformats.org/drawingml/2006/main" xmlns:p="http://schemas.openxmlformats.org/presentationml/2006/main" xmlns:r="http://schemas.openxmlformats.org/officeDocument/2006/relationships">
+  <p:cSld>
+    <p:spTree>
+      <p:nvGrpSpPr>
+        <p:cNvPr id="1" name=""/>
+        <p:cNvGrpSpPr/>
+        <p:nvPr/>
+      </p:nvGrpSpPr>
+      <p:grpSpPr/>
+      <p:sp>
+        <p:nvSpPr>
+          <p:cNvPr id="2" name="TextBox 1">
+            <a:extLst>
+              <a:ext uri="{FF2B5EF4-FFF2-40B4-BE49-F238E27FC236}">
+                <a16:creationId xmlns:a16="http://schemas.microsoft.com/office/drawing/2014/main" id="{A613762B-7392-A016-453D-54A7A34E3004}"/>
+              </a:ext>
+            </a:extLst>
+          </p:cNvPr>
+          <p:cNvSpPr txBox="1"/>
+          <p:nvPr/>
+        </p:nvSpPr>
+        <p:spPr>
+          <a:xfrm>
+            <a:off x="320040" y="109728"/>
+            <a:ext cx="8229600" cy="457200"/>
+          </a:xfrm>
+          <a:prstGeom prst="rect">
+            <a:avLst/>
+          </a:prstGeom>
+          <a:noFill/>
+        </p:spPr>
+        <p:txBody>
+          <a:bodyPr wrap="square">
+            <a:spAutoFit/>
+          </a:bodyPr>
+          <a:lstStyle/>
+          <a:p>
+            <a:pPr marL="342900" indent="-342900">
+              <a:buFont typeface="Wingdings" panose="05000000000000000000" pitchFamily="2" charset="2"/>
+              <a:buChar char="Ø"/>
+            </a:pPr>
+            <a:r>
+              <a:rPr lang="ko-KR" altLang="en-US" sz="2400" b="1" dirty="0">
+                <a:solidFill>
+                  <a:srgbClr val="1E2761"/>
+                </a:solidFill>
+                <a:latin typeface="맑은 고딕"/>
+              </a:rPr>
+              <a:t>AUTOSAR에서 10BASE-T1S: 스택 구조</a:t>
+            </a:r>
+            <a:endParaRPr sz="2400" b="1" dirty="0">
+              <a:solidFill>
+                <a:srgbClr val="1E2761"/>
+              </a:solidFill>
+              <a:latin typeface="맑은 고딕"/>
+            </a:endParaRPr>
+          </a:p>
+        </p:txBody>
+      </p:sp>
+      <p:sp>
+        <p:nvSpPr>
+          <p:cNvPr id="3" name="Rounded Rectangle 2"/>
+          <p:cNvSpPr/>
+          <p:nvPr/>
+        </p:nvSpPr>
+        <p:spPr>
+          <a:xfrm>
+            <a:off x="411480" y="822960"/>
+            <a:ext cx="4206240" cy="566928"/>
+          </a:xfrm>
+          <a:prstGeom prst="roundRect">
+            <a:avLst>
+              <a:gd name="adj" fmla="val 8000"/>
+            </a:avLst>
+          </a:prstGeom>
+          <a:solidFill>
+            <a:srgbClr val="F2F2F2"/>
+          </a:solidFill>
+          <a:ln>
+            <a:noFill/>
+          </a:ln>
+          <a:effectLst/>
+        </p:spPr>
+        <p:style>
+          <a:lnRef idx="1">
+            <a:schemeClr val="accent1"/>
+          </a:lnRef>
+          <a:fillRef idx="3">
+            <a:schemeClr val="accent1"/>
+          </a:fillRef>
+          <a:effectRef idx="2">
+            <a:schemeClr val="accent1"/>
+          </a:effectRef>
+          <a:fontRef idx="minor">
+            <a:schemeClr val="lt1"/>
+          </a:fontRef>
+        </p:style>
+        <p:txBody>
+          <a:bodyPr rtlCol="0" anchor="ctr" wrap="square" lIns="73152" rIns="73152" tIns="73152" bIns="73152"/>
+          <a:lstStyle/>
+          <a:p>
+            <a:pPr algn="ctr">
+              <a:spcAft>
+                <a:spcPts val="300"/>
+              </a:spcAft>
+            </a:pPr>
+            <a:r>
+              <a:rPr sz="1200" b="1" i="0">
+                <a:solidFill>
+                  <a:srgbClr val="262626"/>
+                </a:solidFill>
+                <a:latin typeface="맑은 고딕"/>
+                <a:ea typeface="맑은 고딕"/>
+              </a:rPr>
+              <a:t>SOME/IP · DoIP · UdpNm · SD</a:t>
+            </a:r>
+          </a:p>
+        </p:txBody>
+      </p:sp>
+      <p:sp>
+        <p:nvSpPr>
+          <p:cNvPr id="4" name="TextBox 3"/>
+          <p:cNvSpPr txBox="1"/>
+          <p:nvPr/>
+        </p:nvSpPr>
+        <p:spPr>
+          <a:xfrm>
+            <a:off x="4709160" y="822960"/>
+            <a:ext cx="1188720" cy="566928"/>
+          </a:xfrm>
+          <a:prstGeom prst="rect">
+            <a:avLst/>
+          </a:prstGeom>
+          <a:noFill/>
+        </p:spPr>
+        <p:txBody>
+          <a:bodyPr wrap="square" anchor="ctr" lIns="45720" rIns="45720">
+            <a:spAutoFit/>
+          </a:bodyPr>
+          <a:lstStyle/>
+          <a:p>
+            <a:pPr algn="l">
+              <a:spcAft>
+                <a:spcPts val="300"/>
+              </a:spcAft>
+            </a:pPr>
+            <a:r>
+              <a:rPr sz="950" b="0" i="0">
+                <a:solidFill>
+                  <a:srgbClr val="595959"/>
+                </a:solidFill>
+                <a:latin typeface="맑은 고딕"/>
+                <a:ea typeface="맑은 고딕"/>
+              </a:rPr>
+              <a:t>변경 없음</a:t>
+            </a:r>
+          </a:p>
+        </p:txBody>
+      </p:sp>
+      <p:sp>
+        <p:nvSpPr>
+          <p:cNvPr id="5" name="Rounded Rectangle 4"/>
+          <p:cNvSpPr/>
+          <p:nvPr/>
+        </p:nvSpPr>
+        <p:spPr>
+          <a:xfrm>
+            <a:off x="411480" y="1536192"/>
+            <a:ext cx="4206240" cy="566928"/>
+          </a:xfrm>
+          <a:prstGeom prst="roundRect">
+            <a:avLst>
+              <a:gd name="adj" fmla="val 8000"/>
+            </a:avLst>
+          </a:prstGeom>
+          <a:solidFill>
+            <a:srgbClr val="F2F2F2"/>
+          </a:solidFill>
+          <a:ln>
+            <a:noFill/>
+          </a:ln>
+          <a:effectLst/>
+        </p:spPr>
+        <p:style>
+          <a:lnRef idx="1">
+            <a:schemeClr val="accent1"/>
+          </a:lnRef>
+          <a:fillRef idx="3">
+            <a:schemeClr val="accent1"/>
+          </a:fillRef>
+          <a:effectRef idx="2">
+            <a:schemeClr val="accent1"/>
+          </a:effectRef>
+          <a:fontRef idx="minor">
+            <a:schemeClr val="lt1"/>
+          </a:fontRef>
+        </p:style>
+        <p:txBody>
+          <a:bodyPr rtlCol="0" anchor="ctr" wrap="square" lIns="73152" rIns="73152" tIns="73152" bIns="73152"/>
+          <a:lstStyle/>
+          <a:p>
+            <a:pPr algn="ctr">
+              <a:spcAft>
+                <a:spcPts val="300"/>
+              </a:spcAft>
+            </a:pPr>
+            <a:r>
+              <a:rPr sz="1200" b="1" i="0">
+                <a:solidFill>
+                  <a:srgbClr val="262626"/>
+                </a:solidFill>
+                <a:latin typeface="맑은 고딕"/>
+                <a:ea typeface="맑은 고딕"/>
+              </a:rPr>
+              <a:t>SoAd  ·  TcpIp</a:t>
+            </a:r>
+          </a:p>
+        </p:txBody>
+      </p:sp>
+      <p:sp>
+        <p:nvSpPr>
+          <p:cNvPr id="6" name="TextBox 5"/>
+          <p:cNvSpPr txBox="1"/>
+          <p:nvPr/>
+        </p:nvSpPr>
+        <p:spPr>
+          <a:xfrm>
+            <a:off x="4709160" y="1536192"/>
+            <a:ext cx="1188720" cy="566928"/>
+          </a:xfrm>
+          <a:prstGeom prst="rect">
+            <a:avLst/>
+          </a:prstGeom>
+          <a:noFill/>
+        </p:spPr>
+        <p:txBody>
+          <a:bodyPr wrap="square" anchor="ctr" lIns="45720" rIns="45720">
+            <a:spAutoFit/>
+          </a:bodyPr>
+          <a:lstStyle/>
+          <a:p>
+            <a:pPr algn="l">
+              <a:spcAft>
+                <a:spcPts val="300"/>
+              </a:spcAft>
+            </a:pPr>
+            <a:r>
+              <a:rPr sz="950" b="0" i="0">
+                <a:solidFill>
+                  <a:srgbClr val="595959"/>
+                </a:solidFill>
+                <a:latin typeface="맑은 고딕"/>
+                <a:ea typeface="맑은 고딕"/>
+              </a:rPr>
+              <a:t>변경 없음</a:t>
+            </a:r>
+          </a:p>
+        </p:txBody>
+      </p:sp>
+      <p:sp>
+        <p:nvSpPr>
+          <p:cNvPr id="7" name="Rounded Rectangle 6"/>
+          <p:cNvSpPr/>
+          <p:nvPr/>
+        </p:nvSpPr>
+        <p:spPr>
+          <a:xfrm>
+            <a:off x="411480" y="2249424"/>
+            <a:ext cx="4206240" cy="566928"/>
+          </a:xfrm>
+          <a:prstGeom prst="roundRect">
+            <a:avLst>
+              <a:gd name="adj" fmla="val 8000"/>
+            </a:avLst>
+          </a:prstGeom>
+          <a:solidFill>
+            <a:srgbClr val="F2F2F2"/>
+          </a:solidFill>
+          <a:ln>
+            <a:noFill/>
+          </a:ln>
+          <a:effectLst/>
+        </p:spPr>
+        <p:style>
+          <a:lnRef idx="1">
+            <a:schemeClr val="accent1"/>
+          </a:lnRef>
+          <a:fillRef idx="3">
+            <a:schemeClr val="accent1"/>
+          </a:fillRef>
+          <a:effectRef idx="2">
+            <a:schemeClr val="accent1"/>
+          </a:effectRef>
+          <a:fontRef idx="minor">
+            <a:schemeClr val="lt1"/>
+          </a:fontRef>
+        </p:style>
+        <p:txBody>
+          <a:bodyPr rtlCol="0" anchor="ctr" wrap="square" lIns="73152" rIns="73152" tIns="73152" bIns="73152"/>
+          <a:lstStyle/>
+          <a:p>
+            <a:pPr algn="ctr">
+              <a:spcAft>
+                <a:spcPts val="300"/>
+              </a:spcAft>
+            </a:pPr>
+            <a:r>
+              <a:rPr sz="1200" b="1" i="0">
+                <a:solidFill>
+                  <a:srgbClr val="262626"/>
+                </a:solidFill>
+                <a:latin typeface="맑은 고딕"/>
+                <a:ea typeface="맑은 고딕"/>
+              </a:rPr>
+              <a:t>EthIf   ─   EthSM → ComM</a:t>
+            </a:r>
+          </a:p>
+        </p:txBody>
+      </p:sp>
+      <p:sp>
+        <p:nvSpPr>
+          <p:cNvPr id="8" name="TextBox 7"/>
+          <p:cNvSpPr txBox="1"/>
+          <p:nvPr/>
+        </p:nvSpPr>
+        <p:spPr>
+          <a:xfrm>
+            <a:off x="4709160" y="2249424"/>
+            <a:ext cx="1188720" cy="566928"/>
+          </a:xfrm>
+          <a:prstGeom prst="rect">
+            <a:avLst/>
+          </a:prstGeom>
+          <a:noFill/>
+        </p:spPr>
+        <p:txBody>
+          <a:bodyPr wrap="square" anchor="ctr" lIns="45720" rIns="45720">
+            <a:spAutoFit/>
+          </a:bodyPr>
+          <a:lstStyle/>
+          <a:p>
+            <a:pPr algn="l">
+              <a:spcAft>
+                <a:spcPts val="300"/>
+              </a:spcAft>
+            </a:pPr>
+            <a:r>
+              <a:rPr sz="950" b="0" i="0">
+                <a:solidFill>
+                  <a:srgbClr val="595959"/>
+                </a:solidFill>
+                <a:latin typeface="맑은 고딕"/>
+                <a:ea typeface="맑은 고딕"/>
+              </a:rPr>
+              <a:t>링크 상태 전달</a:t>
+            </a:r>
+          </a:p>
+        </p:txBody>
+      </p:sp>
+      <p:sp>
+        <p:nvSpPr>
+          <p:cNvPr id="9" name="Rounded Rectangle 8"/>
+          <p:cNvSpPr/>
+          <p:nvPr/>
+        </p:nvSpPr>
+        <p:spPr>
+          <a:xfrm>
+            <a:off x="411480" y="2962656"/>
+            <a:ext cx="2011680" cy="914400"/>
+          </a:xfrm>
+          <a:prstGeom prst="roundRect">
+            <a:avLst>
+              <a:gd name="adj" fmla="val 8000"/>
+            </a:avLst>
+          </a:prstGeom>
+          <a:solidFill>
+            <a:srgbClr val="D96C00"/>
+          </a:solidFill>
+          <a:ln>
+            <a:noFill/>
+          </a:ln>
+          <a:effectLst/>
+        </p:spPr>
+        <p:style>
+          <a:lnRef idx="1">
+            <a:schemeClr val="accent1"/>
+          </a:lnRef>
+          <a:fillRef idx="3">
+            <a:schemeClr val="accent1"/>
+          </a:fillRef>
+          <a:effectRef idx="2">
+            <a:schemeClr val="accent1"/>
+          </a:effectRef>
+          <a:fontRef idx="minor">
+            <a:schemeClr val="lt1"/>
+          </a:fontRef>
+        </p:style>
+        <p:txBody>
+          <a:bodyPr rtlCol="0" anchor="ctr" wrap="square" lIns="73152" rIns="73152" tIns="73152" bIns="73152"/>
+          <a:lstStyle/>
+          <a:p>
+            <a:pPr algn="ctr">
+              <a:spcAft>
+                <a:spcPts val="0"/>
+              </a:spcAft>
+            </a:pPr>
+            <a:r>
+              <a:rPr sz="1400" b="1" i="0">
+                <a:solidFill>
+                  <a:srgbClr val="FFFFFF"/>
+                </a:solidFill>
+                <a:latin typeface="맑은 고딕"/>
+                <a:ea typeface="맑은 고딕"/>
+              </a:rPr>
+              <a:t>Eth</a:t>
+            </a:r>
+          </a:p>
+          <a:p>
+            <a:pPr algn="ctr">
+              <a:spcAft>
+                <a:spcPts val="0"/>
+              </a:spcAft>
+            </a:pPr>
+            <a:r>
+              <a:rPr sz="950" b="0" i="0">
+                <a:solidFill>
+                  <a:srgbClr val="FFFFFF"/>
+                </a:solidFill>
+                <a:latin typeface="맑은 고딕"/>
+                <a:ea typeface="맑은 고딕"/>
+              </a:rPr>
+              <a:t>MAC 드라이버 (MCAL)</a:t>
+            </a:r>
+          </a:p>
+        </p:txBody>
+      </p:sp>
+      <p:sp>
+        <p:nvSpPr>
+          <p:cNvPr id="10" name="Rounded Rectangle 9"/>
+          <p:cNvSpPr/>
+          <p:nvPr/>
+        </p:nvSpPr>
+        <p:spPr>
+          <a:xfrm>
+            <a:off x="2606040" y="2962656"/>
+            <a:ext cx="2011680" cy="914400"/>
+          </a:xfrm>
+          <a:prstGeom prst="roundRect">
+            <a:avLst>
+              <a:gd name="adj" fmla="val 8000"/>
+            </a:avLst>
+          </a:prstGeom>
+          <a:solidFill>
+            <a:srgbClr val="D96C00"/>
+          </a:solidFill>
+          <a:ln>
+            <a:noFill/>
+          </a:ln>
+          <a:effectLst/>
+        </p:spPr>
+        <p:style>
+          <a:lnRef idx="1">
+            <a:schemeClr val="accent1"/>
+          </a:lnRef>
+          <a:fillRef idx="3">
+            <a:schemeClr val="accent1"/>
+          </a:fillRef>
+          <a:effectRef idx="2">
+            <a:schemeClr val="accent1"/>
+          </a:effectRef>
+          <a:fontRef idx="minor">
+            <a:schemeClr val="lt1"/>
+          </a:fontRef>
+        </p:style>
+        <p:txBody>
+          <a:bodyPr rtlCol="0" anchor="ctr" wrap="square" lIns="73152" rIns="73152" tIns="73152" bIns="73152"/>
+          <a:lstStyle/>
+          <a:p>
+            <a:pPr algn="ctr">
+              <a:spcAft>
+                <a:spcPts val="0"/>
+              </a:spcAft>
+            </a:pPr>
+            <a:r>
+              <a:rPr sz="1400" b="1" i="0">
+                <a:solidFill>
+                  <a:srgbClr val="FFFFFF"/>
+                </a:solidFill>
+                <a:latin typeface="맑은 고딕"/>
+                <a:ea typeface="맑은 고딕"/>
+              </a:rPr>
+              <a:t>EthTrcv</a:t>
+            </a:r>
+          </a:p>
+          <a:p>
+            <a:pPr algn="ctr">
+              <a:spcAft>
+                <a:spcPts val="0"/>
+              </a:spcAft>
+            </a:pPr>
+            <a:r>
+              <a:rPr sz="950" b="0" i="0">
+                <a:solidFill>
+                  <a:srgbClr val="FFFFFF"/>
+                </a:solidFill>
+                <a:latin typeface="맑은 고딕"/>
+                <a:ea typeface="맑은 고딕"/>
+              </a:rPr>
+              <a:t>PHY / PLCA 드라이버</a:t>
+            </a:r>
+          </a:p>
+        </p:txBody>
+      </p:sp>
+      <p:sp>
+        <p:nvSpPr>
+          <p:cNvPr id="11" name="TextBox 10"/>
+          <p:cNvSpPr txBox="1"/>
+          <p:nvPr/>
+        </p:nvSpPr>
+        <p:spPr>
+          <a:xfrm>
+            <a:off x="4709160" y="2962656"/>
+            <a:ext cx="1188720" cy="914400"/>
+          </a:xfrm>
+          <a:prstGeom prst="rect">
+            <a:avLst/>
+          </a:prstGeom>
+          <a:noFill/>
+        </p:spPr>
+        <p:txBody>
+          <a:bodyPr wrap="square" anchor="ctr" lIns="45720" rIns="45720">
+            <a:spAutoFit/>
+          </a:bodyPr>
+          <a:lstStyle/>
+          <a:p>
+            <a:pPr algn="l">
+              <a:spcAft>
+                <a:spcPts val="300"/>
+              </a:spcAft>
+            </a:pPr>
+            <a:r>
+              <a:rPr sz="1000" b="1" i="0">
+                <a:solidFill>
+                  <a:srgbClr val="D96C00"/>
+                </a:solidFill>
+                <a:latin typeface="맑은 고딕"/>
+                <a:ea typeface="맑은 고딕"/>
+              </a:rPr>
+              <a:t>★ T1S 차이는
+여기 두 곳</a:t>
+            </a:r>
+          </a:p>
+        </p:txBody>
+      </p:sp>
+      <p:sp>
+        <p:nvSpPr>
+          <p:cNvPr id="12" name="Rounded Rectangle 11"/>
+          <p:cNvSpPr/>
+          <p:nvPr/>
+        </p:nvSpPr>
+        <p:spPr>
+          <a:xfrm>
+            <a:off x="411480" y="4014216"/>
+            <a:ext cx="2011680" cy="548640"/>
+          </a:xfrm>
+          <a:prstGeom prst="roundRect">
+            <a:avLst>
+              <a:gd name="adj" fmla="val 8000"/>
+            </a:avLst>
+          </a:prstGeom>
+          <a:solidFill>
+            <a:srgbClr val="E8EBF5"/>
+          </a:solidFill>
+          <a:ln>
+            <a:noFill/>
+          </a:ln>
+          <a:effectLst/>
+        </p:spPr>
+        <p:style>
+          <a:lnRef idx="1">
+            <a:schemeClr val="accent1"/>
+          </a:lnRef>
+          <a:fillRef idx="3">
+            <a:schemeClr val="accent1"/>
+          </a:fillRef>
+          <a:effectRef idx="2">
+            <a:schemeClr val="accent1"/>
+          </a:effectRef>
+          <a:fontRef idx="minor">
+            <a:schemeClr val="lt1"/>
+          </a:fontRef>
+        </p:style>
+        <p:txBody>
+          <a:bodyPr rtlCol="0" anchor="ctr" wrap="square" lIns="73152" rIns="73152" tIns="73152" bIns="73152"/>
+          <a:lstStyle/>
+          <a:p>
+            <a:pPr algn="ctr">
+              <a:spcAft>
+                <a:spcPts val="300"/>
+              </a:spcAft>
+            </a:pPr>
+            <a:r>
+              <a:rPr sz="1050" b="1" i="0">
+                <a:solidFill>
+                  <a:srgbClr val="1E2761"/>
+                </a:solidFill>
+                <a:latin typeface="맑은 고딕"/>
+                <a:ea typeface="맑은 고딕"/>
+              </a:rPr>
+              <a:t>ETNF 레지스터</a:t>
+            </a:r>
+          </a:p>
+        </p:txBody>
+      </p:sp>
+      <p:sp>
+        <p:nvSpPr>
+          <p:cNvPr id="13" name="Rounded Rectangle 12"/>
+          <p:cNvSpPr/>
+          <p:nvPr/>
+        </p:nvSpPr>
+        <p:spPr>
+          <a:xfrm>
+            <a:off x="2606040" y="4014216"/>
+            <a:ext cx="2011680" cy="548640"/>
+          </a:xfrm>
+          <a:prstGeom prst="roundRect">
+            <a:avLst>
+              <a:gd name="adj" fmla="val 8000"/>
+            </a:avLst>
+          </a:prstGeom>
+          <a:solidFill>
+            <a:srgbClr val="E8EBF5"/>
+          </a:solidFill>
+          <a:ln>
+            <a:noFill/>
+          </a:ln>
+          <a:effectLst/>
+        </p:spPr>
+        <p:style>
+          <a:lnRef idx="1">
+            <a:schemeClr val="accent1"/>
+          </a:lnRef>
+          <a:fillRef idx="3">
+            <a:schemeClr val="accent1"/>
+          </a:fillRef>
+          <a:effectRef idx="2">
+            <a:schemeClr val="accent1"/>
+          </a:effectRef>
+          <a:fontRef idx="minor">
+            <a:schemeClr val="lt1"/>
+          </a:fontRef>
+        </p:style>
+        <p:txBody>
+          <a:bodyPr rtlCol="0" anchor="ctr" wrap="square" lIns="73152" rIns="73152" tIns="73152" bIns="73152"/>
+          <a:lstStyle/>
+          <a:p>
+            <a:pPr algn="ctr">
+              <a:spcAft>
+                <a:spcPts val="300"/>
+              </a:spcAft>
+            </a:pPr>
+            <a:r>
+              <a:rPr sz="1000" b="1" i="0">
+                <a:solidFill>
+                  <a:srgbClr val="1E2761"/>
+                </a:solidFill>
+                <a:latin typeface="맑은 고딕"/>
+                <a:ea typeface="맑은 고딕"/>
+              </a:rPr>
+              <a:t>MDIO (Eth_Read/WriteMii)</a:t>
+            </a:r>
+          </a:p>
+        </p:txBody>
+      </p:sp>
+      <p:cxnSp>
+        <p:nvCxnSpPr>
+          <p:cNvPr id="14" name="Connector 13"/>
+          <p:cNvCxnSpPr/>
+          <p:nvPr/>
+        </p:nvCxnSpPr>
+        <p:spPr>
+          <a:xfrm>
+            <a:off x="1417320" y="3877056"/>
+            <a:ext cx="0" cy="128016"/>
+          </a:xfrm>
+          <a:prstGeom prst="line">
+            <a:avLst/>
+          </a:prstGeom>
+          <a:ln w="19050">
+            <a:solidFill>
+              <a:srgbClr val="595959"/>
+            </a:solidFill>
+            <a:tailEnd type="triangle" w="med" len="med"/>
+          </a:ln>
+        </p:spPr>
+        <p:style>
+          <a:lnRef idx="2">
+            <a:schemeClr val="accent1"/>
+          </a:lnRef>
+          <a:fillRef idx="0">
+            <a:schemeClr val="accent1"/>
+          </a:fillRef>
+          <a:effectRef idx="1">
+            <a:schemeClr val="accent1"/>
+          </a:effectRef>
+          <a:fontRef idx="minor">
+            <a:schemeClr val="tx1"/>
+          </a:fontRef>
+        </p:style>
+      </p:cxnSp>
+      <p:cxnSp>
+        <p:nvCxnSpPr>
+          <p:cNvPr id="15" name="Connector 14"/>
+          <p:cNvCxnSpPr/>
+          <p:nvPr/>
+        </p:nvCxnSpPr>
+        <p:spPr>
+          <a:xfrm>
+            <a:off x="3611880" y="3877056"/>
+            <a:ext cx="0" cy="128016"/>
+          </a:xfrm>
+          <a:prstGeom prst="line">
+            <a:avLst/>
+          </a:prstGeom>
+          <a:ln w="19050">
+            <a:solidFill>
+              <a:srgbClr val="595959"/>
+            </a:solidFill>
+            <a:tailEnd type="triangle" w="med" len="med"/>
+          </a:ln>
+        </p:spPr>
+        <p:style>
+          <a:lnRef idx="2">
+            <a:schemeClr val="accent1"/>
+          </a:lnRef>
+          <a:fillRef idx="0">
+            <a:schemeClr val="accent1"/>
+          </a:fillRef>
+          <a:effectRef idx="1">
+            <a:schemeClr val="accent1"/>
+          </a:effectRef>
+          <a:fontRef idx="minor">
+            <a:schemeClr val="tx1"/>
+          </a:fontRef>
+        </p:style>
+      </p:cxnSp>
+      <p:sp>
+        <p:nvSpPr>
+          <p:cNvPr id="16" name="Rounded Rectangle 15"/>
+          <p:cNvSpPr/>
+          <p:nvPr/>
+        </p:nvSpPr>
+        <p:spPr>
+          <a:xfrm>
+            <a:off x="6035040" y="822960"/>
+            <a:ext cx="3474720" cy="5074920"/>
+          </a:xfrm>
+          <a:prstGeom prst="roundRect">
+            <a:avLst>
+              <a:gd name="adj" fmla="val 8000"/>
+            </a:avLst>
+          </a:prstGeom>
+          <a:solidFill>
+            <a:srgbClr val="F2F2F2"/>
+          </a:solidFill>
+          <a:ln>
+            <a:noFill/>
+          </a:ln>
+          <a:effectLst/>
+        </p:spPr>
+        <p:style>
+          <a:lnRef idx="1">
+            <a:schemeClr val="accent1"/>
+          </a:lnRef>
+          <a:fillRef idx="3">
+            <a:schemeClr val="accent1"/>
+          </a:fillRef>
+          <a:effectRef idx="2">
+            <a:schemeClr val="accent1"/>
+          </a:effectRef>
+          <a:fontRef idx="minor">
+            <a:schemeClr val="lt1"/>
+          </a:fontRef>
+        </p:style>
+        <p:txBody>
+          <a:bodyPr rtlCol="0" anchor="t" wrap="square" lIns="137160" rIns="137160" tIns="137160" bIns="137160"/>
+          <a:lstStyle/>
+          <a:p>
+            <a:pPr algn="l">
+              <a:spcAft>
+                <a:spcPts val="1000"/>
+              </a:spcAft>
+            </a:pPr>
+            <a:r>
+              <a:rPr sz="1350" b="1" i="0">
+                <a:solidFill>
+                  <a:srgbClr val="1E2761"/>
+                </a:solidFill>
+                <a:latin typeface="맑은 고딕"/>
+                <a:ea typeface="맑은 고딕"/>
+              </a:rPr>
+              <a:t>핵심 정리</a:t>
+            </a:r>
+          </a:p>
+          <a:p>
+            <a:pPr algn="l" marL="182880" indent="-146304">
+              <a:spcAft>
+                <a:spcPts val="1000"/>
+              </a:spcAft>
+              <a:buChar char="•"/>
+            </a:pPr>
+            <a:r>
+              <a:rPr sz="1200" b="0" i="0">
+                <a:solidFill>
+                  <a:srgbClr val="262626"/>
+                </a:solidFill>
+                <a:latin typeface="맑은 고딕"/>
+                <a:ea typeface="맑은 고딕"/>
+              </a:rPr>
+              <a:t>상위 계층(TcpIp, SoAd, SOME/IP)은 링크가 T1S인지 몰라도 됨</a:t>
+            </a:r>
+          </a:p>
+          <a:p>
+            <a:pPr algn="l" marL="182880" indent="-146304">
+              <a:spcAft>
+                <a:spcPts val="1000"/>
+              </a:spcAft>
+              <a:buChar char="•"/>
+            </a:pPr>
+            <a:r>
+              <a:rPr sz="1200" b="0" i="0">
+                <a:solidFill>
+                  <a:srgbClr val="262626"/>
+                </a:solidFill>
+                <a:latin typeface="맑은 고딕"/>
+                <a:ea typeface="맑은 고딕"/>
+              </a:rPr>
+              <a:t>스위치가 없으므로 EthSwt 불필요</a:t>
+            </a:r>
+          </a:p>
+          <a:p>
+            <a:pPr algn="l" marL="182880" indent="-146304">
+              <a:spcAft>
+                <a:spcPts val="1000"/>
+              </a:spcAft>
+              <a:buChar char="•"/>
+            </a:pPr>
+            <a:r>
+              <a:rPr sz="1200" b="0" i="0">
+                <a:solidFill>
+                  <a:srgbClr val="262626"/>
+                </a:solidFill>
+                <a:latin typeface="맑은 고딕"/>
+                <a:ea typeface="맑은 고딕"/>
+              </a:rPr>
+              <a:t>U5L은 MAC + 디지털 PHY(PLCA) 내장 → EthTrcv는 Eth_WriteMii 경유로 PHY 설정 (주소 2)</a:t>
+            </a:r>
+          </a:p>
+          <a:p>
+            <a:pPr algn="l" marL="182880" indent="-146304">
+              <a:spcAft>
+                <a:spcPts val="1000"/>
+              </a:spcAft>
+              <a:buChar char="•"/>
+            </a:pPr>
+            <a:r>
+              <a:rPr sz="1200" b="0" i="0">
+                <a:solidFill>
+                  <a:srgbClr val="262626"/>
+                </a:solidFill>
+                <a:latin typeface="맑은 고딕"/>
+                <a:ea typeface="맑은 고딕"/>
+              </a:rPr>
+              <a:t>외부 TC14 트랜시버는 아날로그 전용 → 3핀(TX/RX/ED)으로 PMA가 제어 (T1STXCCTL)</a:t>
+            </a:r>
+          </a:p>
+          <a:p>
+            <a:pPr algn="l" marL="182880" indent="-146304">
+              <a:spcAft>
+                <a:spcPts val="300"/>
+              </a:spcAft>
+              <a:buChar char="•"/>
+            </a:pPr>
+            <a:r>
+              <a:rPr sz="1200" b="1" i="0">
+                <a:solidFill>
+                  <a:srgbClr val="262626"/>
+                </a:solidFill>
+                <a:latin typeface="맑은 고딕"/>
+                <a:ea typeface="맑은 고딕"/>
+              </a:rPr>
+              <a:t>MAC 없는 MCU</a:t>
+            </a:r>
+            <a:r>
+              <a:rPr sz="1200" b="0" i="0">
+                <a:solidFill>
+                  <a:srgbClr val="262626"/>
+                </a:solidFill>
+                <a:latin typeface="맑은 고딕"/>
+                <a:ea typeface="맑은 고딕"/>
+              </a:rPr>
+              <a:t>는 OA TC6 MAC-PHY(SPI) 사용 → Eth 드라이버가 Spi 모듈 위에서 동작, 지연 계산에 SPI 처리량 포함</a:t>
+            </a:r>
+          </a:p>
+        </p:txBody>
+      </p:sp>
+    </p:spTree>
+  </p:cSld>
+  <p:clrMapOvr>
+    <a:masterClrMapping/>
+  </p:clrMapOvr>
+</p:sld>
+</file>
+
+<file path=ppt/slides/slide19.xml><?xml version="1.0" encoding="utf-8"?>
+<p:sld xmlns:a="http://schemas.openxmlformats.org/drawingml/2006/main" xmlns:p="http://schemas.openxmlformats.org/presentationml/2006/main" xmlns:r="http://schemas.openxmlformats.org/officeDocument/2006/relationships">
+  <p:cSld>
+    <p:spTree>
+      <p:nvGrpSpPr>
+        <p:cNvPr id="1" name=""/>
+        <p:cNvGrpSpPr/>
+        <p:nvPr/>
+      </p:nvGrpSpPr>
+      <p:grpSpPr/>
+      <p:sp>
+        <p:nvSpPr>
+          <p:cNvPr id="2" name="TextBox 1">
+            <a:extLst>
+              <a:ext uri="{FF2B5EF4-FFF2-40B4-BE49-F238E27FC236}">
+                <a16:creationId xmlns:a16="http://schemas.microsoft.com/office/drawing/2014/main" id="{A613762B-7392-A016-453D-54A7A34E3004}"/>
+              </a:ext>
+            </a:extLst>
+          </p:cNvPr>
+          <p:cNvSpPr txBox="1"/>
+          <p:nvPr/>
+        </p:nvSpPr>
+        <p:spPr>
+          <a:xfrm>
+            <a:off x="320040" y="109728"/>
+            <a:ext cx="8229600" cy="457200"/>
+          </a:xfrm>
+          <a:prstGeom prst="rect">
+            <a:avLst/>
+          </a:prstGeom>
+          <a:noFill/>
+        </p:spPr>
+        <p:txBody>
+          <a:bodyPr wrap="square">
+            <a:spAutoFit/>
+          </a:bodyPr>
+          <a:lstStyle/>
+          <a:p>
+            <a:pPr marL="342900" indent="-342900">
+              <a:buFont typeface="Wingdings" panose="05000000000000000000" pitchFamily="2" charset="2"/>
+              <a:buChar char="Ø"/>
+            </a:pPr>
+            <a:r>
+              <a:rPr lang="ko-KR" altLang="en-US" sz="2400" b="1" dirty="0">
+                <a:solidFill>
+                  <a:srgbClr val="1E2761"/>
+                </a:solidFill>
+                <a:latin typeface="맑은 고딕"/>
+              </a:rPr>
+              <a:t>Eth · EthTrcv 설정 포인트</a:t>
+            </a:r>
+            <a:endParaRPr sz="2400" b="1" dirty="0">
+              <a:solidFill>
+                <a:srgbClr val="1E2761"/>
+              </a:solidFill>
+              <a:latin typeface="맑은 고딕"/>
+            </a:endParaRPr>
+          </a:p>
+        </p:txBody>
+      </p:sp>
+      <p:sp>
+        <p:nvSpPr>
+          <p:cNvPr id="3" name="TextBox 2"/>
+          <p:cNvSpPr txBox="1"/>
+          <p:nvPr/>
+        </p:nvSpPr>
+        <p:spPr>
+          <a:xfrm>
+            <a:off x="411480" y="731520"/>
+            <a:ext cx="4480560" cy="320040"/>
+          </a:xfrm>
+          <a:prstGeom prst="rect">
+            <a:avLst/>
+          </a:prstGeom>
+          <a:noFill/>
+        </p:spPr>
+        <p:txBody>
+          <a:bodyPr wrap="square" anchor="t" lIns="45720" rIns="45720">
+            <a:spAutoFit/>
+          </a:bodyPr>
+          <a:lstStyle/>
+          <a:p>
+            <a:pPr algn="l">
+              <a:spcAft>
+                <a:spcPts val="300"/>
+              </a:spcAft>
+            </a:pPr>
+            <a:r>
+              <a:rPr sz="1350" b="1" i="0">
+                <a:solidFill>
+                  <a:srgbClr val="1E2761"/>
+                </a:solidFill>
+                <a:latin typeface="맑은 고딕"/>
+                <a:ea typeface="맑은 고딕"/>
+              </a:rPr>
+              <a:t>Eth (MAC, MCAL)</a:t>
+            </a:r>
+          </a:p>
+        </p:txBody>
+      </p:sp>
+      <p:graphicFrame>
+        <p:nvGraphicFramePr>
+          <p:cNvPr id="4" name="Table 3"/>
+          <p:cNvGraphicFramePr>
+            <a:graphicFrameLocks noGrp="1"/>
+          </p:cNvGraphicFramePr>
+          <p:nvPr/>
+        </p:nvGraphicFramePr>
+        <p:xfrm>
+          <a:off x="411480" y="1097280"/>
+          <a:ext cx="4434840" cy="2560320"/>
+        </p:xfrm>
+        <a:graphic>
+          <a:graphicData uri="http://schemas.openxmlformats.org/drawingml/2006/table">
+            <a:tbl>
+              <a:tblPr firstRow="0" bandRow="0">
+                <a:tableStyleId>{5C22544A-7EE6-4342-B048-85BDC9FD1C3A}</a:tableStyleId>
+              </a:tblPr>
+              <a:tblGrid>
+                <a:gridCol w="1554480"/>
+                <a:gridCol w="2880360"/>
+              </a:tblGrid>
+              <a:tr h="512064">
+                <a:tc>
+                  <a:txBody>
+                    <a:bodyPr wrap="square"/>
+                    <a:lstStyle/>
+                    <a:p>
+                      <a:pPr algn="l"/>
+                      <a:r>
+                        <a:rPr sz="1000" b="1" i="0">
+                          <a:solidFill>
+                            <a:srgbClr val="FFFFFF"/>
+                          </a:solidFill>
+                          <a:latin typeface="맑은 고딕"/>
+                          <a:ea typeface="맑은 고딕"/>
+                        </a:rPr>
+                        <a:t>항목</a:t>
+                      </a:r>
+                    </a:p>
+                  </a:txBody>
+                  <a:tcPr marL="54864" marR="54864" marT="27432" marB="27432" anchor="ctr">
+                    <a:solidFill>
+                      <a:srgbClr val="1E2761"/>
+                    </a:solidFill>
+                  </a:tcPr>
+                </a:tc>
+                <a:tc>
+                  <a:txBody>
+                    <a:bodyPr wrap="square"/>
+                    <a:lstStyle/>
+                    <a:p>
+                      <a:pPr algn="l"/>
+                      <a:r>
+                        <a:rPr sz="1000" b="1" i="0">
+                          <a:solidFill>
+                            <a:srgbClr val="FFFFFF"/>
+                          </a:solidFill>
+                          <a:latin typeface="맑은 고딕"/>
+                          <a:ea typeface="맑은 고딕"/>
+                        </a:rPr>
+                        <a:t>T1S 값 / 분석 코드와 연결</a:t>
+                      </a:r>
+                    </a:p>
+                  </a:txBody>
+                  <a:tcPr marL="54864" marR="54864" marT="27432" marB="27432" anchor="ctr">
+                    <a:solidFill>
+                      <a:srgbClr val="1E2761"/>
+                    </a:solidFill>
+                  </a:tcPr>
+                </a:tc>
+              </a:tr>
+              <a:tr h="512064">
+                <a:tc>
+                  <a:txBody>
+                    <a:bodyPr wrap="square"/>
+                    <a:lstStyle/>
+                    <a:p>
+                      <a:pPr algn="l"/>
+                      <a:r>
+                        <a:rPr sz="1000" b="0" i="0">
+                          <a:solidFill>
+                            <a:srgbClr val="262626"/>
+                          </a:solidFill>
+                          <a:latin typeface="맑은 고딕"/>
+                          <a:ea typeface="맑은 고딕"/>
+                        </a:rPr>
+                        <a:t>속도 / 이중</a:t>
+                      </a:r>
+                    </a:p>
+                  </a:txBody>
+                  <a:tcPr marL="54864" marR="54864" marT="27432" marB="27432" anchor="ctr">
+                    <a:solidFill>
+                      <a:srgbClr val="FFFFFF"/>
+                    </a:solidFill>
+                  </a:tcPr>
+                </a:tc>
+                <a:tc>
+                  <a:txBody>
+                    <a:bodyPr wrap="square"/>
+                    <a:lstStyle/>
+                    <a:p>
+                      <a:pPr algn="l"/>
+                      <a:r>
+                        <a:rPr sz="1000" b="0" i="0">
+                          <a:solidFill>
+                            <a:srgbClr val="262626"/>
+                          </a:solidFill>
+                          <a:latin typeface="맑은 고딕"/>
+                          <a:ea typeface="맑은 고딕"/>
+                        </a:rPr>
+                        <a:t>10 Mbps / Half  (ECMR.DM = 0)</a:t>
+                      </a:r>
+                    </a:p>
+                  </a:txBody>
+                  <a:tcPr marL="54864" marR="54864" marT="27432" marB="27432" anchor="ctr">
+                    <a:solidFill>
+                      <a:srgbClr val="FFFFFF"/>
+                    </a:solidFill>
+                  </a:tcPr>
+                </a:tc>
+              </a:tr>
+              <a:tr h="512064">
+                <a:tc>
+                  <a:txBody>
+                    <a:bodyPr wrap="square"/>
+                    <a:lstStyle/>
+                    <a:p>
+                      <a:pPr algn="l"/>
+                      <a:r>
+                        <a:rPr sz="1000" b="0" i="0">
+                          <a:solidFill>
+                            <a:srgbClr val="262626"/>
+                          </a:solidFill>
+                          <a:latin typeface="맑은 고딕"/>
+                          <a:ea typeface="맑은 고딕"/>
+                        </a:rPr>
+                        <a:t>Eth_Init ·</a:t>
+                      </a:r>
+                    </a:p>
+                    <a:p>
+                      <a:pPr algn="l"/>
+                      <a:r>
+                        <a:rPr sz="1000" b="0" i="0">
+                          <a:solidFill>
+                            <a:srgbClr val="262626"/>
+                          </a:solidFill>
+                          <a:latin typeface="맑은 고딕"/>
+                          <a:ea typeface="맑은 고딕"/>
+                        </a:rPr>
+                        <a:t>SetControllerMode</a:t>
+                      </a:r>
+                    </a:p>
+                  </a:txBody>
+                  <a:tcPr marL="54864" marR="54864" marT="27432" marB="27432" anchor="ctr">
+                    <a:solidFill>
+                      <a:srgbClr val="F2F2F2"/>
+                    </a:solidFill>
+                  </a:tcPr>
+                </a:tc>
+                <a:tc>
+                  <a:txBody>
+                    <a:bodyPr wrap="square"/>
+                    <a:lstStyle/>
+                    <a:p>
+                      <a:pPr algn="l"/>
+                      <a:r>
+                        <a:rPr sz="1000" b="0" i="0">
+                          <a:solidFill>
+                            <a:srgbClr val="262626"/>
+                          </a:solidFill>
+                          <a:latin typeface="맑은 고딕"/>
+                          <a:ea typeface="맑은 고딕"/>
+                        </a:rPr>
+                        <a:t>Config → Operation</a:t>
+                      </a:r>
+                    </a:p>
+                    <a:p>
+                      <a:pPr algn="l"/>
+                      <a:r>
+                        <a:rPr sz="1000" b="0" i="0">
+                          <a:solidFill>
+                            <a:srgbClr val="262626"/>
+                          </a:solidFill>
+                          <a:latin typeface="맑은 고딕"/>
+                          <a:ea typeface="맑은 고딕"/>
+                        </a:rPr>
+                        <a:t>R_ETNF_ChangeMode (C1~C3)</a:t>
+                      </a:r>
+                    </a:p>
+                  </a:txBody>
+                  <a:tcPr marL="54864" marR="54864" marT="27432" marB="27432" anchor="ctr">
+                    <a:solidFill>
+                      <a:srgbClr val="F2F2F2"/>
+                    </a:solidFill>
+                  </a:tcPr>
+                </a:tc>
+              </a:tr>
+              <a:tr h="512064">
+                <a:tc>
+                  <a:txBody>
+                    <a:bodyPr wrap="square"/>
+                    <a:lstStyle/>
+                    <a:p>
+                      <a:pPr algn="l"/>
+                      <a:r>
+                        <a:rPr sz="1000" b="0" i="0">
+                          <a:solidFill>
+                            <a:srgbClr val="262626"/>
+                          </a:solidFill>
+                          <a:latin typeface="맑은 고딕"/>
+                          <a:ea typeface="맑은 고딕"/>
+                        </a:rPr>
+                        <a:t>Eth_Transmit ·</a:t>
+                      </a:r>
+                    </a:p>
+                    <a:p>
+                      <a:pPr algn="l"/>
+                      <a:r>
+                        <a:rPr sz="1000" b="0" i="0">
+                          <a:solidFill>
+                            <a:srgbClr val="262626"/>
+                          </a:solidFill>
+                          <a:latin typeface="맑은 고딕"/>
+                          <a:ea typeface="맑은 고딕"/>
+                        </a:rPr>
+                        <a:t>Receive</a:t>
+                      </a:r>
+                    </a:p>
+                  </a:txBody>
+                  <a:tcPr marL="54864" marR="54864" marT="27432" marB="27432" anchor="ctr">
+                    <a:solidFill>
+                      <a:srgbClr val="FFFFFF"/>
+                    </a:solidFill>
+                  </a:tcPr>
+                </a:tc>
+                <a:tc>
+                  <a:txBody>
+                    <a:bodyPr wrap="square"/>
+                    <a:lstStyle/>
+                    <a:p>
+                      <a:pPr algn="l"/>
+                      <a:r>
+                        <a:rPr sz="1000" b="0" i="0">
+                          <a:solidFill>
+                            <a:srgbClr val="262626"/>
+                          </a:solidFill>
+                          <a:latin typeface="맑은 고딕"/>
+                          <a:ea typeface="맑은 고딕"/>
+                        </a:rPr>
+                        <a:t>디스크립터 링 / ISR</a:t>
+                      </a:r>
+                    </a:p>
+                    <a:p>
+                      <a:pPr algn="l"/>
+                      <a:r>
+                        <a:rPr sz="1000" b="0" i="0">
+                          <a:solidFill>
+                            <a:srgbClr val="262626"/>
+                          </a:solidFill>
+                          <a:latin typeface="맑은 고딕"/>
+                          <a:ea typeface="맑은 고딕"/>
+                        </a:rPr>
+                        <a:t>(M1, M2, C6)</a:t>
+                      </a:r>
+                    </a:p>
+                  </a:txBody>
+                  <a:tcPr marL="54864" marR="54864" marT="27432" marB="27432" anchor="ctr">
+                    <a:solidFill>
+                      <a:srgbClr val="FFFFFF"/>
+                    </a:solidFill>
+                  </a:tcPr>
+                </a:tc>
+              </a:tr>
+              <a:tr h="512064">
+                <a:tc>
+                  <a:txBody>
+                    <a:bodyPr wrap="square"/>
+                    <a:lstStyle/>
+                    <a:p>
+                      <a:pPr algn="l"/>
+                      <a:r>
+                        <a:rPr sz="1000" b="0" i="0">
+                          <a:solidFill>
+                            <a:srgbClr val="262626"/>
+                          </a:solidFill>
+                          <a:latin typeface="맑은 고딕"/>
+                          <a:ea typeface="맑은 고딕"/>
+                        </a:rPr>
+                        <a:t>Eth_Read/WriteMii</a:t>
+                      </a:r>
+                    </a:p>
+                  </a:txBody>
+                  <a:tcPr marL="54864" marR="54864" marT="27432" marB="27432" anchor="ctr">
+                    <a:solidFill>
+                      <a:srgbClr val="F2F2F2"/>
+                    </a:solidFill>
+                  </a:tcPr>
+                </a:tc>
+                <a:tc>
+                  <a:txBody>
+                    <a:bodyPr wrap="square"/>
+                    <a:lstStyle/>
+                    <a:p>
+                      <a:pPr algn="l"/>
+                      <a:r>
+                        <a:rPr sz="1000" b="0" i="0">
+                          <a:solidFill>
+                            <a:srgbClr val="262626"/>
+                          </a:solidFill>
+                          <a:latin typeface="맑은 고딕"/>
+                          <a:ea typeface="맑은 고딕"/>
+                        </a:rPr>
+                        <a:t>PHY 접근 통로</a:t>
+                      </a:r>
+                    </a:p>
+                    <a:p>
+                      <a:pPr algn="l"/>
+                      <a:r>
+                        <a:rPr sz="1000" b="0" i="0">
+                          <a:solidFill>
+                            <a:srgbClr val="262626"/>
+                          </a:solidFill>
+                          <a:latin typeface="맑은 고딕"/>
+                          <a:ea typeface="맑은 고딕"/>
+                        </a:rPr>
+                        <a:t>R_ETNF_ReadPhyReg (C5)</a:t>
+                      </a:r>
+                    </a:p>
+                  </a:txBody>
+                  <a:tcPr marL="54864" marR="54864" marT="27432" marB="27432" anchor="ctr">
+                    <a:solidFill>
+                      <a:srgbClr val="F2F2F2"/>
+                    </a:solidFill>
+                  </a:tcPr>
+                </a:tc>
+              </a:tr>
+            </a:tbl>
+          </a:graphicData>
+        </a:graphic>
+      </p:graphicFrame>
+      <p:sp>
+        <p:nvSpPr>
+          <p:cNvPr id="5" name="TextBox 4"/>
+          <p:cNvSpPr txBox="1"/>
+          <p:nvPr/>
+        </p:nvSpPr>
+        <p:spPr>
+          <a:xfrm>
+            <a:off x="5074920" y="731520"/>
+            <a:ext cx="4480560" cy="320040"/>
+          </a:xfrm>
+          <a:prstGeom prst="rect">
+            <a:avLst/>
+          </a:prstGeom>
+          <a:noFill/>
+        </p:spPr>
+        <p:txBody>
+          <a:bodyPr wrap="square" anchor="t" lIns="45720" rIns="45720">
+            <a:spAutoFit/>
+          </a:bodyPr>
+          <a:lstStyle/>
+          <a:p>
+            <a:pPr algn="l">
+              <a:spcAft>
+                <a:spcPts val="300"/>
+              </a:spcAft>
+            </a:pPr>
+            <a:r>
+              <a:rPr sz="1350" b="1" i="0">
+                <a:solidFill>
+                  <a:srgbClr val="1E2761"/>
+                </a:solidFill>
+                <a:latin typeface="맑은 고딕"/>
+                <a:ea typeface="맑은 고딕"/>
+              </a:rPr>
+              <a:t>EthTrcv (PHY)</a:t>
+            </a:r>
+          </a:p>
+        </p:txBody>
+      </p:sp>
+      <p:graphicFrame>
+        <p:nvGraphicFramePr>
+          <p:cNvPr id="6" name="Table 5"/>
+          <p:cNvGraphicFramePr>
+            <a:graphicFrameLocks noGrp="1"/>
+          </p:cNvGraphicFramePr>
+          <p:nvPr/>
+        </p:nvGraphicFramePr>
+        <p:xfrm>
+          <a:off x="5074920" y="1097280"/>
+          <a:ext cx="4434840" cy="2560320"/>
+        </p:xfrm>
+        <a:graphic>
+          <a:graphicData uri="http://schemas.openxmlformats.org/drawingml/2006/table">
+            <a:tbl>
+              <a:tblPr firstRow="0" bandRow="0">
+                <a:tableStyleId>{5C22544A-7EE6-4342-B048-85BDC9FD1C3A}</a:tableStyleId>
+              </a:tblPr>
+              <a:tblGrid>
+                <a:gridCol w="1600200"/>
+                <a:gridCol w="2834640"/>
+              </a:tblGrid>
+              <a:tr h="365760">
+                <a:tc>
+                  <a:txBody>
+                    <a:bodyPr wrap="square"/>
+                    <a:lstStyle/>
+                    <a:p>
+                      <a:pPr algn="l"/>
+                      <a:r>
+                        <a:rPr sz="1000" b="1" i="0">
+                          <a:solidFill>
+                            <a:srgbClr val="FFFFFF"/>
+                          </a:solidFill>
+                          <a:latin typeface="맑은 고딕"/>
+                          <a:ea typeface="맑은 고딕"/>
+                        </a:rPr>
+                        <a:t>항목</a:t>
+                      </a:r>
+                    </a:p>
+                  </a:txBody>
+                  <a:tcPr marL="54864" marR="54864" marT="27432" marB="27432" anchor="ctr">
+                    <a:solidFill>
+                      <a:srgbClr val="1E2761"/>
+                    </a:solidFill>
+                  </a:tcPr>
+                </a:tc>
+                <a:tc>
+                  <a:txBody>
+                    <a:bodyPr wrap="square"/>
+                    <a:lstStyle/>
+                    <a:p>
+                      <a:pPr algn="l"/>
+                      <a:r>
+                        <a:rPr sz="1000" b="1" i="0">
+                          <a:solidFill>
+                            <a:srgbClr val="FFFFFF"/>
+                          </a:solidFill>
+                          <a:latin typeface="맑은 고딕"/>
+                          <a:ea typeface="맑은 고딕"/>
+                        </a:rPr>
+                        <a:t>값</a:t>
+                      </a:r>
+                    </a:p>
+                  </a:txBody>
+                  <a:tcPr marL="54864" marR="54864" marT="27432" marB="27432" anchor="ctr">
+                    <a:solidFill>
+                      <a:srgbClr val="1E2761"/>
+                    </a:solidFill>
+                  </a:tcPr>
+                </a:tc>
+              </a:tr>
+              <a:tr h="365760">
+                <a:tc>
+                  <a:txBody>
+                    <a:bodyPr wrap="square"/>
+                    <a:lstStyle/>
+                    <a:p>
+                      <a:pPr algn="l"/>
+                      <a:r>
+                        <a:rPr sz="1000" b="0" i="0">
+                          <a:solidFill>
+                            <a:srgbClr val="262626"/>
+                          </a:solidFill>
+                          <a:latin typeface="맑은 고딕"/>
+                          <a:ea typeface="맑은 고딕"/>
+                        </a:rPr>
+                        <a:t>MII(MDIO) 주소</a:t>
+                      </a:r>
+                    </a:p>
+                  </a:txBody>
+                  <a:tcPr marL="54864" marR="54864" marT="27432" marB="27432" anchor="ctr">
+                    <a:solidFill>
+                      <a:srgbClr val="FFFFFF"/>
+                    </a:solidFill>
+                  </a:tcPr>
+                </a:tc>
+                <a:tc>
+                  <a:txBody>
+                    <a:bodyPr wrap="square"/>
+                    <a:lstStyle/>
+                    <a:p>
+                      <a:pPr algn="l"/>
+                      <a:r>
+                        <a:rPr sz="1000" b="0" i="0">
+                          <a:solidFill>
+                            <a:srgbClr val="262626"/>
+                          </a:solidFill>
+                          <a:latin typeface="맑은 고딕"/>
+                          <a:ea typeface="맑은 고딕"/>
+                        </a:rPr>
+                        <a:t>2  (주소 0 무응답, T1SCTL0.PHY_ADD)</a:t>
+                      </a:r>
+                    </a:p>
+                  </a:txBody>
+                  <a:tcPr marL="54864" marR="54864" marT="27432" marB="27432" anchor="ctr">
+                    <a:solidFill>
+                      <a:srgbClr val="FFFFFF"/>
+                    </a:solidFill>
+                  </a:tcPr>
+                </a:tc>
+              </a:tr>
+              <a:tr h="365760">
+                <a:tc>
+                  <a:txBody>
+                    <a:bodyPr wrap="square"/>
+                    <a:lstStyle/>
+                    <a:p>
+                      <a:pPr algn="l"/>
+                      <a:r>
+                        <a:rPr sz="1000" b="0" i="0">
+                          <a:solidFill>
+                            <a:srgbClr val="262626"/>
+                          </a:solidFill>
+                          <a:latin typeface="맑은 고딕"/>
+                          <a:ea typeface="맑은 고딕"/>
+                        </a:rPr>
+                        <a:t>속도 / 이중</a:t>
+                      </a:r>
+                    </a:p>
+                  </a:txBody>
+                  <a:tcPr marL="54864" marR="54864" marT="27432" marB="27432" anchor="ctr">
+                    <a:solidFill>
+                      <a:srgbClr val="F2F2F2"/>
+                    </a:solidFill>
+                  </a:tcPr>
+                </a:tc>
+                <a:tc>
+                  <a:txBody>
+                    <a:bodyPr wrap="square"/>
+                    <a:lstStyle/>
+                    <a:p>
+                      <a:pPr algn="l"/>
+                      <a:r>
+                        <a:rPr sz="1000" b="0" i="0">
+                          <a:solidFill>
+                            <a:srgbClr val="262626"/>
+                          </a:solidFill>
+                          <a:latin typeface="맑은 고딕"/>
+                          <a:ea typeface="맑은 고딕"/>
+                        </a:rPr>
+                        <a:t>10 Mbps / Half</a:t>
+                      </a:r>
+                    </a:p>
+                  </a:txBody>
+                  <a:tcPr marL="54864" marR="54864" marT="27432" marB="27432" anchor="ctr">
+                    <a:solidFill>
+                      <a:srgbClr val="F2F2F2"/>
+                    </a:solidFill>
+                  </a:tcPr>
+                </a:tc>
+              </a:tr>
+              <a:tr h="365760">
+                <a:tc>
+                  <a:txBody>
+                    <a:bodyPr wrap="square"/>
+                    <a:lstStyle/>
+                    <a:p>
+                      <a:pPr algn="l"/>
+                      <a:r>
+                        <a:rPr sz="1000" b="0" i="0">
+                          <a:solidFill>
+                            <a:srgbClr val="262626"/>
+                          </a:solidFill>
+                          <a:latin typeface="맑은 고딕"/>
+                          <a:ea typeface="맑은 고딕"/>
+                        </a:rPr>
+                        <a:t>Auto-Negotiation</a:t>
+                      </a:r>
+                    </a:p>
+                  </a:txBody>
+                  <a:tcPr marL="54864" marR="54864" marT="27432" marB="27432" anchor="ctr">
+                    <a:solidFill>
+                      <a:srgbClr val="FFFFFF"/>
+                    </a:solidFill>
+                  </a:tcPr>
+                </a:tc>
+                <a:tc>
+                  <a:txBody>
+                    <a:bodyPr wrap="square"/>
+                    <a:lstStyle/>
+                    <a:p>
+                      <a:pPr algn="l"/>
+                      <a:r>
+                        <a:rPr sz="1000" b="0" i="0">
+                          <a:solidFill>
+                            <a:srgbClr val="262626"/>
+                          </a:solidFill>
+                          <a:latin typeface="맑은 고딕"/>
+                          <a:ea typeface="맑은 고딕"/>
+                        </a:rPr>
+                        <a:t>사용 안 함 (T1S에 없음)</a:t>
+                      </a:r>
+                    </a:p>
+                  </a:txBody>
+                  <a:tcPr marL="54864" marR="54864" marT="27432" marB="27432" anchor="ctr">
+                    <a:solidFill>
+                      <a:srgbClr val="FFFFFF"/>
+                    </a:solidFill>
+                  </a:tcPr>
+                </a:tc>
+              </a:tr>
+              <a:tr h="365760">
+                <a:tc>
+                  <a:txBody>
+                    <a:bodyPr wrap="square"/>
+                    <a:lstStyle/>
+                    <a:p>
+                      <a:pPr algn="l"/>
+                      <a:r>
+                        <a:rPr sz="1000" b="0" i="0">
+                          <a:solidFill>
+                            <a:srgbClr val="262626"/>
+                          </a:solidFill>
+                          <a:latin typeface="맑은 고딕"/>
+                          <a:ea typeface="맑은 고딕"/>
+                        </a:rPr>
+                        <a:t>PLCA Node ID</a:t>
+                      </a:r>
+                    </a:p>
+                  </a:txBody>
+                  <a:tcPr marL="54864" marR="54864" marT="27432" marB="27432" anchor="ctr">
+                    <a:solidFill>
+                      <a:srgbClr val="F2F2F2"/>
+                    </a:solidFill>
+                  </a:tcPr>
+                </a:tc>
+                <a:tc>
+                  <a:txBody>
+                    <a:bodyPr wrap="square"/>
+                    <a:lstStyle/>
+                    <a:p>
+                      <a:pPr algn="l"/>
+                      <a:r>
+                        <a:rPr sz="1000" b="0" i="0">
+                          <a:solidFill>
+                            <a:srgbClr val="262626"/>
+                          </a:solidFill>
+                          <a:latin typeface="맑은 고딕"/>
+                          <a:ea typeface="맑은 고딕"/>
+                        </a:rPr>
+                        <a:t>ECU마다 고유 (코디네이터 = 0)</a:t>
+                      </a:r>
+                    </a:p>
+                  </a:txBody>
+                  <a:tcPr marL="54864" marR="54864" marT="27432" marB="27432" anchor="ctr">
+                    <a:solidFill>
+                      <a:srgbClr val="F2F2F2"/>
+                    </a:solidFill>
+                  </a:tcPr>
+                </a:tc>
+              </a:tr>
+              <a:tr h="365760">
+                <a:tc>
+                  <a:txBody>
+                    <a:bodyPr wrap="square"/>
+                    <a:lstStyle/>
+                    <a:p>
+                      <a:pPr algn="l"/>
+                      <a:r>
+                        <a:rPr sz="1000" b="0" i="0">
+                          <a:solidFill>
+                            <a:srgbClr val="262626"/>
+                          </a:solidFill>
+                          <a:latin typeface="맑은 고딕"/>
+                          <a:ea typeface="맑은 고딕"/>
+                        </a:rPr>
+                        <a:t>PLCA Node Count</a:t>
+                      </a:r>
+                    </a:p>
+                  </a:txBody>
+                  <a:tcPr marL="54864" marR="54864" marT="27432" marB="27432" anchor="ctr">
+                    <a:solidFill>
+                      <a:srgbClr val="FFFFFF"/>
+                    </a:solidFill>
+                  </a:tcPr>
+                </a:tc>
+                <a:tc>
+                  <a:txBody>
+                    <a:bodyPr wrap="square"/>
+                    <a:lstStyle/>
+                    <a:p>
+                      <a:pPr algn="l"/>
+                      <a:r>
+                        <a:rPr sz="1000" b="0" i="0">
+                          <a:solidFill>
+                            <a:srgbClr val="262626"/>
+                          </a:solidFill>
+                          <a:latin typeface="맑은 고딕"/>
+                          <a:ea typeface="맑은 고딕"/>
+                        </a:rPr>
+                        <a:t>코디네이터에만 의미</a:t>
+                      </a:r>
+                    </a:p>
+                  </a:txBody>
+                  <a:tcPr marL="54864" marR="54864" marT="27432" marB="27432" anchor="ctr">
+                    <a:solidFill>
+                      <a:srgbClr val="FFFFFF"/>
+                    </a:solidFill>
+                  </a:tcPr>
+                </a:tc>
+              </a:tr>
+              <a:tr h="365760">
+                <a:tc>
+                  <a:txBody>
+                    <a:bodyPr wrap="square"/>
+                    <a:lstStyle/>
+                    <a:p>
+                      <a:pPr algn="l"/>
+                      <a:r>
+                        <a:rPr sz="1000" b="0" i="0">
+                          <a:solidFill>
+                            <a:srgbClr val="262626"/>
+                          </a:solidFill>
+                          <a:latin typeface="맑은 고딕"/>
+                          <a:ea typeface="맑은 고딕"/>
+                        </a:rPr>
+                        <a:t>TO_TIMER / Burst</a:t>
+                      </a:r>
+                    </a:p>
+                  </a:txBody>
+                  <a:tcPr marL="54864" marR="54864" marT="27432" marB="27432" anchor="ctr">
+                    <a:solidFill>
+                      <a:srgbClr val="F2F2F2"/>
+                    </a:solidFill>
+                  </a:tcPr>
+                </a:tc>
+                <a:tc>
+                  <a:txBody>
+                    <a:bodyPr wrap="square"/>
+                    <a:lstStyle/>
+                    <a:p>
+                      <a:pPr algn="l"/>
+                      <a:r>
+                        <a:rPr sz="1000" b="0" i="0">
+                          <a:solidFill>
+                            <a:srgbClr val="262626"/>
+                          </a:solidFill>
+                          <a:latin typeface="맑은 고딕"/>
+                          <a:ea typeface="맑은 고딕"/>
+                        </a:rPr>
+                        <a:t>네트워크 전체 동일</a:t>
+                      </a:r>
+                    </a:p>
+                  </a:txBody>
+                  <a:tcPr marL="54864" marR="54864" marT="27432" marB="27432" anchor="ctr">
+                    <a:solidFill>
+                      <a:srgbClr val="F2F2F2"/>
+                    </a:solidFill>
+                  </a:tcPr>
+                </a:tc>
+              </a:tr>
+            </a:tbl>
+          </a:graphicData>
+        </a:graphic>
+      </p:graphicFrame>
+      <p:sp>
+        <p:nvSpPr>
+          <p:cNvPr id="7" name="Rounded Rectangle 6"/>
+          <p:cNvSpPr/>
+          <p:nvPr/>
+        </p:nvSpPr>
+        <p:spPr>
+          <a:xfrm>
+            <a:off x="411480" y="3886200"/>
+            <a:ext cx="9098280" cy="1097280"/>
+          </a:xfrm>
+          <a:prstGeom prst="roundRect">
+            <a:avLst>
+              <a:gd name="adj" fmla="val 8000"/>
+            </a:avLst>
+          </a:prstGeom>
+          <a:solidFill>
+            <a:srgbClr val="FBE9E9"/>
+          </a:solidFill>
+          <a:ln>
+            <a:noFill/>
+          </a:ln>
+          <a:effectLst/>
+        </p:spPr>
+        <p:style>
+          <a:lnRef idx="1">
+            <a:schemeClr val="accent1"/>
+          </a:lnRef>
+          <a:fillRef idx="3">
+            <a:schemeClr val="accent1"/>
+          </a:fillRef>
+          <a:effectRef idx="2">
+            <a:schemeClr val="accent1"/>
+          </a:effectRef>
+          <a:fontRef idx="minor">
+            <a:schemeClr val="lt1"/>
+          </a:fontRef>
+        </p:style>
+        <p:txBody>
+          <a:bodyPr rtlCol="0" anchor="t" wrap="square" lIns="128016" rIns="128016" tIns="128016" bIns="128016"/>
+          <a:lstStyle/>
+          <a:p>
+            <a:pPr algn="l">
+              <a:spcAft>
+                <a:spcPts val="400"/>
+              </a:spcAft>
+            </a:pPr>
+            <a:r>
+              <a:rPr sz="1200" b="1" i="0">
+                <a:solidFill>
+                  <a:srgbClr val="C00000"/>
+                </a:solidFill>
+                <a:latin typeface="맑은 고딕"/>
+                <a:ea typeface="맑은 고딕"/>
+              </a:rPr>
+              <a:t>Dem 이벤트 (Eth SWS) — 반이중 T1S에서 특히 중요</a:t>
+            </a:r>
+          </a:p>
+          <a:p>
+            <a:pPr algn="l" marL="182880" indent="-146304">
+              <a:spcAft>
+                <a:spcPts val="300"/>
+              </a:spcAft>
+              <a:buChar char="•"/>
+            </a:pPr>
+            <a:r>
+              <a:rPr sz="1050" b="1" i="0">
+                <a:solidFill>
+                  <a:srgbClr val="262626"/>
+                </a:solidFill>
+                <a:latin typeface="Courier New"/>
+                <a:ea typeface="Courier New"/>
+              </a:rPr>
+              <a:t>ETH_E_ACCESS</a:t>
+            </a:r>
+            <a:r>
+              <a:rPr sz="1050" b="0" i="0">
+                <a:solidFill>
+                  <a:srgbClr val="262626"/>
+                </a:solidFill>
+                <a:latin typeface="맑은 고딕"/>
+                <a:ea typeface="맑은 고딕"/>
+              </a:rPr>
+              <a:t>: HW 접근 실패 → 모드 전환·PHY 대기 타임아웃(m9)을 여기로 보고</a:t>
+            </a:r>
+          </a:p>
+          <a:p>
+            <a:pPr algn="l" marL="182880" indent="-146304">
+              <a:spcAft>
+                <a:spcPts val="300"/>
+              </a:spcAft>
+              <a:buChar char="•"/>
+            </a:pPr>
+            <a:r>
+              <a:rPr sz="1050" b="1" i="0">
+                <a:solidFill>
+                  <a:srgbClr val="262626"/>
+                </a:solidFill>
+                <a:latin typeface="Courier New"/>
+                <a:ea typeface="Courier New"/>
+              </a:rPr>
+              <a:t>ETH_E_SINGLE/MULTIPLE/LATECOLLISION</a:t>
+            </a:r>
+            <a:r>
+              <a:rPr sz="1050" b="0" i="0">
+                <a:solidFill>
+                  <a:srgbClr val="262626"/>
+                </a:solidFill>
+                <a:latin typeface="맑은 고딕"/>
+                <a:ea typeface="맑은 고딕"/>
+              </a:rPr>
+              <a:t>: PLCA 정상이면 0 → 증가 시 ID 중복·PLCA 꺼진 노드 의심</a:t>
+            </a:r>
+          </a:p>
+        </p:txBody>
+      </p:sp>
+      <p:sp>
+        <p:nvSpPr>
+          <p:cNvPr id="8" name="Rounded Rectangle 7"/>
+          <p:cNvSpPr/>
+          <p:nvPr/>
+        </p:nvSpPr>
+        <p:spPr>
+          <a:xfrm>
+            <a:off x="411480" y="5120640"/>
+            <a:ext cx="9098280" cy="777240"/>
+          </a:xfrm>
+          <a:prstGeom prst="roundRect">
+            <a:avLst>
+              <a:gd name="adj" fmla="val 8000"/>
+            </a:avLst>
+          </a:prstGeom>
+          <a:solidFill>
+            <a:srgbClr val="FAF4DC"/>
+          </a:solidFill>
+          <a:ln>
+            <a:noFill/>
+          </a:ln>
+          <a:effectLst/>
+        </p:spPr>
+        <p:style>
+          <a:lnRef idx="1">
+            <a:schemeClr val="accent1"/>
+          </a:lnRef>
+          <a:fillRef idx="3">
+            <a:schemeClr val="accent1"/>
+          </a:fillRef>
+          <a:effectRef idx="2">
+            <a:schemeClr val="accent1"/>
+          </a:effectRef>
+          <a:fontRef idx="minor">
+            <a:schemeClr val="lt1"/>
+          </a:fontRef>
+        </p:style>
+        <p:txBody>
+          <a:bodyPr rtlCol="0" anchor="ctr" wrap="square" lIns="128016" rIns="128016" tIns="128016" bIns="128016"/>
+          <a:lstStyle/>
+          <a:p>
+            <a:pPr algn="l">
+              <a:spcAft>
+                <a:spcPts val="300"/>
+              </a:spcAft>
+            </a:pPr>
+            <a:r>
+              <a:rPr sz="1050" b="1" i="0">
+                <a:solidFill>
+                  <a:srgbClr val="9C7A00"/>
+                </a:solidFill>
+                <a:latin typeface="맑은 고딕"/>
+                <a:ea typeface="맑은 고딕"/>
+              </a:rPr>
+              <a:t>주의: </a:t>
+            </a:r>
+            <a:r>
+              <a:rPr sz="1050" b="0" i="0">
+                <a:solidFill>
+                  <a:srgbClr val="262626"/>
+                </a:solidFill>
+                <a:latin typeface="맑은 고딕"/>
+                <a:ea typeface="맑은 고딕"/>
+              </a:rPr>
+              <a:t>PLCA 파라미터 이름은 AUTOSAR 릴리스·벤더마다 다름. 구버전 스택은 표준 파라미터가 없을 수 있어 Vendor-specific 파라미터나 Init 콜아웃에서 MDIO로 직접 설정 → 사용하는 릴리스와 Renesas MCAL/EthTrcv BSWMD에서 확인</a:t>
+            </a:r>
+          </a:p>
+        </p:txBody>
+      </p:sp>
+    </p:spTree>
+  </p:cSld>
+  <p:clrMapOvr>
+    <a:masterClrMapping/>
+  </p:clrMapOvr>
+</p:sld>
+</file>
+
+<file path=ppt/slides/slide20.xml><?xml version="1.0" encoding="utf-8"?>
+<p:sld xmlns:a="http://schemas.openxmlformats.org/drawingml/2006/main" xmlns:p="http://schemas.openxmlformats.org/presentationml/2006/main" xmlns:r="http://schemas.openxmlformats.org/officeDocument/2006/relationships">
+  <p:cSld>
+    <p:spTree>
+      <p:nvGrpSpPr>
+        <p:cNvPr id="1" name=""/>
+        <p:cNvGrpSpPr/>
+        <p:nvPr/>
+      </p:nvGrpSpPr>
+      <p:grpSpPr/>
+      <p:sp>
+        <p:nvSpPr>
+          <p:cNvPr id="2" name="TextBox 1">
+            <a:extLst>
+              <a:ext uri="{FF2B5EF4-FFF2-40B4-BE49-F238E27FC236}">
+                <a16:creationId xmlns:a16="http://schemas.microsoft.com/office/drawing/2014/main" id="{A613762B-7392-A016-453D-54A7A34E3004}"/>
+              </a:ext>
+            </a:extLst>
+          </p:cNvPr>
+          <p:cNvSpPr txBox="1"/>
+          <p:nvPr/>
+        </p:nvSpPr>
+        <p:spPr>
+          <a:xfrm>
+            <a:off x="320040" y="109728"/>
+            <a:ext cx="8229600" cy="457200"/>
+          </a:xfrm>
+          <a:prstGeom prst="rect">
+            <a:avLst/>
+          </a:prstGeom>
+          <a:noFill/>
+        </p:spPr>
+        <p:txBody>
+          <a:bodyPr wrap="square">
+            <a:spAutoFit/>
+          </a:bodyPr>
+          <a:lstStyle/>
+          <a:p>
+            <a:pPr marL="342900" indent="-342900">
+              <a:buFont typeface="Wingdings" panose="05000000000000000000" pitchFamily="2" charset="2"/>
+              <a:buChar char="Ø"/>
+            </a:pPr>
+            <a:r>
+              <a:rPr lang="ko-KR" altLang="en-US" sz="2400" b="1" dirty="0">
+                <a:solidFill>
+                  <a:srgbClr val="1E2761"/>
+                </a:solidFill>
+                <a:latin typeface="맑은 고딕"/>
+              </a:rPr>
+              <a:t>EthTrcv 초기화 시퀀스와 설계 체크리스트</a:t>
+            </a:r>
+            <a:endParaRPr sz="2400" b="1" dirty="0">
+              <a:solidFill>
+                <a:srgbClr val="1E2761"/>
+              </a:solidFill>
+              <a:latin typeface="맑은 고딕"/>
+            </a:endParaRPr>
+          </a:p>
+        </p:txBody>
+      </p:sp>
+      <p:sp>
+        <p:nvSpPr>
+          <p:cNvPr id="3" name="TextBox 2"/>
+          <p:cNvSpPr txBox="1"/>
+          <p:nvPr/>
+        </p:nvSpPr>
+        <p:spPr>
+          <a:xfrm>
+            <a:off x="411480" y="731520"/>
+            <a:ext cx="4754880" cy="320040"/>
+          </a:xfrm>
+          <a:prstGeom prst="rect">
+            <a:avLst/>
+          </a:prstGeom>
+          <a:noFill/>
+        </p:spPr>
+        <p:txBody>
+          <a:bodyPr wrap="square" anchor="t" lIns="45720" rIns="45720">
+            <a:spAutoFit/>
+          </a:bodyPr>
+          <a:lstStyle/>
+          <a:p>
+            <a:pPr algn="l">
+              <a:spcAft>
+                <a:spcPts val="300"/>
+              </a:spcAft>
+            </a:pPr>
+            <a:r>
+              <a:rPr sz="1250" b="1" i="0">
+                <a:solidFill>
+                  <a:srgbClr val="1E2761"/>
+                </a:solidFill>
+                <a:latin typeface="맑은 고딕"/>
+                <a:ea typeface="맑은 고딕"/>
+              </a:rPr>
+              <a:t>EthTrcv_SetTransceiverMode(ACTIVE) 내부</a:t>
+            </a:r>
+          </a:p>
+        </p:txBody>
+      </p:sp>
+      <p:sp>
+        <p:nvSpPr>
+          <p:cNvPr id="4" name="Oval 3"/>
+          <p:cNvSpPr/>
+          <p:nvPr/>
+        </p:nvSpPr>
+        <p:spPr>
+          <a:xfrm>
+            <a:off x="411480" y="1115568"/>
+            <a:ext cx="457200" cy="457200"/>
+          </a:xfrm>
+          <a:prstGeom prst="ellipse">
+            <a:avLst/>
+          </a:prstGeom>
+          <a:solidFill>
+            <a:srgbClr val="C00000"/>
+          </a:solidFill>
+          <a:ln>
+            <a:noFill/>
+          </a:ln>
+          <a:effectLst/>
+        </p:spPr>
+        <p:style>
+          <a:lnRef idx="1">
+            <a:schemeClr val="accent1"/>
+          </a:lnRef>
+          <a:fillRef idx="3">
+            <a:schemeClr val="accent1"/>
+          </a:fillRef>
+          <a:effectRef idx="2">
+            <a:schemeClr val="accent1"/>
+          </a:effectRef>
+          <a:fontRef idx="minor">
+            <a:schemeClr val="lt1"/>
+          </a:fontRef>
+        </p:style>
+        <p:txBody>
+          <a:bodyPr rtlCol="0" anchor="ctr" wrap="square" lIns="0" rIns="0" tIns="0" bIns="0"/>
+          <a:lstStyle/>
+          <a:p>
+            <a:pPr algn="ctr">
+              <a:spcAft>
+                <a:spcPts val="300"/>
+              </a:spcAft>
+            </a:pPr>
+            <a:r>
+              <a:rPr sz="1200" b="1" i="0">
+                <a:solidFill>
+                  <a:srgbClr val="FFFFFF"/>
+                </a:solidFill>
+                <a:latin typeface="맑은 고딕"/>
+                <a:ea typeface="맑은 고딕"/>
+              </a:rPr>
+              <a:t>1</a:t>
+            </a:r>
+          </a:p>
+        </p:txBody>
+      </p:sp>
+      <p:sp>
+        <p:nvSpPr>
+          <p:cNvPr id="5" name="TextBox 4"/>
+          <p:cNvSpPr txBox="1"/>
+          <p:nvPr/>
+        </p:nvSpPr>
+        <p:spPr>
+          <a:xfrm>
+            <a:off x="960120" y="1078992"/>
+            <a:ext cx="4206240" cy="548640"/>
+          </a:xfrm>
+          <a:prstGeom prst="rect">
+            <a:avLst/>
+          </a:prstGeom>
+          <a:noFill/>
+        </p:spPr>
+        <p:txBody>
+          <a:bodyPr wrap="square" anchor="ctr" lIns="45720" rIns="45720">
+            <a:spAutoFit/>
+          </a:bodyPr>
+          <a:lstStyle/>
+          <a:p>
+            <a:pPr algn="l">
+              <a:spcAft>
+                <a:spcPts val="0"/>
+              </a:spcAft>
+            </a:pPr>
+            <a:r>
+              <a:rPr sz="1100" b="1" i="0">
+                <a:solidFill>
+                  <a:srgbClr val="262626"/>
+                </a:solidFill>
+                <a:latin typeface="Courier New"/>
+                <a:ea typeface="Courier New"/>
+              </a:rPr>
+              <a:t>CONTROL.RESET → 완료 대기</a:t>
+            </a:r>
+          </a:p>
+          <a:p>
+            <a:pPr algn="l">
+              <a:spcAft>
+                <a:spcPts val="0"/>
+              </a:spcAft>
+            </a:pPr>
+            <a:r>
+              <a:rPr sz="950" b="0" i="0">
+                <a:solidFill>
+                  <a:srgbClr val="595959"/>
+                </a:solidFill>
+                <a:latin typeface="맑은 고딕"/>
+                <a:ea typeface="맑은 고딕"/>
+              </a:rPr>
+              <a:t>타임아웃 필수</a:t>
+            </a:r>
+          </a:p>
+        </p:txBody>
+      </p:sp>
+      <p:sp>
+        <p:nvSpPr>
+          <p:cNvPr id="6" name="Oval 5"/>
+          <p:cNvSpPr/>
+          <p:nvPr/>
+        </p:nvSpPr>
+        <p:spPr>
+          <a:xfrm>
+            <a:off x="411480" y="1783080"/>
+            <a:ext cx="457200" cy="457200"/>
+          </a:xfrm>
+          <a:prstGeom prst="ellipse">
+            <a:avLst/>
+          </a:prstGeom>
+          <a:solidFill>
+            <a:srgbClr val="1E2761"/>
+          </a:solidFill>
+          <a:ln>
+            <a:noFill/>
+          </a:ln>
+          <a:effectLst/>
+        </p:spPr>
+        <p:style>
+          <a:lnRef idx="1">
+            <a:schemeClr val="accent1"/>
+          </a:lnRef>
+          <a:fillRef idx="3">
+            <a:schemeClr val="accent1"/>
+          </a:fillRef>
+          <a:effectRef idx="2">
+            <a:schemeClr val="accent1"/>
+          </a:effectRef>
+          <a:fontRef idx="minor">
+            <a:schemeClr val="lt1"/>
+          </a:fontRef>
+        </p:style>
+        <p:txBody>
+          <a:bodyPr rtlCol="0" anchor="ctr" wrap="square" lIns="0" rIns="0" tIns="0" bIns="0"/>
+          <a:lstStyle/>
+          <a:p>
+            <a:pPr algn="ctr">
+              <a:spcAft>
+                <a:spcPts val="300"/>
+              </a:spcAft>
+            </a:pPr>
+            <a:r>
+              <a:rPr sz="1200" b="1" i="0">
+                <a:solidFill>
+                  <a:srgbClr val="FFFFFF"/>
+                </a:solidFill>
+                <a:latin typeface="맑은 고딕"/>
+                <a:ea typeface="맑은 고딕"/>
+              </a:rPr>
+              <a:t>2</a:t>
+            </a:r>
+          </a:p>
+        </p:txBody>
+      </p:sp>
+      <p:sp>
+        <p:nvSpPr>
+          <p:cNvPr id="7" name="TextBox 6"/>
+          <p:cNvSpPr txBox="1"/>
+          <p:nvPr/>
+        </p:nvSpPr>
+        <p:spPr>
+          <a:xfrm>
+            <a:off x="960120" y="1746504"/>
+            <a:ext cx="4206240" cy="548640"/>
+          </a:xfrm>
+          <a:prstGeom prst="rect">
+            <a:avLst/>
+          </a:prstGeom>
+          <a:noFill/>
+        </p:spPr>
+        <p:txBody>
+          <a:bodyPr wrap="square" anchor="ctr" lIns="45720" rIns="45720">
+            <a:spAutoFit/>
+          </a:bodyPr>
+          <a:lstStyle/>
+          <a:p>
+            <a:pPr algn="l">
+              <a:spcAft>
+                <a:spcPts val="0"/>
+              </a:spcAft>
+            </a:pPr>
+            <a:r>
+              <a:rPr sz="1100" b="1" i="0">
+                <a:solidFill>
+                  <a:srgbClr val="262626"/>
+                </a:solidFill>
+                <a:latin typeface="Courier New"/>
+                <a:ea typeface="Courier New"/>
+              </a:rPr>
+              <a:t>CONTROL.LCTL = 1</a:t>
+            </a:r>
+          </a:p>
+          <a:p>
+            <a:pPr algn="l">
+              <a:spcAft>
+                <a:spcPts val="0"/>
+              </a:spcAft>
+            </a:pPr>
+            <a:r>
+              <a:rPr sz="950" b="0" i="0">
+                <a:solidFill>
+                  <a:srgbClr val="595959"/>
+                </a:solidFill>
+                <a:latin typeface="맑은 고딕"/>
+                <a:ea typeface="맑은 고딕"/>
+              </a:rPr>
+              <a:t>링크 활성</a:t>
+            </a:r>
+          </a:p>
+        </p:txBody>
+      </p:sp>
+      <p:sp>
+        <p:nvSpPr>
+          <p:cNvPr id="8" name="Oval 7"/>
+          <p:cNvSpPr/>
+          <p:nvPr/>
+        </p:nvSpPr>
+        <p:spPr>
+          <a:xfrm>
+            <a:off x="411480" y="2450591"/>
+            <a:ext cx="457200" cy="457200"/>
+          </a:xfrm>
+          <a:prstGeom prst="ellipse">
+            <a:avLst/>
+          </a:prstGeom>
+          <a:solidFill>
+            <a:srgbClr val="1E2761"/>
+          </a:solidFill>
+          <a:ln>
+            <a:noFill/>
+          </a:ln>
+          <a:effectLst/>
+        </p:spPr>
+        <p:style>
+          <a:lnRef idx="1">
+            <a:schemeClr val="accent1"/>
+          </a:lnRef>
+          <a:fillRef idx="3">
+            <a:schemeClr val="accent1"/>
+          </a:fillRef>
+          <a:effectRef idx="2">
+            <a:schemeClr val="accent1"/>
+          </a:effectRef>
+          <a:fontRef idx="minor">
+            <a:schemeClr val="lt1"/>
+          </a:fontRef>
+        </p:style>
+        <p:txBody>
+          <a:bodyPr rtlCol="0" anchor="ctr" wrap="square" lIns="0" rIns="0" tIns="0" bIns="0"/>
+          <a:lstStyle/>
+          <a:p>
+            <a:pPr algn="ctr">
+              <a:spcAft>
+                <a:spcPts val="300"/>
+              </a:spcAft>
+            </a:pPr>
+            <a:r>
+              <a:rPr sz="1200" b="1" i="0">
+                <a:solidFill>
+                  <a:srgbClr val="FFFFFF"/>
+                </a:solidFill>
+                <a:latin typeface="맑은 고딕"/>
+                <a:ea typeface="맑은 고딕"/>
+              </a:rPr>
+              <a:t>3</a:t>
+            </a:r>
+          </a:p>
+        </p:txBody>
+      </p:sp>
+      <p:sp>
+        <p:nvSpPr>
+          <p:cNvPr id="9" name="TextBox 8"/>
+          <p:cNvSpPr txBox="1"/>
+          <p:nvPr/>
+        </p:nvSpPr>
+        <p:spPr>
+          <a:xfrm>
+            <a:off x="960120" y="2414015"/>
+            <a:ext cx="4206240" cy="548640"/>
+          </a:xfrm>
+          <a:prstGeom prst="rect">
+            <a:avLst/>
+          </a:prstGeom>
+          <a:noFill/>
+        </p:spPr>
+        <p:txBody>
+          <a:bodyPr wrap="square" anchor="ctr" lIns="45720" rIns="45720">
+            <a:spAutoFit/>
+          </a:bodyPr>
+          <a:lstStyle/>
+          <a:p>
+            <a:pPr algn="l">
+              <a:spcAft>
+                <a:spcPts val="0"/>
+              </a:spcAft>
+            </a:pPr>
+            <a:r>
+              <a:rPr sz="1100" b="1" i="0">
+                <a:solidFill>
+                  <a:srgbClr val="262626"/>
+                </a:solidFill>
+                <a:latin typeface="맑은 고딕"/>
+                <a:ea typeface="맑은 고딕"/>
+              </a:rPr>
+              <a:t>T1STWEAKS · T1SPLCAEXT · T1SPMACTRL</a:t>
+            </a:r>
+          </a:p>
+          <a:p>
+            <a:pPr algn="l">
+              <a:spcAft>
+                <a:spcPts val="0"/>
+              </a:spcAft>
+            </a:pPr>
+            <a:r>
+              <a:rPr sz="950" b="0" i="0">
+                <a:solidFill>
+                  <a:srgbClr val="595959"/>
+                </a:solidFill>
+                <a:latin typeface="맑은 고딕"/>
+                <a:ea typeface="맑은 고딕"/>
+              </a:rPr>
+              <a:t>Clause 45 (Reg13/14)</a:t>
+            </a:r>
+          </a:p>
+        </p:txBody>
+      </p:sp>
+      <p:sp>
+        <p:nvSpPr>
+          <p:cNvPr id="10" name="Oval 9"/>
+          <p:cNvSpPr/>
+          <p:nvPr/>
+        </p:nvSpPr>
+        <p:spPr>
+          <a:xfrm>
+            <a:off x="411480" y="3118104"/>
+            <a:ext cx="457200" cy="457200"/>
+          </a:xfrm>
+          <a:prstGeom prst="ellipse">
+            <a:avLst/>
+          </a:prstGeom>
+          <a:solidFill>
+            <a:srgbClr val="1E2761"/>
+          </a:solidFill>
+          <a:ln>
+            <a:noFill/>
+          </a:ln>
+          <a:effectLst/>
+        </p:spPr>
+        <p:style>
+          <a:lnRef idx="1">
+            <a:schemeClr val="accent1"/>
+          </a:lnRef>
+          <a:fillRef idx="3">
+            <a:schemeClr val="accent1"/>
+          </a:fillRef>
+          <a:effectRef idx="2">
+            <a:schemeClr val="accent1"/>
+          </a:effectRef>
+          <a:fontRef idx="minor">
+            <a:schemeClr val="lt1"/>
+          </a:fontRef>
+        </p:style>
+        <p:txBody>
+          <a:bodyPr rtlCol="0" anchor="ctr" wrap="square" lIns="0" rIns="0" tIns="0" bIns="0"/>
+          <a:lstStyle/>
+          <a:p>
+            <a:pPr algn="ctr">
+              <a:spcAft>
+                <a:spcPts val="300"/>
+              </a:spcAft>
+            </a:pPr>
+            <a:r>
+              <a:rPr sz="1200" b="1" i="0">
+                <a:solidFill>
+                  <a:srgbClr val="FFFFFF"/>
+                </a:solidFill>
+                <a:latin typeface="맑은 고딕"/>
+                <a:ea typeface="맑은 고딕"/>
+              </a:rPr>
+              <a:t>4</a:t>
+            </a:r>
+          </a:p>
+        </p:txBody>
+      </p:sp>
+      <p:sp>
+        <p:nvSpPr>
+          <p:cNvPr id="11" name="TextBox 10"/>
+          <p:cNvSpPr txBox="1"/>
+          <p:nvPr/>
+        </p:nvSpPr>
+        <p:spPr>
+          <a:xfrm>
+            <a:off x="960120" y="3081528"/>
+            <a:ext cx="4206240" cy="548640"/>
+          </a:xfrm>
+          <a:prstGeom prst="rect">
+            <a:avLst/>
+          </a:prstGeom>
+          <a:noFill/>
+        </p:spPr>
+        <p:txBody>
+          <a:bodyPr wrap="square" anchor="ctr" lIns="45720" rIns="45720">
+            <a:spAutoFit/>
+          </a:bodyPr>
+          <a:lstStyle/>
+          <a:p>
+            <a:pPr algn="l">
+              <a:spcAft>
+                <a:spcPts val="0"/>
+              </a:spcAft>
+            </a:pPr>
+            <a:r>
+              <a:rPr sz="1100" b="1" i="0">
+                <a:solidFill>
+                  <a:srgbClr val="262626"/>
+                </a:solidFill>
+                <a:latin typeface="Courier New"/>
+                <a:ea typeface="Courier New"/>
+              </a:rPr>
+              <a:t>PLCACTRL1 = NCNT&lt;&lt;8 | ID</a:t>
+            </a:r>
+          </a:p>
+          <a:p>
+            <a:pPr algn="l">
+              <a:spcAft>
+                <a:spcPts val="0"/>
+              </a:spcAft>
+            </a:pPr>
+            <a:r>
+              <a:rPr sz="950" b="0" i="0">
+                <a:solidFill>
+                  <a:srgbClr val="595959"/>
+                </a:solidFill>
+                <a:latin typeface="맑은 고딕"/>
+                <a:ea typeface="맑은 고딕"/>
+              </a:rPr>
+              <a:t>노드 설정</a:t>
+            </a:r>
+          </a:p>
+        </p:txBody>
+      </p:sp>
+      <p:sp>
+        <p:nvSpPr>
+          <p:cNvPr id="12" name="Oval 11"/>
+          <p:cNvSpPr/>
+          <p:nvPr/>
+        </p:nvSpPr>
+        <p:spPr>
+          <a:xfrm>
+            <a:off x="411480" y="3785615"/>
+            <a:ext cx="457200" cy="457200"/>
+          </a:xfrm>
+          <a:prstGeom prst="ellipse">
+            <a:avLst/>
+          </a:prstGeom>
+          <a:solidFill>
+            <a:srgbClr val="1E2761"/>
+          </a:solidFill>
+          <a:ln>
+            <a:noFill/>
+          </a:ln>
+          <a:effectLst/>
+        </p:spPr>
+        <p:style>
+          <a:lnRef idx="1">
+            <a:schemeClr val="accent1"/>
+          </a:lnRef>
+          <a:fillRef idx="3">
+            <a:schemeClr val="accent1"/>
+          </a:fillRef>
+          <a:effectRef idx="2">
+            <a:schemeClr val="accent1"/>
+          </a:effectRef>
+          <a:fontRef idx="minor">
+            <a:schemeClr val="lt1"/>
+          </a:fontRef>
+        </p:style>
+        <p:txBody>
+          <a:bodyPr rtlCol="0" anchor="ctr" wrap="square" lIns="0" rIns="0" tIns="0" bIns="0"/>
+          <a:lstStyle/>
+          <a:p>
+            <a:pPr algn="ctr">
+              <a:spcAft>
+                <a:spcPts val="300"/>
+              </a:spcAft>
+            </a:pPr>
+            <a:r>
+              <a:rPr sz="1200" b="1" i="0">
+                <a:solidFill>
+                  <a:srgbClr val="FFFFFF"/>
+                </a:solidFill>
+                <a:latin typeface="맑은 고딕"/>
+                <a:ea typeface="맑은 고딕"/>
+              </a:rPr>
+              <a:t>5</a:t>
+            </a:r>
+          </a:p>
+        </p:txBody>
+      </p:sp>
+      <p:sp>
+        <p:nvSpPr>
+          <p:cNvPr id="13" name="TextBox 12"/>
+          <p:cNvSpPr txBox="1"/>
+          <p:nvPr/>
+        </p:nvSpPr>
+        <p:spPr>
+          <a:xfrm>
+            <a:off x="960120" y="3749039"/>
+            <a:ext cx="4206240" cy="548640"/>
+          </a:xfrm>
+          <a:prstGeom prst="rect">
+            <a:avLst/>
+          </a:prstGeom>
+          <a:noFill/>
+        </p:spPr>
+        <p:txBody>
+          <a:bodyPr wrap="square" anchor="ctr" lIns="45720" rIns="45720">
+            <a:spAutoFit/>
+          </a:bodyPr>
+          <a:lstStyle/>
+          <a:p>
+            <a:pPr algn="l">
+              <a:spcAft>
+                <a:spcPts val="0"/>
+              </a:spcAft>
+            </a:pPr>
+            <a:r>
+              <a:rPr sz="1100" b="1" i="0">
+                <a:solidFill>
+                  <a:srgbClr val="262626"/>
+                </a:solidFill>
+                <a:latin typeface="Courier New"/>
+                <a:ea typeface="Courier New"/>
+              </a:rPr>
+              <a:t>PLCACTRL0.EN = 1</a:t>
+            </a:r>
+          </a:p>
+          <a:p>
+            <a:pPr algn="l">
+              <a:spcAft>
+                <a:spcPts val="0"/>
+              </a:spcAft>
+            </a:pPr>
+            <a:r>
+              <a:rPr sz="950" b="0" i="0">
+                <a:solidFill>
+                  <a:srgbClr val="595959"/>
+                </a:solidFill>
+                <a:latin typeface="맑은 고딕"/>
+                <a:ea typeface="맑은 고딕"/>
+              </a:rPr>
+              <a:t>PLCA 켜기</a:t>
+            </a:r>
+          </a:p>
+        </p:txBody>
+      </p:sp>
+      <p:sp>
+        <p:nvSpPr>
+          <p:cNvPr id="14" name="Oval 13"/>
+          <p:cNvSpPr/>
+          <p:nvPr/>
+        </p:nvSpPr>
+        <p:spPr>
+          <a:xfrm>
+            <a:off x="411480" y="4453128"/>
+            <a:ext cx="457200" cy="457200"/>
+          </a:xfrm>
+          <a:prstGeom prst="ellipse">
+            <a:avLst/>
+          </a:prstGeom>
+          <a:solidFill>
+            <a:srgbClr val="1E2761"/>
+          </a:solidFill>
+          <a:ln>
+            <a:noFill/>
+          </a:ln>
+          <a:effectLst/>
+        </p:spPr>
+        <p:style>
+          <a:lnRef idx="1">
+            <a:schemeClr val="accent1"/>
+          </a:lnRef>
+          <a:fillRef idx="3">
+            <a:schemeClr val="accent1"/>
+          </a:fillRef>
+          <a:effectRef idx="2">
+            <a:schemeClr val="accent1"/>
+          </a:effectRef>
+          <a:fontRef idx="minor">
+            <a:schemeClr val="lt1"/>
+          </a:fontRef>
+        </p:style>
+        <p:txBody>
+          <a:bodyPr rtlCol="0" anchor="ctr" wrap="square" lIns="0" rIns="0" tIns="0" bIns="0"/>
+          <a:lstStyle/>
+          <a:p>
+            <a:pPr algn="ctr">
+              <a:spcAft>
+                <a:spcPts val="300"/>
+              </a:spcAft>
+            </a:pPr>
+            <a:r>
+              <a:rPr sz="1200" b="1" i="0">
+                <a:solidFill>
+                  <a:srgbClr val="FFFFFF"/>
+                </a:solidFill>
+                <a:latin typeface="맑은 고딕"/>
+                <a:ea typeface="맑은 고딕"/>
+              </a:rPr>
+              <a:t>6</a:t>
+            </a:r>
+          </a:p>
+        </p:txBody>
+      </p:sp>
+      <p:sp>
+        <p:nvSpPr>
+          <p:cNvPr id="15" name="TextBox 14"/>
+          <p:cNvSpPr txBox="1"/>
+          <p:nvPr/>
+        </p:nvSpPr>
+        <p:spPr>
+          <a:xfrm>
+            <a:off x="960120" y="4416552"/>
+            <a:ext cx="4206240" cy="548640"/>
+          </a:xfrm>
+          <a:prstGeom prst="rect">
+            <a:avLst/>
+          </a:prstGeom>
+          <a:noFill/>
+        </p:spPr>
+        <p:txBody>
+          <a:bodyPr wrap="square" anchor="ctr" lIns="45720" rIns="45720">
+            <a:spAutoFit/>
+          </a:bodyPr>
+          <a:lstStyle/>
+          <a:p>
+            <a:pPr algn="l">
+              <a:spcAft>
+                <a:spcPts val="0"/>
+              </a:spcAft>
+            </a:pPr>
+            <a:r>
+              <a:rPr sz="1100" b="1" i="0">
+                <a:solidFill>
+                  <a:srgbClr val="262626"/>
+                </a:solidFill>
+                <a:latin typeface="맑은 고딕"/>
+                <a:ea typeface="맑은 고딕"/>
+              </a:rPr>
+              <a:t>T1STXCCTL: RESETRQ → NORQ</a:t>
+            </a:r>
+          </a:p>
+          <a:p>
+            <a:pPr algn="l">
+              <a:spcAft>
+                <a:spcPts val="0"/>
+              </a:spcAft>
+            </a:pPr>
+            <a:r>
+              <a:rPr sz="950" b="0" i="0">
+                <a:solidFill>
+                  <a:srgbClr val="595959"/>
+                </a:solidFill>
+                <a:latin typeface="맑은 고딕"/>
+                <a:ea typeface="맑은 고딕"/>
+              </a:rPr>
+              <a:t>트랜시버 초기화</a:t>
+            </a:r>
+          </a:p>
+        </p:txBody>
+      </p:sp>
+      <p:sp>
+        <p:nvSpPr>
+          <p:cNvPr id="16" name="Oval 15"/>
+          <p:cNvSpPr/>
+          <p:nvPr/>
+        </p:nvSpPr>
+        <p:spPr>
+          <a:xfrm>
+            <a:off x="411480" y="5120640"/>
+            <a:ext cx="457200" cy="457200"/>
+          </a:xfrm>
+          <a:prstGeom prst="ellipse">
+            <a:avLst/>
+          </a:prstGeom>
+          <a:solidFill>
+            <a:srgbClr val="2E7D32"/>
+          </a:solidFill>
+          <a:ln>
+            <a:noFill/>
+          </a:ln>
+          <a:effectLst/>
+        </p:spPr>
+        <p:style>
+          <a:lnRef idx="1">
+            <a:schemeClr val="accent1"/>
+          </a:lnRef>
+          <a:fillRef idx="3">
+            <a:schemeClr val="accent1"/>
+          </a:fillRef>
+          <a:effectRef idx="2">
+            <a:schemeClr val="accent1"/>
+          </a:effectRef>
+          <a:fontRef idx="minor">
+            <a:schemeClr val="lt1"/>
+          </a:fontRef>
+        </p:style>
+        <p:txBody>
+          <a:bodyPr rtlCol="0" anchor="ctr" wrap="square" lIns="0" rIns="0" tIns="0" bIns="0"/>
+          <a:lstStyle/>
+          <a:p>
+            <a:pPr algn="ctr">
+              <a:spcAft>
+                <a:spcPts val="300"/>
+              </a:spcAft>
+            </a:pPr>
+            <a:r>
+              <a:rPr sz="1200" b="1" i="0">
+                <a:solidFill>
+                  <a:srgbClr val="FFFFFF"/>
+                </a:solidFill>
+                <a:latin typeface="맑은 고딕"/>
+                <a:ea typeface="맑은 고딕"/>
+              </a:rPr>
+              <a:t>7</a:t>
+            </a:r>
+          </a:p>
+        </p:txBody>
+      </p:sp>
+      <p:sp>
+        <p:nvSpPr>
+          <p:cNvPr id="17" name="TextBox 16"/>
+          <p:cNvSpPr txBox="1"/>
+          <p:nvPr/>
+        </p:nvSpPr>
+        <p:spPr>
+          <a:xfrm>
+            <a:off x="960120" y="5084064"/>
+            <a:ext cx="4206240" cy="548640"/>
+          </a:xfrm>
+          <a:prstGeom prst="rect">
+            <a:avLst/>
+          </a:prstGeom>
+          <a:noFill/>
+        </p:spPr>
+        <p:txBody>
+          <a:bodyPr wrap="square" anchor="ctr" lIns="45720" rIns="45720">
+            <a:spAutoFit/>
+          </a:bodyPr>
+          <a:lstStyle/>
+          <a:p>
+            <a:pPr algn="l">
+              <a:spcAft>
+                <a:spcPts val="0"/>
+              </a:spcAft>
+            </a:pPr>
+            <a:r>
+              <a:rPr sz="1100" b="1" i="0">
+                <a:solidFill>
+                  <a:srgbClr val="262626"/>
+                </a:solidFill>
+                <a:latin typeface="맑은 고딕"/>
+                <a:ea typeface="맑은 고딕"/>
+              </a:rPr>
+              <a:t>STATUS 링크 확인 → EthSM 통보</a:t>
+            </a:r>
+          </a:p>
+          <a:p>
+            <a:pPr algn="l">
+              <a:spcAft>
+                <a:spcPts val="0"/>
+              </a:spcAft>
+            </a:pPr>
+            <a:r>
+              <a:rPr sz="950" b="0" i="0">
+                <a:solidFill>
+                  <a:srgbClr val="595959"/>
+                </a:solidFill>
+                <a:latin typeface="맑은 고딕"/>
+                <a:ea typeface="맑은 고딕"/>
+              </a:rPr>
+              <a:t>GetLinkState = ACTIVE</a:t>
+            </a:r>
+          </a:p>
+        </p:txBody>
+      </p:sp>
+      <p:sp>
+        <p:nvSpPr>
+          <p:cNvPr id="18" name="Rounded Rectangle 17"/>
+          <p:cNvSpPr/>
+          <p:nvPr/>
+        </p:nvSpPr>
+        <p:spPr>
+          <a:xfrm>
+            <a:off x="5349240" y="777240"/>
+            <a:ext cx="4160520" cy="5120640"/>
+          </a:xfrm>
+          <a:prstGeom prst="roundRect">
+            <a:avLst>
+              <a:gd name="adj" fmla="val 8000"/>
+            </a:avLst>
+          </a:prstGeom>
+          <a:solidFill>
+            <a:srgbClr val="E8EBF5"/>
+          </a:solidFill>
+          <a:ln>
+            <a:noFill/>
+          </a:ln>
+          <a:effectLst/>
+        </p:spPr>
+        <p:style>
+          <a:lnRef idx="1">
+            <a:schemeClr val="accent1"/>
+          </a:lnRef>
+          <a:fillRef idx="3">
+            <a:schemeClr val="accent1"/>
+          </a:fillRef>
+          <a:effectRef idx="2">
+            <a:schemeClr val="accent1"/>
+          </a:effectRef>
+          <a:fontRef idx="minor">
+            <a:schemeClr val="lt1"/>
+          </a:fontRef>
+        </p:style>
+        <p:txBody>
+          <a:bodyPr rtlCol="0" anchor="t" wrap="square" lIns="146304" rIns="146304" tIns="146304" bIns="146304"/>
+          <a:lstStyle/>
+          <a:p>
+            <a:pPr algn="l">
+              <a:spcAft>
+                <a:spcPts val="800"/>
+              </a:spcAft>
+            </a:pPr>
+            <a:r>
+              <a:rPr sz="1350" b="1" i="0">
+                <a:solidFill>
+                  <a:srgbClr val="1E2761"/>
+                </a:solidFill>
+                <a:latin typeface="맑은 고딕"/>
+                <a:ea typeface="맑은 고딕"/>
+              </a:rPr>
+              <a:t>설계 체크리스트</a:t>
+            </a:r>
+          </a:p>
+          <a:p>
+            <a:pPr algn="l">
+              <a:spcAft>
+                <a:spcPts val="1400"/>
+              </a:spcAft>
+            </a:pPr>
+            <a:r>
+              <a:rPr sz="1250" b="1" i="0">
+                <a:solidFill>
+                  <a:srgbClr val="262626"/>
+                </a:solidFill>
+                <a:latin typeface="맑은 고딕"/>
+                <a:ea typeface="맑은 고딕"/>
+              </a:rPr>
+              <a:t>① 네트워크 설정표: </a:t>
+            </a:r>
+            <a:r>
+              <a:rPr sz="1250" b="0" i="0">
+                <a:solidFill>
+                  <a:srgbClr val="262626"/>
+                </a:solidFill>
+                <a:latin typeface="맑은 고딕"/>
+                <a:ea typeface="맑은 고딕"/>
+              </a:rPr>
+              <a:t>ECU별 ID, 코디네이터 1개, NCNT = 실제 노드 수, 전 노드 동일 TO_TIMER</a:t>
+            </a:r>
+          </a:p>
+          <a:p>
+            <a:pPr algn="l">
+              <a:spcAft>
+                <a:spcPts val="1400"/>
+              </a:spcAft>
+            </a:pPr>
+            <a:r>
+              <a:rPr sz="1250" b="1" i="0">
+                <a:solidFill>
+                  <a:srgbClr val="262626"/>
+                </a:solidFill>
+                <a:latin typeface="맑은 고딕"/>
+                <a:ea typeface="맑은 고딕"/>
+              </a:rPr>
+              <a:t>② 최악 지연 계산: </a:t>
+            </a:r>
+            <a:r>
+              <a:rPr sz="1250" b="0" i="0">
+                <a:solidFill>
+                  <a:srgbClr val="262626"/>
+                </a:solidFill>
+                <a:latin typeface="맑은 고딕"/>
+                <a:ea typeface="맑은 고딕"/>
+              </a:rPr>
+              <a:t>요구 주기와 비교, 큰 프레임(DoIP/OTA) 분리</a:t>
+            </a:r>
+          </a:p>
+          <a:p>
+            <a:pPr algn="l">
+              <a:spcAft>
+                <a:spcPts val="1400"/>
+              </a:spcAft>
+            </a:pPr>
+            <a:r>
+              <a:rPr sz="1250" b="1" i="0">
+                <a:solidFill>
+                  <a:srgbClr val="262626"/>
+                </a:solidFill>
+                <a:latin typeface="맑은 고딕"/>
+                <a:ea typeface="맑은 고딕"/>
+              </a:rPr>
+              <a:t>③ 코디네이터 고장: </a:t>
+            </a:r>
+            <a:r>
+              <a:rPr sz="1250" b="0" i="0">
+                <a:solidFill>
+                  <a:srgbClr val="262626"/>
+                </a:solidFill>
+                <a:latin typeface="맑은 고딕"/>
+                <a:ea typeface="맑은 고딕"/>
+              </a:rPr>
+              <a:t>BEACON 소실 → CSMA/CD 폴백(PST = 0). FuSa 안전 상태 전이 조건으로 정의할지 결정</a:t>
+            </a:r>
+          </a:p>
+          <a:p>
+            <a:pPr algn="l">
+              <a:spcAft>
+                <a:spcPts val="1400"/>
+              </a:spcAft>
+            </a:pPr>
+            <a:r>
+              <a:rPr sz="1250" b="1" i="0">
+                <a:solidFill>
+                  <a:srgbClr val="262626"/>
+                </a:solidFill>
+                <a:latin typeface="맑은 고딕"/>
+                <a:ea typeface="맑은 고딕"/>
+              </a:rPr>
+              <a:t>④ 진단 루틴: </a:t>
+            </a:r>
+            <a:r>
+              <a:rPr sz="1250" b="0" i="0">
+                <a:solidFill>
+                  <a:srgbClr val="262626"/>
+                </a:solidFill>
+                <a:latin typeface="맑은 고딕"/>
+                <a:ea typeface="맑은 고딕"/>
+              </a:rPr>
+              <a:t>PLCADIAG · 충돌 카운터를 주기적으로 읽어 Dem 보고</a:t>
+            </a:r>
+          </a:p>
+          <a:p>
+            <a:pPr algn="l">
+              <a:spcAft>
+                <a:spcPts val="300"/>
+              </a:spcAft>
+            </a:pPr>
+            <a:r>
+              <a:rPr sz="1250" b="1" i="0">
+                <a:solidFill>
+                  <a:srgbClr val="262626"/>
+                </a:solidFill>
+                <a:latin typeface="맑은 고딕"/>
+                <a:ea typeface="맑은 고딕"/>
+              </a:rPr>
+              <a:t>⑤ MCAL 검증: </a:t>
+            </a:r>
+            <a:r>
+              <a:rPr sz="1250" b="0" i="0">
+                <a:solidFill>
+                  <a:srgbClr val="C00000"/>
+                </a:solidFill>
+                <a:latin typeface="맑은 고딕"/>
+                <a:ea typeface="맑은 고딕"/>
+              </a:rPr>
+              <a:t>샘플에서 찾은 C1~C6가 양산 MCAL에서 고쳐졌는지 릴리스 노트·코드로 확인</a:t>
             </a:r>
           </a:p>
         </p:txBody>
